--- a/MAS512_Assignment_2_gr9.pptx
+++ b/MAS512_Assignment_2_gr9.pptx
@@ -18,14 +18,14 @@
     <p:sldId id="263" r:id="rId12"/>
     <p:sldId id="264" r:id="rId13"/>
     <p:sldId id="265" r:id="rId14"/>
-    <p:sldId id="266" r:id="rId15"/>
-    <p:sldId id="267" r:id="rId16"/>
-    <p:sldId id="268" r:id="rId17"/>
-    <p:sldId id="269" r:id="rId18"/>
-    <p:sldId id="270" r:id="rId19"/>
-    <p:sldId id="271" r:id="rId20"/>
-    <p:sldId id="272" r:id="rId21"/>
-    <p:sldId id="273" r:id="rId22"/>
+    <p:sldId id="274" r:id="rId15"/>
+    <p:sldId id="266" r:id="rId16"/>
+    <p:sldId id="267" r:id="rId17"/>
+    <p:sldId id="268" r:id="rId18"/>
+    <p:sldId id="269" r:id="rId19"/>
+    <p:sldId id="270" r:id="rId20"/>
+    <p:sldId id="271" r:id="rId21"/>
+    <p:sldId id="272" r:id="rId22"/>
   </p:sldIdLst>
   <p:sldSz cx="12192000" cy="5668963"/>
   <p:notesSz cx="5668963" cy="12192000"/>
@@ -298,7 +298,9 @@
           <a:bodyPr/>
           <a:lstStyle/>
           <a:p>
-            <a:endParaRPr lang="en-US" dirty="0"/>
+            <a:r>
+              <a:t>Welcome. We are Group 9. Our assignment covers four parts: camera geometry, LiDAR tracking, camera-LiDAR fusion on KITTI, and autonomous navigation with slip estimation in Webots.</a:t>
+            </a:r>
           </a:p>
         </p:txBody>
       </p:sp>
@@ -382,7 +384,9 @@
           <a:bodyPr/>
           <a:lstStyle/>
           <a:p>
-            <a:endParaRPr lang="en-US" dirty="0"/>
+            <a:r>
+              <a:t>Over time the load swings mainly along Y, with a span of 0.785 m. X and Z change very little. That is what a pendulum should look like.</a:t>
+            </a:r>
           </a:p>
         </p:txBody>
       </p:sp>
@@ -441,18 +445,6 @@
       </p:grpSpPr>
       <p:sp>
         <p:nvSpPr>
-          <p:cNvPr id="2" name="Slide Image Placeholder 1"/>
-          <p:cNvSpPr>
-            <a:spLocks noGrp="1" noRot="1" noChangeAspect="1"/>
-          </p:cNvSpPr>
-          <p:nvPr>
-            <p:ph type="sldImg"/>
-          </p:nvPr>
-        </p:nvSpPr>
-        <p:spPr/>
-      </p:sp>
-      <p:sp>
-        <p:nvSpPr>
           <p:cNvPr id="3" name="Notes Placeholder 2"/>
           <p:cNvSpPr>
             <a:spLocks noGrp="1"/>
@@ -466,39 +458,13 @@
           <a:bodyPr/>
           <a:lstStyle/>
           <a:p>
-            <a:endParaRPr lang="en-US" dirty="0"/>
-          </a:p>
-        </p:txBody>
-      </p:sp>
-      <p:sp>
-        <p:nvSpPr>
-          <p:cNvPr id="4" name="Slide Number Placeholder 3"/>
-          <p:cNvSpPr>
-            <a:spLocks noGrp="1"/>
-          </p:cNvSpPr>
-          <p:nvPr>
-            <p:ph type="sldNum" sz="quarter" idx="10"/>
-          </p:nvPr>
-        </p:nvSpPr>
-        <p:spPr/>
-        <p:txBody>
-          <a:bodyPr/>
-          <a:lstStyle/>
-          <a:p>
-            <a:fld id="{F7021451-1387-4CA6-816F-3879F97B5CBC}" type="slidenum">
-              <a:rPr lang="en-US"/>
-              <a:t>11</a:t>
-            </a:fld>
-            <a:endParaRPr lang="en-US"/>
+            <a:r>
+              <a:t>KISS-ICP stands for Keep It Small and Simple. It is LiDAR odometry. Each new scan is downsampled into voxels, a constant-velocity model predicts the next pose, then point-to-point ICP matches points to the nearest map points and solves for rotation and translation with a robust kernel. The scan is added to the local map, and the matching threshold adapts, so it needs almost no tuning. It is used for robot and car odometry and as the front end of SLAM. Drawbacks: it drifts because there is no loop closure, it struggles in repetitive or sparse scenes, it assumes the world is static, and it only gives the sensor pose.</a:t>
+            </a:r>
           </a:p>
         </p:txBody>
       </p:sp>
     </p:spTree>
-    <p:extLst>
-      <p:ext uri="{BB962C8B-B14F-4D97-AF65-F5344CB8AC3E}">
-        <p14:creationId xmlns:p14="http://schemas.microsoft.com/office/powerpoint/2010/main" val="1024086991"/>
-      </p:ext>
-    </p:extLst>
   </p:cSld>
   <p:clrMapOvr>
     <a:masterClrMapping/>
@@ -550,7 +516,9 @@
           <a:bodyPr/>
           <a:lstStyle/>
           <a:p>
-            <a:endParaRPr lang="en-US" dirty="0"/>
+            <a:r>
+              <a:t>Our result: the maximum sensor translation was 4.6 mm and the maximum rotation 0.019 degrees. The sensor was standing still, so this is the correct answer. Near-zero sensor motion does not mean the load is still: KISS-ICP tracks the sensor, DBSCAN tracks the load. We used the poses to express the load in the first scan's frame.</a:t>
+            </a:r>
           </a:p>
         </p:txBody>
       </p:sp>
@@ -634,7 +602,9 @@
           <a:bodyPr/>
           <a:lstStyle/>
           <a:p>
-            <a:endParaRPr lang="en-US" dirty="0"/>
+            <a:r>
+              <a:t>KITTI was recorded with two grayscale and two colour cameras, a Velodyne HDL-64E LiDAR and GPS/IMU. Each frame ID has an image, a point cloud, a calibration file and labels. To project LiDAR into the image we apply Tr_velo_to_cam to move into camera coordinates, R0_rect to rectify, and P2 to project onto the left colour image, then divide by the third component.</a:t>
+            </a:r>
           </a:p>
         </p:txBody>
       </p:sp>
@@ -718,7 +688,9 @@
           <a:bodyPr/>
           <a:lstStyle/>
           <a:p>
-            <a:endParaRPr lang="en-US" dirty="0"/>
+            <a:r>
+              <a:t>Here are four of the five frames. LiDAR points are coloured by range using the colour bar, green boxes are YOLO detections and cyan dashed boxes are the KITTI labels. The distance is printed next to each box. The fifth frame is on the next slide.</a:t>
+            </a:r>
           </a:p>
         </p:txBody>
       </p:sp>
@@ -802,7 +774,9 @@
           <a:bodyPr/>
           <a:lstStyle/>
           <a:p>
-            <a:endParaRPr lang="en-US" dirty="0"/>
+            <a:r>
+              <a:t>The range estimate is the 20th percentile of LiDAR distances inside the box. That picks the near surface of the object and ignores background points. Four of five boxes matched a label, with a mean absolute error of 1.82 m. LiDAR is lower than ground truth every time, so this is a systematic bias: LiDAR hits the front of the car, while the KITTI label is the centre of the 3D box, about half a car length further away. Frame 000029 had no matching label, so it is excluded.</a:t>
+            </a:r>
           </a:p>
         </p:txBody>
       </p:sp>
@@ -886,7 +860,9 @@
           <a:bodyPr/>
           <a:lstStyle/>
           <a:p>
-            <a:endParaRPr lang="en-US" dirty="0"/>
+            <a:r>
+              <a:t>In Webots we used a Supervisor controller that follows five known waypoints with GPS and orientation. If the LiDAR sees something closer than 0.65 m in front, the robot turns and holds the turn for 1.2 seconds. To be clear: the route is known, and the camera is logged but not used to detect the goal.</a:t>
+            </a:r>
           </a:p>
         </p:txBody>
       </p:sp>
@@ -970,7 +946,9 @@
           <a:bodyPr/>
           <a:lstStyle/>
           <a:p>
-            <a:endParaRPr lang="en-US" dirty="0"/>
+            <a:r>
+              <a:t>Slip is the encoder speed minus the true speed, divided by the true speed. The encoder speed is wheel radius 0.1 m times the mean wheel angular speed. The true speed comes from the Supervisor. We only compute slip when the true speed is at least 0.05 m/s, to avoid dividing by near zero. Every run logs GPS, IMU, encoders, LiDAR and camera images.</a:t>
+            </a:r>
           </a:p>
         </p:txBody>
       </p:sp>
@@ -1054,7 +1032,9 @@
           <a:bodyPr/>
           <a:lstStyle/>
           <a:p>
-            <a:endParaRPr lang="en-US" dirty="0"/>
+            <a:r>
+              <a:t>We ran three trials at friction 0.12 and three at friction 1.0. All six reached the goal. Mean absolute slip dropped from 6.76 percent to 0.35 percent, a 94.8 percent reduction, while time and distance stayed almost the same. The plot colours are clipped at plus or minus 1, so typical slip looks grey; the table shows the real difference.</a:t>
+            </a:r>
           </a:p>
         </p:txBody>
       </p:sp>
@@ -1138,7 +1118,9 @@
           <a:bodyPr/>
           <a:lstStyle/>
           <a:p>
-            <a:endParaRPr lang="en-US" dirty="0"/>
+            <a:r>
+              <a:t>The work goes from one sensor to another, then combines them, and ends with a robot that uses sensors to drive. Q1 camera, Q2 LiDAR, Q3 fusion, Q4 Webots. We reuse the Assignment 1 YOLO model where it fits.</a:t>
+            </a:r>
           </a:p>
         </p:txBody>
       </p:sp>
@@ -1222,7 +1204,9 @@
           <a:bodyPr/>
           <a:lstStyle/>
           <a:p>
-            <a:endParaRPr lang="en-US" dirty="0"/>
+            <a:r>
+              <a:t>To get 3D from a camera we need the pixel position and the depth. YOLO gives the box, the box centre is (u, v), the depth camera gives Z. The pinhole model then gives X and Y using the focal lengths and the principal point. YOLO found the load in 889 of 900 frames.</a:t>
+            </a:r>
           </a:p>
         </p:txBody>
       </p:sp>
@@ -1306,7 +1290,9 @@
           <a:bodyPr/>
           <a:lstStyle/>
           <a:p>
-            <a:endParaRPr lang="en-US" dirty="0"/>
+            <a:r>
+              <a:t>Depth cameras often return zero or spikes. When the centre pixel had no depth, we took the nearest valid pixel inside the box, which filled all 336 gaps. Then a 7-sample rolling median flagged jumps above 0.5 m, and we interpolated those 70 samples.</a:t>
+            </a:r>
           </a:p>
         </p:txBody>
       </p:sp>
@@ -1390,7 +1376,9 @@
           <a:bodyPr/>
           <a:lstStyle/>
           <a:p>
-            <a:endParaRPr lang="en-US" dirty="0"/>
+            <a:r>
+              <a:t>Same pixels and same depth, two matrices. Z is identical in both. Only X and Y change, because the matrices have different focal lengths and principal points. With M_int the load ends up about 1.8 m to the side, which does not match the video.</a:t>
+            </a:r>
           </a:p>
         </p:txBody>
       </p:sp>
@@ -1474,7 +1462,9 @@
           <a:bodyPr/>
           <a:lstStyle/>
           <a:p>
-            <a:endParaRPr lang="en-US" dirty="0"/>
+            <a:r>
+              <a:t>Our frames are 640 by 480, so the centre is about (320, 240). M_d's principal point (325, 235) matches that. M_int's (979, 540) is the centre of a 1920 by 1080 image, so it was calibrated at a different resolution. Second reason: the expected focal length from the lecture is about 1285 px, and M_d's 1342 is closer than M_int's 1391. M_int could be used if rescaled by 640/1920.</a:t>
+            </a:r>
           </a:p>
         </p:txBody>
       </p:sp>
@@ -1558,7 +1548,9 @@
           <a:bodyPr/>
           <a:lstStyle/>
           <a:p>
-            <a:endParaRPr lang="en-US" dirty="0"/>
+            <a:r>
+              <a:t>We trained a linear regression from o1 to o2: 711 training and 178 test samples. R squared is 1.000 and RMSE is essentially zero. That is expected, not overfitting: both o1 and o2 are linear functions of the same (u, v, Z), so the mapping between them is exactly linear.</a:t>
+            </a:r>
           </a:p>
         </p:txBody>
       </p:sp>
@@ -1642,7 +1634,9 @@
           <a:bodyPr/>
           <a:lstStyle/>
           <a:p>
-            <a:endParaRPr lang="en-US" dirty="0"/>
+            <a:r>
+              <a:t>The mean Euclidean distance between o1 and o2 is 1.72 m, and between o1 and the predicted o2* it is 1.71 m. They match because the model reproduces o2. This is the gap between two coordinate definitions, mostly caused by the wrong principal point. It is not an accuracy error.</a:t>
+            </a:r>
           </a:p>
         </p:txBody>
       </p:sp>
@@ -1726,7 +1720,9 @@
           <a:bodyPr/>
           <a:lstStyle/>
           <a:p>
-            <a:endParaRPr lang="en-US" dirty="0"/>
+            <a:r>
+              <a:t>For the LiDAR part we decoded the Ouster scans, cropped the region where the load hangs, and used DBSCAN to find the compact cluster of the load. DBSCAN groups dense points and needs no fixed number of clusters. The mean XYZ of the cluster is the load centre. It worked in 99 of 99 scans.</a:t>
+            </a:r>
           </a:p>
         </p:txBody>
       </p:sp>
@@ -4114,6 +4110,1769 @@
 
 <file path=ppt/slides/slide11.xml><?xml version="1.0" encoding="utf-8"?>
 <p:sld xmlns:a="http://schemas.openxmlformats.org/drawingml/2006/main" xmlns:r="http://schemas.openxmlformats.org/officeDocument/2006/relationships" xmlns:p="http://schemas.openxmlformats.org/presentationml/2006/main">
+  <p:cSld name="Slide 9">
+    <p:bg>
+      <p:bgPr>
+        <a:solidFill>
+          <a:srgbClr val="F7F9FC"/>
+        </a:solidFill>
+        <a:effectLst/>
+      </p:bgPr>
+    </p:bg>
+    <p:spTree>
+      <p:nvGrpSpPr>
+        <p:cNvPr id="1" name=""/>
+        <p:cNvGrpSpPr/>
+        <p:nvPr/>
+      </p:nvGrpSpPr>
+      <p:grpSpPr>
+        <a:xfrm>
+          <a:off x="0" y="0"/>
+          <a:ext cx="0" cy="0"/>
+          <a:chOff x="0" y="0"/>
+          <a:chExt cx="0" cy="0"/>
+        </a:xfrm>
+      </p:grpSpPr>
+      <p:sp>
+        <p:nvSpPr>
+          <p:cNvPr id="2" name="Shape 0"/>
+          <p:cNvSpPr/>
+          <p:nvPr/>
+        </p:nvSpPr>
+        <p:spPr>
+          <a:xfrm>
+            <a:off x="0" y="0"/>
+            <a:ext cx="12191695" cy="36576"/>
+          </a:xfrm>
+          <a:prstGeom prst="rect">
+            <a:avLst/>
+          </a:prstGeom>
+          <a:solidFill>
+            <a:srgbClr val="3477EF"/>
+          </a:solidFill>
+          <a:ln w="12700">
+            <a:solidFill>
+              <a:srgbClr val="3477EF">
+                <a:alpha val="0"/>
+              </a:srgbClr>
+            </a:solidFill>
+            <a:prstDash val="solid"/>
+          </a:ln>
+        </p:spPr>
+        <p:txBody>
+          <a:bodyPr/>
+          <a:lstStyle/>
+          <a:p>
+            <a:endParaRPr lang="nb-NO"/>
+          </a:p>
+        </p:txBody>
+      </p:sp>
+      <p:sp>
+        <p:nvSpPr>
+          <p:cNvPr id="3" name="Shape 1"/>
+          <p:cNvSpPr/>
+          <p:nvPr/>
+        </p:nvSpPr>
+        <p:spPr>
+          <a:xfrm>
+            <a:off x="502920" y="228600"/>
+            <a:ext cx="694944" cy="338328"/>
+          </a:xfrm>
+          <a:prstGeom prst="roundRect">
+            <a:avLst>
+              <a:gd name="adj" fmla="val 35135"/>
+            </a:avLst>
+          </a:prstGeom>
+          <a:solidFill>
+            <a:srgbClr val="3477EF"/>
+          </a:solidFill>
+          <a:ln w="12700">
+            <a:solidFill>
+              <a:srgbClr val="3477EF">
+                <a:alpha val="0"/>
+              </a:srgbClr>
+            </a:solidFill>
+            <a:prstDash val="solid"/>
+          </a:ln>
+        </p:spPr>
+        <p:txBody>
+          <a:bodyPr/>
+          <a:lstStyle/>
+          <a:p>
+            <a:endParaRPr lang="nb-NO"/>
+          </a:p>
+        </p:txBody>
+      </p:sp>
+      <p:sp>
+        <p:nvSpPr>
+          <p:cNvPr id="4" name="Text 2"/>
+          <p:cNvSpPr txBox="1"/>
+          <p:nvPr/>
+        </p:nvSpPr>
+        <p:spPr>
+          <a:xfrm>
+            <a:off x="557784" y="237744"/>
+            <a:ext cx="585216" cy="320040"/>
+          </a:xfrm>
+          <a:prstGeom prst="rect">
+            <a:avLst/>
+          </a:prstGeom>
+          <a:noFill/>
+          <a:ln/>
+        </p:spPr>
+        <p:txBody>
+          <a:bodyPr wrap="square" lIns="0" tIns="0" rIns="0" bIns="0" rtlCol="0" anchor="ctr">
+            <a:normAutofit/>
+          </a:bodyPr>
+          <a:lstStyle/>
+          <a:p>
+            <a:pPr marL="0" indent="0" algn="ctr">
+              <a:buNone/>
+            </a:pPr>
+            <a:r>
+              <a:rPr lang="en-US" sz="1200" b="1" dirty="0">
+                <a:solidFill>
+                  <a:srgbClr val="FFFFFF"/>
+                </a:solidFill>
+                <a:latin typeface="Aptos" pitchFamily="34" charset="0"/>
+                <a:ea typeface="Aptos" pitchFamily="34" charset="-122"/>
+                <a:cs typeface="Aptos" pitchFamily="34" charset="-120"/>
+              </a:rPr>
+              <a:t>Q2</a:t>
+            </a:r>
+            <a:endParaRPr lang="en-US" sz="1200" dirty="0"/>
+          </a:p>
+        </p:txBody>
+      </p:sp>
+      <p:sp>
+        <p:nvSpPr>
+          <p:cNvPr id="5" name="Text 3"/>
+          <p:cNvSpPr txBox="1"/>
+          <p:nvPr/>
+        </p:nvSpPr>
+        <p:spPr>
+          <a:xfrm>
+            <a:off x="1325880" y="173736"/>
+            <a:ext cx="9646920" cy="429768"/>
+          </a:xfrm>
+          <a:prstGeom prst="rect">
+            <a:avLst/>
+          </a:prstGeom>
+          <a:noFill/>
+          <a:ln/>
+        </p:spPr>
+        <p:txBody>
+          <a:bodyPr wrap="square" lIns="0" tIns="0" rIns="0" bIns="0" rtlCol="0" anchor="ctr">
+            <a:normAutofit/>
+          </a:bodyPr>
+          <a:lstStyle/>
+          <a:p>
+            <a:pPr marL="0" indent="0" algn="l">
+              <a:buNone/>
+            </a:pPr>
+            <a:r>
+              <a:rPr lang="en-US" sz="2500" b="1" dirty="0">
+                <a:solidFill>
+                  <a:srgbClr val="142E53"/>
+                </a:solidFill>
+                <a:latin typeface="Aptos Display" pitchFamily="34" charset="0"/>
+                <a:ea typeface="Aptos Display" pitchFamily="34" charset="-122"/>
+                <a:cs typeface="Aptos Display" pitchFamily="34" charset="-120"/>
+              </a:rPr>
+              <a:t>Q2(b) How KISS-ICP works</a:t>
+            </a:r>
+            <a:endParaRPr lang="en-US" sz="2500" dirty="0"/>
+          </a:p>
+        </p:txBody>
+      </p:sp>
+      <p:sp>
+        <p:nvSpPr>
+          <p:cNvPr id="6" name="Text 4"/>
+          <p:cNvSpPr txBox="1"/>
+          <p:nvPr/>
+        </p:nvSpPr>
+        <p:spPr>
+          <a:xfrm>
+            <a:off x="576072" y="658368"/>
+            <a:ext cx="11018520" cy="256032"/>
+          </a:xfrm>
+          <a:prstGeom prst="rect">
+            <a:avLst/>
+          </a:prstGeom>
+          <a:noFill/>
+          <a:ln/>
+        </p:spPr>
+        <p:txBody>
+          <a:bodyPr wrap="square" lIns="0" tIns="0" rIns="0" bIns="0" rtlCol="0" anchor="ctr">
+            <a:normAutofit/>
+          </a:bodyPr>
+          <a:lstStyle/>
+          <a:p>
+            <a:pPr marL="0" indent="0" algn="ctr">
+              <a:buNone/>
+            </a:pPr>
+            <a:r>
+              <a:rPr lang="en-US" sz="1000" dirty="0">
+                <a:solidFill>
+                  <a:srgbClr val="58687C"/>
+                </a:solidFill>
+                <a:latin typeface="Aptos" pitchFamily="34" charset="0"/>
+                <a:ea typeface="Aptos" pitchFamily="34" charset="-122"/>
+                <a:cs typeface="Aptos" pitchFamily="34" charset="-120"/>
+              </a:rPr>
+              <a:t>LiDAR odometry: align each new scan to a local map to estimate how the sensor moved</a:t>
+            </a:r>
+            <a:endParaRPr lang="en-US" sz="1000" dirty="0"/>
+          </a:p>
+        </p:txBody>
+      </p:sp>
+      <p:sp>
+        <p:nvSpPr>
+          <p:cNvPr id="7" name="Shape 5"/>
+          <p:cNvSpPr/>
+          <p:nvPr/>
+        </p:nvSpPr>
+        <p:spPr>
+          <a:xfrm>
+            <a:off x="521208" y="5440680"/>
+            <a:ext cx="11137392" cy="0"/>
+          </a:xfrm>
+          <a:prstGeom prst="line">
+            <a:avLst/>
+          </a:prstGeom>
+          <a:noFill/>
+          <a:ln w="6350">
+            <a:solidFill>
+              <a:srgbClr val="D7E2EE"/>
+            </a:solidFill>
+            <a:prstDash val="solid"/>
+          </a:ln>
+        </p:spPr>
+        <p:txBody>
+          <a:bodyPr/>
+          <a:lstStyle/>
+          <a:p>
+            <a:endParaRPr lang="nb-NO"/>
+          </a:p>
+        </p:txBody>
+      </p:sp>
+      <p:sp>
+        <p:nvSpPr>
+          <p:cNvPr id="8" name="Text 6"/>
+          <p:cNvSpPr txBox="1"/>
+          <p:nvPr/>
+        </p:nvSpPr>
+        <p:spPr>
+          <a:xfrm>
+            <a:off x="502920" y="5495227"/>
+            <a:ext cx="6035040" cy="137160"/>
+          </a:xfrm>
+          <a:prstGeom prst="rect">
+            <a:avLst/>
+          </a:prstGeom>
+          <a:noFill/>
+          <a:ln/>
+        </p:spPr>
+        <p:txBody>
+          <a:bodyPr wrap="square" lIns="0" tIns="0" rIns="0" bIns="0" rtlCol="0" anchor="ctr">
+            <a:normAutofit/>
+          </a:bodyPr>
+          <a:lstStyle/>
+          <a:p>
+            <a:pPr marL="0" indent="0" algn="l">
+              <a:buNone/>
+            </a:pPr>
+            <a:r>
+              <a:rPr lang="en-US" sz="750" dirty="0">
+                <a:solidFill>
+                  <a:srgbClr val="8A9AAA"/>
+                </a:solidFill>
+                <a:latin typeface="Aptos" pitchFamily="34" charset="0"/>
+                <a:ea typeface="Aptos" pitchFamily="34" charset="-122"/>
+                <a:cs typeface="Aptos" pitchFamily="34" charset="-120"/>
+              </a:rPr>
+              <a:t>MAS512  |  Assignment 2  |  Group 9</a:t>
+            </a:r>
+            <a:endParaRPr lang="en-US" sz="750" dirty="0"/>
+          </a:p>
+        </p:txBody>
+      </p:sp>
+      <p:sp>
+        <p:nvSpPr>
+          <p:cNvPr id="9" name="Text 7"/>
+          <p:cNvSpPr txBox="1"/>
+          <p:nvPr/>
+        </p:nvSpPr>
+        <p:spPr>
+          <a:xfrm>
+            <a:off x="11475720" y="173736"/>
+            <a:ext cx="237744" cy="219456"/>
+          </a:xfrm>
+          <a:prstGeom prst="rect">
+            <a:avLst/>
+          </a:prstGeom>
+          <a:noFill/>
+          <a:ln/>
+        </p:spPr>
+        <p:txBody>
+          <a:bodyPr wrap="square" lIns="0" tIns="0" rIns="0" bIns="0" rtlCol="0" anchor="ctr">
+            <a:normAutofit/>
+          </a:bodyPr>
+          <a:lstStyle/>
+          <a:p>
+            <a:pPr marL="0" indent="0" algn="ctr">
+              <a:buNone/>
+            </a:pPr>
+            <a:r>
+              <a:rPr lang="en-US" sz="1100" dirty="0">
+                <a:solidFill>
+                  <a:srgbClr val="142E53"/>
+                </a:solidFill>
+                <a:latin typeface="Aptos" pitchFamily="34" charset="0"/>
+                <a:ea typeface="Aptos" pitchFamily="34" charset="-122"/>
+                <a:cs typeface="Aptos" pitchFamily="34" charset="-120"/>
+              </a:rPr>
+              <a:t>11</a:t>
+            </a:r>
+            <a:endParaRPr lang="en-US" sz="1100" dirty="0"/>
+          </a:p>
+        </p:txBody>
+      </p:sp>
+      <p:sp>
+        <p:nvSpPr>
+          <p:cNvPr id="10" name="Shape 8"/>
+          <p:cNvSpPr/>
+          <p:nvPr/>
+        </p:nvSpPr>
+        <p:spPr>
+          <a:xfrm>
+            <a:off x="603504" y="1188720"/>
+            <a:ext cx="4663440" cy="3858768"/>
+          </a:xfrm>
+          <a:prstGeom prst="roundRect">
+            <a:avLst>
+              <a:gd name="adj" fmla="val 3081"/>
+            </a:avLst>
+          </a:prstGeom>
+          <a:solidFill>
+            <a:srgbClr val="E1F5EF"/>
+          </a:solidFill>
+          <a:ln w="12700">
+            <a:solidFill>
+              <a:srgbClr val="E1F5EF">
+                <a:alpha val="0"/>
+              </a:srgbClr>
+            </a:solidFill>
+            <a:prstDash val="solid"/>
+          </a:ln>
+        </p:spPr>
+        <p:txBody>
+          <a:bodyPr/>
+          <a:lstStyle/>
+          <a:p>
+            <a:endParaRPr lang="nb-NO"/>
+          </a:p>
+        </p:txBody>
+      </p:sp>
+      <p:sp>
+        <p:nvSpPr>
+          <p:cNvPr id="11" name="Shape 9"/>
+          <p:cNvSpPr/>
+          <p:nvPr/>
+        </p:nvSpPr>
+        <p:spPr>
+          <a:xfrm>
+            <a:off x="804672" y="1389888"/>
+            <a:ext cx="4261104" cy="740664"/>
+          </a:xfrm>
+          <a:prstGeom prst="roundRect">
+            <a:avLst>
+              <a:gd name="adj" fmla="val 16049"/>
+            </a:avLst>
+          </a:prstGeom>
+          <a:solidFill>
+            <a:srgbClr val="FFFFFF"/>
+          </a:solidFill>
+          <a:ln w="12700">
+            <a:solidFill>
+              <a:srgbClr val="FFFFFF">
+                <a:alpha val="0"/>
+              </a:srgbClr>
+            </a:solidFill>
+            <a:prstDash val="solid"/>
+          </a:ln>
+        </p:spPr>
+        <p:txBody>
+          <a:bodyPr/>
+          <a:lstStyle/>
+          <a:p>
+            <a:endParaRPr lang="nb-NO"/>
+          </a:p>
+        </p:txBody>
+      </p:sp>
+      <p:sp>
+        <p:nvSpPr>
+          <p:cNvPr id="12" name="Shape 10"/>
+          <p:cNvSpPr/>
+          <p:nvPr/>
+        </p:nvSpPr>
+        <p:spPr>
+          <a:xfrm>
+            <a:off x="960120" y="1554480"/>
+            <a:ext cx="393192" cy="393192"/>
+          </a:xfrm>
+          <a:prstGeom prst="ellipse">
+            <a:avLst/>
+          </a:prstGeom>
+          <a:solidFill>
+            <a:srgbClr val="15A68C"/>
+          </a:solidFill>
+          <a:ln w="12700">
+            <a:solidFill>
+              <a:srgbClr val="15A68C">
+                <a:alpha val="0"/>
+              </a:srgbClr>
+            </a:solidFill>
+            <a:prstDash val="solid"/>
+          </a:ln>
+        </p:spPr>
+        <p:txBody>
+          <a:bodyPr/>
+          <a:lstStyle/>
+          <a:p>
+            <a:endParaRPr lang="nb-NO"/>
+          </a:p>
+        </p:txBody>
+      </p:sp>
+      <p:sp>
+        <p:nvSpPr>
+          <p:cNvPr id="13" name="Text 11"/>
+          <p:cNvSpPr txBox="1"/>
+          <p:nvPr/>
+        </p:nvSpPr>
+        <p:spPr>
+          <a:xfrm>
+            <a:off x="969264" y="1572768"/>
+            <a:ext cx="356616" cy="320040"/>
+          </a:xfrm>
+          <a:prstGeom prst="rect">
+            <a:avLst/>
+          </a:prstGeom>
+          <a:noFill/>
+          <a:ln/>
+        </p:spPr>
+        <p:txBody>
+          <a:bodyPr wrap="square" lIns="0" tIns="0" rIns="0" bIns="0" rtlCol="0" anchor="ctr">
+            <a:normAutofit/>
+          </a:bodyPr>
+          <a:lstStyle/>
+          <a:p>
+            <a:pPr marL="0" indent="0" algn="ctr">
+              <a:buNone/>
+            </a:pPr>
+            <a:r>
+              <a:rPr lang="en-US" sz="1400" b="1" dirty="0">
+                <a:solidFill>
+                  <a:srgbClr val="FFFFFF"/>
+                </a:solidFill>
+                <a:latin typeface="Aptos" pitchFamily="34" charset="0"/>
+                <a:ea typeface="Aptos" pitchFamily="34" charset="-122"/>
+                <a:cs typeface="Aptos" pitchFamily="34" charset="-120"/>
+              </a:rPr>
+              <a:t>1</a:t>
+            </a:r>
+            <a:endParaRPr lang="en-US" sz="1400" dirty="0"/>
+          </a:p>
+        </p:txBody>
+      </p:sp>
+      <p:sp>
+        <p:nvSpPr>
+          <p:cNvPr id="14" name="Text 12"/>
+          <p:cNvSpPr txBox="1"/>
+          <p:nvPr/>
+        </p:nvSpPr>
+        <p:spPr>
+          <a:xfrm>
+            <a:off x="1517904" y="1490472"/>
+            <a:ext cx="3310128" cy="274320"/>
+          </a:xfrm>
+          <a:prstGeom prst="rect">
+            <a:avLst/>
+          </a:prstGeom>
+          <a:noFill/>
+          <a:ln/>
+        </p:spPr>
+        <p:txBody>
+          <a:bodyPr wrap="square" lIns="0" tIns="0" rIns="0" bIns="0" rtlCol="0" anchor="ctr">
+            <a:normAutofit/>
+          </a:bodyPr>
+          <a:lstStyle/>
+          <a:p>
+            <a:pPr marL="0" indent="0" algn="l">
+              <a:buNone/>
+            </a:pPr>
+            <a:r>
+              <a:rPr lang="en-US" sz="1300" b="1" dirty="0">
+                <a:solidFill>
+                  <a:srgbClr val="142E53"/>
+                </a:solidFill>
+                <a:latin typeface="Aptos" pitchFamily="34" charset="0"/>
+                <a:ea typeface="Aptos" pitchFamily="34" charset="-122"/>
+                <a:cs typeface="Aptos" pitchFamily="34" charset="-120"/>
+              </a:rPr>
+              <a:t>Voxel downsample</a:t>
+            </a:r>
+            <a:endParaRPr lang="en-US" sz="1300" dirty="0"/>
+          </a:p>
+        </p:txBody>
+      </p:sp>
+      <p:sp>
+        <p:nvSpPr>
+          <p:cNvPr id="15" name="Text 13"/>
+          <p:cNvSpPr txBox="1"/>
+          <p:nvPr/>
+        </p:nvSpPr>
+        <p:spPr>
+          <a:xfrm>
+            <a:off x="1517904" y="1810512"/>
+            <a:ext cx="3291840" cy="201168"/>
+          </a:xfrm>
+          <a:prstGeom prst="rect">
+            <a:avLst/>
+          </a:prstGeom>
+          <a:noFill/>
+          <a:ln/>
+        </p:spPr>
+        <p:txBody>
+          <a:bodyPr wrap="square" lIns="0" tIns="0" rIns="0" bIns="0" rtlCol="0" anchor="ctr">
+            <a:normAutofit/>
+          </a:bodyPr>
+          <a:lstStyle/>
+          <a:p>
+            <a:pPr marL="0" indent="0" algn="l">
+              <a:buNone/>
+            </a:pPr>
+            <a:r>
+              <a:rPr lang="en-US" sz="1000" dirty="0">
+                <a:solidFill>
+                  <a:srgbClr val="58687C"/>
+                </a:solidFill>
+                <a:latin typeface="Aptos" pitchFamily="34" charset="0"/>
+                <a:ea typeface="Aptos" pitchFamily="34" charset="-122"/>
+                <a:cs typeface="Aptos" pitchFamily="34" charset="-120"/>
+              </a:rPr>
+              <a:t>Thin the scan into a sparse voxel grid</a:t>
+            </a:r>
+            <a:endParaRPr lang="en-US" sz="1000" dirty="0"/>
+          </a:p>
+        </p:txBody>
+      </p:sp>
+      <p:sp>
+        <p:nvSpPr>
+          <p:cNvPr id="16" name="Shape 14"/>
+          <p:cNvSpPr/>
+          <p:nvPr/>
+        </p:nvSpPr>
+        <p:spPr>
+          <a:xfrm>
+            <a:off x="804672" y="2276856"/>
+            <a:ext cx="4261104" cy="740664"/>
+          </a:xfrm>
+          <a:prstGeom prst="roundRect">
+            <a:avLst>
+              <a:gd name="adj" fmla="val 16049"/>
+            </a:avLst>
+          </a:prstGeom>
+          <a:solidFill>
+            <a:srgbClr val="FFFFFF"/>
+          </a:solidFill>
+          <a:ln w="12700">
+            <a:solidFill>
+              <a:srgbClr val="FFFFFF">
+                <a:alpha val="0"/>
+              </a:srgbClr>
+            </a:solidFill>
+            <a:prstDash val="solid"/>
+          </a:ln>
+        </p:spPr>
+        <p:txBody>
+          <a:bodyPr/>
+          <a:lstStyle/>
+          <a:p>
+            <a:endParaRPr lang="nb-NO"/>
+          </a:p>
+        </p:txBody>
+      </p:sp>
+      <p:sp>
+        <p:nvSpPr>
+          <p:cNvPr id="17" name="Shape 15"/>
+          <p:cNvSpPr/>
+          <p:nvPr/>
+        </p:nvSpPr>
+        <p:spPr>
+          <a:xfrm>
+            <a:off x="960120" y="2441448"/>
+            <a:ext cx="393192" cy="393192"/>
+          </a:xfrm>
+          <a:prstGeom prst="ellipse">
+            <a:avLst/>
+          </a:prstGeom>
+          <a:solidFill>
+            <a:srgbClr val="15A68C"/>
+          </a:solidFill>
+          <a:ln w="12700">
+            <a:solidFill>
+              <a:srgbClr val="15A68C">
+                <a:alpha val="0"/>
+              </a:srgbClr>
+            </a:solidFill>
+            <a:prstDash val="solid"/>
+          </a:ln>
+        </p:spPr>
+        <p:txBody>
+          <a:bodyPr/>
+          <a:lstStyle/>
+          <a:p>
+            <a:endParaRPr lang="nb-NO"/>
+          </a:p>
+        </p:txBody>
+      </p:sp>
+      <p:sp>
+        <p:nvSpPr>
+          <p:cNvPr id="18" name="Text 16"/>
+          <p:cNvSpPr txBox="1"/>
+          <p:nvPr/>
+        </p:nvSpPr>
+        <p:spPr>
+          <a:xfrm>
+            <a:off x="969264" y="2459736"/>
+            <a:ext cx="356616" cy="320040"/>
+          </a:xfrm>
+          <a:prstGeom prst="rect">
+            <a:avLst/>
+          </a:prstGeom>
+          <a:noFill/>
+          <a:ln/>
+        </p:spPr>
+        <p:txBody>
+          <a:bodyPr wrap="square" lIns="0" tIns="0" rIns="0" bIns="0" rtlCol="0" anchor="ctr">
+            <a:normAutofit/>
+          </a:bodyPr>
+          <a:lstStyle/>
+          <a:p>
+            <a:pPr marL="0" indent="0" algn="ctr">
+              <a:buNone/>
+            </a:pPr>
+            <a:r>
+              <a:rPr lang="en-US" sz="1400" b="1" dirty="0">
+                <a:solidFill>
+                  <a:srgbClr val="FFFFFF"/>
+                </a:solidFill>
+                <a:latin typeface="Aptos" pitchFamily="34" charset="0"/>
+                <a:ea typeface="Aptos" pitchFamily="34" charset="-122"/>
+                <a:cs typeface="Aptos" pitchFamily="34" charset="-120"/>
+              </a:rPr>
+              <a:t>2</a:t>
+            </a:r>
+            <a:endParaRPr lang="en-US" sz="1400" dirty="0"/>
+          </a:p>
+        </p:txBody>
+      </p:sp>
+      <p:sp>
+        <p:nvSpPr>
+          <p:cNvPr id="19" name="Text 17"/>
+          <p:cNvSpPr txBox="1"/>
+          <p:nvPr/>
+        </p:nvSpPr>
+        <p:spPr>
+          <a:xfrm>
+            <a:off x="1517904" y="2377440"/>
+            <a:ext cx="3310128" cy="274320"/>
+          </a:xfrm>
+          <a:prstGeom prst="rect">
+            <a:avLst/>
+          </a:prstGeom>
+          <a:noFill/>
+          <a:ln/>
+        </p:spPr>
+        <p:txBody>
+          <a:bodyPr wrap="square" lIns="0" tIns="0" rIns="0" bIns="0" rtlCol="0" anchor="ctr">
+            <a:normAutofit/>
+          </a:bodyPr>
+          <a:lstStyle/>
+          <a:p>
+            <a:pPr marL="0" indent="0" algn="l">
+              <a:buNone/>
+            </a:pPr>
+            <a:r>
+              <a:rPr lang="en-US" sz="1300" b="1" dirty="0">
+                <a:solidFill>
+                  <a:srgbClr val="142E53"/>
+                </a:solidFill>
+                <a:latin typeface="Aptos" pitchFamily="34" charset="0"/>
+                <a:ea typeface="Aptos" pitchFamily="34" charset="-122"/>
+                <a:cs typeface="Aptos" pitchFamily="34" charset="-120"/>
+              </a:rPr>
+              <a:t>Predict pose</a:t>
+            </a:r>
+            <a:endParaRPr lang="en-US" sz="1300" dirty="0"/>
+          </a:p>
+        </p:txBody>
+      </p:sp>
+      <p:sp>
+        <p:nvSpPr>
+          <p:cNvPr id="20" name="Text 18"/>
+          <p:cNvSpPr txBox="1"/>
+          <p:nvPr/>
+        </p:nvSpPr>
+        <p:spPr>
+          <a:xfrm>
+            <a:off x="1517904" y="2697480"/>
+            <a:ext cx="3291840" cy="201168"/>
+          </a:xfrm>
+          <a:prstGeom prst="rect">
+            <a:avLst/>
+          </a:prstGeom>
+          <a:noFill/>
+          <a:ln/>
+        </p:spPr>
+        <p:txBody>
+          <a:bodyPr wrap="square" lIns="0" tIns="0" rIns="0" bIns="0" rtlCol="0" anchor="ctr">
+            <a:normAutofit/>
+          </a:bodyPr>
+          <a:lstStyle/>
+          <a:p>
+            <a:pPr marL="0" indent="0" algn="l">
+              <a:buNone/>
+            </a:pPr>
+            <a:r>
+              <a:rPr lang="en-US" sz="1000" dirty="0">
+                <a:solidFill>
+                  <a:srgbClr val="58687C"/>
+                </a:solidFill>
+                <a:latin typeface="Aptos" pitchFamily="34" charset="0"/>
+                <a:ea typeface="Aptos" pitchFamily="34" charset="-122"/>
+                <a:cs typeface="Aptos" pitchFamily="34" charset="-120"/>
+              </a:rPr>
+              <a:t>Constant-velocity guess from the last poses</a:t>
+            </a:r>
+            <a:endParaRPr lang="en-US" sz="1000" dirty="0"/>
+          </a:p>
+        </p:txBody>
+      </p:sp>
+      <p:sp>
+        <p:nvSpPr>
+          <p:cNvPr id="21" name="Shape 19"/>
+          <p:cNvSpPr/>
+          <p:nvPr/>
+        </p:nvSpPr>
+        <p:spPr>
+          <a:xfrm>
+            <a:off x="804672" y="3163824"/>
+            <a:ext cx="4261104" cy="740664"/>
+          </a:xfrm>
+          <a:prstGeom prst="roundRect">
+            <a:avLst>
+              <a:gd name="adj" fmla="val 16049"/>
+            </a:avLst>
+          </a:prstGeom>
+          <a:solidFill>
+            <a:srgbClr val="FFFFFF"/>
+          </a:solidFill>
+          <a:ln w="12700">
+            <a:solidFill>
+              <a:srgbClr val="FFFFFF">
+                <a:alpha val="0"/>
+              </a:srgbClr>
+            </a:solidFill>
+            <a:prstDash val="solid"/>
+          </a:ln>
+        </p:spPr>
+        <p:txBody>
+          <a:bodyPr/>
+          <a:lstStyle/>
+          <a:p>
+            <a:endParaRPr lang="nb-NO"/>
+          </a:p>
+        </p:txBody>
+      </p:sp>
+      <p:sp>
+        <p:nvSpPr>
+          <p:cNvPr id="22" name="Shape 20"/>
+          <p:cNvSpPr/>
+          <p:nvPr/>
+        </p:nvSpPr>
+        <p:spPr>
+          <a:xfrm>
+            <a:off x="960120" y="3328416"/>
+            <a:ext cx="393192" cy="393192"/>
+          </a:xfrm>
+          <a:prstGeom prst="ellipse">
+            <a:avLst/>
+          </a:prstGeom>
+          <a:solidFill>
+            <a:srgbClr val="15A68C"/>
+          </a:solidFill>
+          <a:ln w="12700">
+            <a:solidFill>
+              <a:srgbClr val="15A68C">
+                <a:alpha val="0"/>
+              </a:srgbClr>
+            </a:solidFill>
+            <a:prstDash val="solid"/>
+          </a:ln>
+        </p:spPr>
+        <p:txBody>
+          <a:bodyPr/>
+          <a:lstStyle/>
+          <a:p>
+            <a:endParaRPr lang="nb-NO"/>
+          </a:p>
+        </p:txBody>
+      </p:sp>
+      <p:sp>
+        <p:nvSpPr>
+          <p:cNvPr id="23" name="Text 21"/>
+          <p:cNvSpPr txBox="1"/>
+          <p:nvPr/>
+        </p:nvSpPr>
+        <p:spPr>
+          <a:xfrm>
+            <a:off x="969264" y="3346704"/>
+            <a:ext cx="356616" cy="320040"/>
+          </a:xfrm>
+          <a:prstGeom prst="rect">
+            <a:avLst/>
+          </a:prstGeom>
+          <a:noFill/>
+          <a:ln/>
+        </p:spPr>
+        <p:txBody>
+          <a:bodyPr wrap="square" lIns="0" tIns="0" rIns="0" bIns="0" rtlCol="0" anchor="ctr">
+            <a:normAutofit/>
+          </a:bodyPr>
+          <a:lstStyle/>
+          <a:p>
+            <a:pPr marL="0" indent="0" algn="ctr">
+              <a:buNone/>
+            </a:pPr>
+            <a:r>
+              <a:rPr lang="en-US" sz="1400" b="1" dirty="0">
+                <a:solidFill>
+                  <a:srgbClr val="FFFFFF"/>
+                </a:solidFill>
+                <a:latin typeface="Aptos" pitchFamily="34" charset="0"/>
+                <a:ea typeface="Aptos" pitchFamily="34" charset="-122"/>
+                <a:cs typeface="Aptos" pitchFamily="34" charset="-120"/>
+              </a:rPr>
+              <a:t>3</a:t>
+            </a:r>
+            <a:endParaRPr lang="en-US" sz="1400" dirty="0"/>
+          </a:p>
+        </p:txBody>
+      </p:sp>
+      <p:sp>
+        <p:nvSpPr>
+          <p:cNvPr id="24" name="Text 22"/>
+          <p:cNvSpPr txBox="1"/>
+          <p:nvPr/>
+        </p:nvSpPr>
+        <p:spPr>
+          <a:xfrm>
+            <a:off x="1517904" y="3264408"/>
+            <a:ext cx="3310128" cy="274320"/>
+          </a:xfrm>
+          <a:prstGeom prst="rect">
+            <a:avLst/>
+          </a:prstGeom>
+          <a:noFill/>
+          <a:ln/>
+        </p:spPr>
+        <p:txBody>
+          <a:bodyPr wrap="square" lIns="0" tIns="0" rIns="0" bIns="0" rtlCol="0" anchor="ctr">
+            <a:normAutofit/>
+          </a:bodyPr>
+          <a:lstStyle/>
+          <a:p>
+            <a:pPr marL="0" indent="0" algn="l">
+              <a:buNone/>
+            </a:pPr>
+            <a:r>
+              <a:rPr lang="en-US" sz="1300" b="1" dirty="0">
+                <a:solidFill>
+                  <a:srgbClr val="142E53"/>
+                </a:solidFill>
+                <a:latin typeface="Aptos" pitchFamily="34" charset="0"/>
+                <a:ea typeface="Aptos" pitchFamily="34" charset="-122"/>
+                <a:cs typeface="Aptos" pitchFamily="34" charset="-120"/>
+              </a:rPr>
+              <a:t>Point-to-point ICP</a:t>
+            </a:r>
+            <a:endParaRPr lang="en-US" sz="1300" dirty="0"/>
+          </a:p>
+        </p:txBody>
+      </p:sp>
+      <p:sp>
+        <p:nvSpPr>
+          <p:cNvPr id="25" name="Text 23"/>
+          <p:cNvSpPr txBox="1"/>
+          <p:nvPr/>
+        </p:nvSpPr>
+        <p:spPr>
+          <a:xfrm>
+            <a:off x="1517904" y="3584448"/>
+            <a:ext cx="3291840" cy="201168"/>
+          </a:xfrm>
+          <a:prstGeom prst="rect">
+            <a:avLst/>
+          </a:prstGeom>
+          <a:noFill/>
+          <a:ln/>
+        </p:spPr>
+        <p:txBody>
+          <a:bodyPr wrap="square" lIns="0" tIns="0" rIns="0" bIns="0" rtlCol="0" anchor="ctr">
+            <a:normAutofit/>
+          </a:bodyPr>
+          <a:lstStyle/>
+          <a:p>
+            <a:pPr marL="0" indent="0" algn="l">
+              <a:buNone/>
+            </a:pPr>
+            <a:r>
+              <a:rPr lang="en-US" sz="1000" dirty="0">
+                <a:solidFill>
+                  <a:srgbClr val="58687C"/>
+                </a:solidFill>
+                <a:latin typeface="Aptos" pitchFamily="34" charset="0"/>
+                <a:ea typeface="Aptos" pitchFamily="34" charset="-122"/>
+                <a:cs typeface="Aptos" pitchFamily="34" charset="-120"/>
+              </a:rPr>
+              <a:t>Nearest-point matches, robust solve for R, t</a:t>
+            </a:r>
+            <a:endParaRPr lang="en-US" sz="1000" dirty="0"/>
+          </a:p>
+        </p:txBody>
+      </p:sp>
+      <p:sp>
+        <p:nvSpPr>
+          <p:cNvPr id="26" name="Shape 24"/>
+          <p:cNvSpPr/>
+          <p:nvPr/>
+        </p:nvSpPr>
+        <p:spPr>
+          <a:xfrm>
+            <a:off x="804672" y="4050792"/>
+            <a:ext cx="4261104" cy="740664"/>
+          </a:xfrm>
+          <a:prstGeom prst="roundRect">
+            <a:avLst>
+              <a:gd name="adj" fmla="val 16049"/>
+            </a:avLst>
+          </a:prstGeom>
+          <a:solidFill>
+            <a:srgbClr val="FFFFFF"/>
+          </a:solidFill>
+          <a:ln w="12700">
+            <a:solidFill>
+              <a:srgbClr val="FFFFFF">
+                <a:alpha val="0"/>
+              </a:srgbClr>
+            </a:solidFill>
+            <a:prstDash val="solid"/>
+          </a:ln>
+        </p:spPr>
+        <p:txBody>
+          <a:bodyPr/>
+          <a:lstStyle/>
+          <a:p>
+            <a:endParaRPr lang="nb-NO"/>
+          </a:p>
+        </p:txBody>
+      </p:sp>
+      <p:sp>
+        <p:nvSpPr>
+          <p:cNvPr id="27" name="Shape 25"/>
+          <p:cNvSpPr/>
+          <p:nvPr/>
+        </p:nvSpPr>
+        <p:spPr>
+          <a:xfrm>
+            <a:off x="960120" y="4215384"/>
+            <a:ext cx="393192" cy="393192"/>
+          </a:xfrm>
+          <a:prstGeom prst="ellipse">
+            <a:avLst/>
+          </a:prstGeom>
+          <a:solidFill>
+            <a:srgbClr val="15A68C"/>
+          </a:solidFill>
+          <a:ln w="12700">
+            <a:solidFill>
+              <a:srgbClr val="15A68C">
+                <a:alpha val="0"/>
+              </a:srgbClr>
+            </a:solidFill>
+            <a:prstDash val="solid"/>
+          </a:ln>
+        </p:spPr>
+        <p:txBody>
+          <a:bodyPr/>
+          <a:lstStyle/>
+          <a:p>
+            <a:endParaRPr lang="nb-NO"/>
+          </a:p>
+        </p:txBody>
+      </p:sp>
+      <p:sp>
+        <p:nvSpPr>
+          <p:cNvPr id="28" name="Text 26"/>
+          <p:cNvSpPr txBox="1"/>
+          <p:nvPr/>
+        </p:nvSpPr>
+        <p:spPr>
+          <a:xfrm>
+            <a:off x="969264" y="4233672"/>
+            <a:ext cx="356616" cy="320040"/>
+          </a:xfrm>
+          <a:prstGeom prst="rect">
+            <a:avLst/>
+          </a:prstGeom>
+          <a:noFill/>
+          <a:ln/>
+        </p:spPr>
+        <p:txBody>
+          <a:bodyPr wrap="square" lIns="0" tIns="0" rIns="0" bIns="0" rtlCol="0" anchor="ctr">
+            <a:normAutofit/>
+          </a:bodyPr>
+          <a:lstStyle/>
+          <a:p>
+            <a:pPr marL="0" indent="0" algn="ctr">
+              <a:buNone/>
+            </a:pPr>
+            <a:r>
+              <a:rPr lang="en-US" sz="1400" b="1" dirty="0">
+                <a:solidFill>
+                  <a:srgbClr val="FFFFFF"/>
+                </a:solidFill>
+                <a:latin typeface="Aptos" pitchFamily="34" charset="0"/>
+                <a:ea typeface="Aptos" pitchFamily="34" charset="-122"/>
+                <a:cs typeface="Aptos" pitchFamily="34" charset="-120"/>
+              </a:rPr>
+              <a:t>4</a:t>
+            </a:r>
+            <a:endParaRPr lang="en-US" sz="1400" dirty="0"/>
+          </a:p>
+        </p:txBody>
+      </p:sp>
+      <p:sp>
+        <p:nvSpPr>
+          <p:cNvPr id="29" name="Text 27"/>
+          <p:cNvSpPr txBox="1"/>
+          <p:nvPr/>
+        </p:nvSpPr>
+        <p:spPr>
+          <a:xfrm>
+            <a:off x="1517904" y="4151376"/>
+            <a:ext cx="3310128" cy="274320"/>
+          </a:xfrm>
+          <a:prstGeom prst="rect">
+            <a:avLst/>
+          </a:prstGeom>
+          <a:noFill/>
+          <a:ln/>
+        </p:spPr>
+        <p:txBody>
+          <a:bodyPr wrap="square" lIns="0" tIns="0" rIns="0" bIns="0" rtlCol="0" anchor="ctr">
+            <a:normAutofit/>
+          </a:bodyPr>
+          <a:lstStyle/>
+          <a:p>
+            <a:pPr marL="0" indent="0" algn="l">
+              <a:buNone/>
+            </a:pPr>
+            <a:r>
+              <a:rPr lang="en-US" sz="1300" b="1" dirty="0">
+                <a:solidFill>
+                  <a:srgbClr val="142E53"/>
+                </a:solidFill>
+                <a:latin typeface="Aptos" pitchFamily="34" charset="0"/>
+                <a:ea typeface="Aptos" pitchFamily="34" charset="-122"/>
+                <a:cs typeface="Aptos" pitchFamily="34" charset="-120"/>
+              </a:rPr>
+              <a:t>Update local map</a:t>
+            </a:r>
+            <a:endParaRPr lang="en-US" sz="1300" dirty="0"/>
+          </a:p>
+        </p:txBody>
+      </p:sp>
+      <p:sp>
+        <p:nvSpPr>
+          <p:cNvPr id="30" name="Text 28"/>
+          <p:cNvSpPr txBox="1"/>
+          <p:nvPr/>
+        </p:nvSpPr>
+        <p:spPr>
+          <a:xfrm>
+            <a:off x="1517904" y="4471416"/>
+            <a:ext cx="3291840" cy="201168"/>
+          </a:xfrm>
+          <a:prstGeom prst="rect">
+            <a:avLst/>
+          </a:prstGeom>
+          <a:noFill/>
+          <a:ln/>
+        </p:spPr>
+        <p:txBody>
+          <a:bodyPr wrap="square" lIns="0" tIns="0" rIns="0" bIns="0" rtlCol="0" anchor="ctr">
+            <a:normAutofit/>
+          </a:bodyPr>
+          <a:lstStyle/>
+          <a:p>
+            <a:pPr marL="0" indent="0" algn="l">
+              <a:buNone/>
+            </a:pPr>
+            <a:r>
+              <a:rPr lang="en-US" sz="1000" dirty="0">
+                <a:solidFill>
+                  <a:srgbClr val="58687C"/>
+                </a:solidFill>
+                <a:latin typeface="Aptos" pitchFamily="34" charset="0"/>
+                <a:ea typeface="Aptos" pitchFamily="34" charset="-122"/>
+                <a:cs typeface="Aptos" pitchFamily="34" charset="-120"/>
+              </a:rPr>
+              <a:t>Add scan to map; adapt the match threshold</a:t>
+            </a:r>
+            <a:endParaRPr lang="en-US" sz="1000" dirty="0"/>
+          </a:p>
+        </p:txBody>
+      </p:sp>
+      <p:sp>
+        <p:nvSpPr>
+          <p:cNvPr id="31" name="Shape 29"/>
+          <p:cNvSpPr/>
+          <p:nvPr/>
+        </p:nvSpPr>
+        <p:spPr>
+          <a:xfrm>
+            <a:off x="5449824" y="1188720"/>
+            <a:ext cx="6144768" cy="3858768"/>
+          </a:xfrm>
+          <a:prstGeom prst="roundRect">
+            <a:avLst>
+              <a:gd name="adj" fmla="val 3081"/>
+            </a:avLst>
+          </a:prstGeom>
+          <a:solidFill>
+            <a:srgbClr val="FFFFFF"/>
+          </a:solidFill>
+          <a:ln w="7620">
+            <a:solidFill>
+              <a:srgbClr val="D7E2EE"/>
+            </a:solidFill>
+            <a:prstDash val="solid"/>
+          </a:ln>
+        </p:spPr>
+        <p:txBody>
+          <a:bodyPr/>
+          <a:lstStyle/>
+          <a:p>
+            <a:endParaRPr lang="nb-NO"/>
+          </a:p>
+        </p:txBody>
+      </p:sp>
+      <p:sp>
+        <p:nvSpPr>
+          <p:cNvPr id="32" name="Shape 30"/>
+          <p:cNvSpPr/>
+          <p:nvPr/>
+        </p:nvSpPr>
+        <p:spPr>
+          <a:xfrm>
+            <a:off x="5577840" y="1298448"/>
+            <a:ext cx="2651760" cy="274320"/>
+          </a:xfrm>
+          <a:prstGeom prst="roundRect">
+            <a:avLst>
+              <a:gd name="adj" fmla="val 43333"/>
+            </a:avLst>
+          </a:prstGeom>
+          <a:solidFill>
+            <a:srgbClr val="EFE8FA"/>
+          </a:solidFill>
+          <a:ln w="12700">
+            <a:solidFill>
+              <a:srgbClr val="EFE8FA">
+                <a:alpha val="0"/>
+              </a:srgbClr>
+            </a:solidFill>
+            <a:prstDash val="solid"/>
+          </a:ln>
+        </p:spPr>
+        <p:txBody>
+          <a:bodyPr/>
+          <a:lstStyle/>
+          <a:p>
+            <a:endParaRPr lang="nb-NO"/>
+          </a:p>
+        </p:txBody>
+      </p:sp>
+      <p:sp>
+        <p:nvSpPr>
+          <p:cNvPr id="33" name="Text 31"/>
+          <p:cNvSpPr txBox="1"/>
+          <p:nvPr/>
+        </p:nvSpPr>
+        <p:spPr>
+          <a:xfrm>
+            <a:off x="5632704" y="1307592"/>
+            <a:ext cx="2542032" cy="256032"/>
+          </a:xfrm>
+          <a:prstGeom prst="rect">
+            <a:avLst/>
+          </a:prstGeom>
+          <a:noFill/>
+          <a:ln/>
+        </p:spPr>
+        <p:txBody>
+          <a:bodyPr wrap="square" lIns="0" tIns="0" rIns="0" bIns="0" rtlCol="0" anchor="ctr">
+            <a:normAutofit/>
+          </a:bodyPr>
+          <a:lstStyle/>
+          <a:p>
+            <a:pPr marL="0" indent="0" algn="ctr">
+              <a:buNone/>
+            </a:pPr>
+            <a:r>
+              <a:rPr lang="en-US" sz="1000" b="1" dirty="0">
+                <a:solidFill>
+                  <a:srgbClr val="142E53"/>
+                </a:solidFill>
+                <a:latin typeface="Aptos" pitchFamily="34" charset="0"/>
+                <a:ea typeface="Aptos" pitchFamily="34" charset="-122"/>
+                <a:cs typeface="Aptos" pitchFamily="34" charset="-120"/>
+              </a:rPr>
+              <a:t>Uses and drawbacks</a:t>
+            </a:r>
+            <a:endParaRPr lang="en-US" sz="1000" dirty="0"/>
+          </a:p>
+        </p:txBody>
+      </p:sp>
+      <p:sp>
+        <p:nvSpPr>
+          <p:cNvPr id="35" name="Shape 32"/>
+          <p:cNvSpPr/>
+          <p:nvPr/>
+        </p:nvSpPr>
+        <p:spPr>
+          <a:xfrm>
+            <a:off x="795528" y="5138928"/>
+            <a:ext cx="2176272" cy="219456"/>
+          </a:xfrm>
+          <a:prstGeom prst="roundRect">
+            <a:avLst>
+              <a:gd name="adj" fmla="val 54167"/>
+            </a:avLst>
+          </a:prstGeom>
+          <a:solidFill>
+            <a:srgbClr val="FFFFFF"/>
+          </a:solidFill>
+          <a:ln w="12700">
+            <a:solidFill>
+              <a:srgbClr val="FFFFFF">
+                <a:alpha val="0"/>
+              </a:srgbClr>
+            </a:solidFill>
+            <a:prstDash val="solid"/>
+          </a:ln>
+        </p:spPr>
+        <p:txBody>
+          <a:bodyPr/>
+          <a:lstStyle/>
+          <a:p>
+            <a:endParaRPr lang="nb-NO"/>
+          </a:p>
+        </p:txBody>
+      </p:sp>
+      <p:sp>
+        <p:nvSpPr>
+          <p:cNvPr id="36" name="Text 33"/>
+          <p:cNvSpPr txBox="1"/>
+          <p:nvPr/>
+        </p:nvSpPr>
+        <p:spPr>
+          <a:xfrm>
+            <a:off x="850392" y="5148072"/>
+            <a:ext cx="2066544" cy="201168"/>
+          </a:xfrm>
+          <a:prstGeom prst="rect">
+            <a:avLst/>
+          </a:prstGeom>
+          <a:noFill/>
+          <a:ln/>
+        </p:spPr>
+        <p:txBody>
+          <a:bodyPr wrap="square" lIns="0" tIns="0" rIns="0" bIns="0" rtlCol="0" anchor="ctr">
+            <a:normAutofit/>
+          </a:bodyPr>
+          <a:lstStyle/>
+          <a:p>
+            <a:pPr marL="0" indent="0" algn="ctr">
+              <a:buNone/>
+            </a:pPr>
+            <a:r>
+              <a:rPr lang="en-US" sz="1000" b="1" dirty="0">
+                <a:solidFill>
+                  <a:srgbClr val="15A68C"/>
+                </a:solidFill>
+                <a:latin typeface="Aptos" pitchFamily="34" charset="0"/>
+                <a:ea typeface="Aptos" pitchFamily="34" charset="-122"/>
+                <a:cs typeface="Aptos" pitchFamily="34" charset="-120"/>
+              </a:rPr>
+              <a:t>Keep It Small and Simple</a:t>
+            </a:r>
+            <a:endParaRPr lang="en-US" sz="1000" dirty="0"/>
+          </a:p>
+        </p:txBody>
+      </p:sp>
+      <p:sp>
+        <p:nvSpPr>
+          <p:cNvPr id="37" name="Shape 34"/>
+          <p:cNvSpPr/>
+          <p:nvPr/>
+        </p:nvSpPr>
+        <p:spPr>
+          <a:xfrm>
+            <a:off x="3035808" y="5138928"/>
+            <a:ext cx="2286000" cy="219456"/>
+          </a:xfrm>
+          <a:prstGeom prst="roundRect">
+            <a:avLst>
+              <a:gd name="adj" fmla="val 54167"/>
+            </a:avLst>
+          </a:prstGeom>
+          <a:solidFill>
+            <a:srgbClr val="FFFFFF"/>
+          </a:solidFill>
+          <a:ln w="12700">
+            <a:solidFill>
+              <a:srgbClr val="FFFFFF">
+                <a:alpha val="0"/>
+              </a:srgbClr>
+            </a:solidFill>
+            <a:prstDash val="solid"/>
+          </a:ln>
+        </p:spPr>
+        <p:txBody>
+          <a:bodyPr/>
+          <a:lstStyle/>
+          <a:p>
+            <a:endParaRPr lang="nb-NO"/>
+          </a:p>
+        </p:txBody>
+      </p:sp>
+      <p:sp>
+        <p:nvSpPr>
+          <p:cNvPr id="38" name="Text 35"/>
+          <p:cNvSpPr txBox="1"/>
+          <p:nvPr/>
+        </p:nvSpPr>
+        <p:spPr>
+          <a:xfrm>
+            <a:off x="3090672" y="5148072"/>
+            <a:ext cx="2176272" cy="201168"/>
+          </a:xfrm>
+          <a:prstGeom prst="rect">
+            <a:avLst/>
+          </a:prstGeom>
+          <a:noFill/>
+          <a:ln/>
+        </p:spPr>
+        <p:txBody>
+          <a:bodyPr wrap="square" lIns="0" tIns="0" rIns="0" bIns="0" rtlCol="0" anchor="ctr">
+            <a:normAutofit/>
+          </a:bodyPr>
+          <a:lstStyle/>
+          <a:p>
+            <a:pPr marL="0" indent="0" algn="ctr">
+              <a:buNone/>
+            </a:pPr>
+            <a:r>
+              <a:rPr lang="en-US" sz="1000" b="1" dirty="0">
+                <a:solidFill>
+                  <a:srgbClr val="15A68C"/>
+                </a:solidFill>
+                <a:latin typeface="Aptos" pitchFamily="34" charset="0"/>
+                <a:ea typeface="Aptos" pitchFamily="34" charset="-122"/>
+                <a:cs typeface="Aptos" pitchFamily="34" charset="-120"/>
+              </a:rPr>
+              <a:t>Vizzo et al., RA-L 2023</a:t>
+            </a:r>
+            <a:endParaRPr lang="en-US" sz="1000" dirty="0"/>
+          </a:p>
+        </p:txBody>
+      </p:sp>
+      <p:sp>
+        <p:nvSpPr>
+          <p:cNvPr id="39" name="TextBox 38"/>
+          <p:cNvSpPr txBox="1"/>
+          <p:nvPr/>
+        </p:nvSpPr>
+        <p:spPr>
+          <a:xfrm>
+            <a:off x="5669280" y="1737360"/>
+            <a:ext cx="2697480" cy="1751762"/>
+          </a:xfrm>
+          <a:prstGeom prst="rect">
+            <a:avLst/>
+          </a:prstGeom>
+          <a:noFill/>
+        </p:spPr>
+        <p:txBody>
+          <a:bodyPr wrap="square" lIns="0" rIns="0">
+            <a:spAutoFit/>
+          </a:bodyPr>
+          <a:lstStyle/>
+          <a:p>
+            <a:pPr>
+              <a:spcAft>
+                <a:spcPts val="1000"/>
+              </a:spcAft>
+            </a:pPr>
+            <a:r>
+              <a:rPr sz="1700" b="1" dirty="0">
+                <a:solidFill>
+                  <a:srgbClr val="15A68C"/>
+                </a:solidFill>
+                <a:latin typeface="Aptos"/>
+              </a:rPr>
+              <a:t>Uses</a:t>
+            </a:r>
+          </a:p>
+          <a:p>
+            <a:pPr>
+              <a:spcAft>
+                <a:spcPts val="900"/>
+              </a:spcAft>
+            </a:pPr>
+            <a:r>
+              <a:rPr sz="1350" dirty="0">
+                <a:solidFill>
+                  <a:srgbClr val="142E53"/>
+                </a:solidFill>
+                <a:latin typeface="Aptos"/>
+              </a:rPr>
+              <a:t>•  Robot and vehicle odometry</a:t>
+            </a:r>
+          </a:p>
+          <a:p>
+            <a:pPr>
+              <a:spcAft>
+                <a:spcPts val="900"/>
+              </a:spcAft>
+            </a:pPr>
+            <a:r>
+              <a:rPr sz="1350" dirty="0">
+                <a:solidFill>
+                  <a:srgbClr val="142E53"/>
+                </a:solidFill>
+                <a:latin typeface="Aptos"/>
+              </a:rPr>
+              <a:t>•  Front end of a SLAM system</a:t>
+            </a:r>
+            <a:r>
+              <a:rPr lang="nb-NO" sz="1350" dirty="0">
+                <a:solidFill>
+                  <a:srgbClr val="142E53"/>
+                </a:solidFill>
+                <a:latin typeface="Aptos"/>
+              </a:rPr>
+              <a:t> ( </a:t>
+            </a:r>
+            <a:r>
+              <a:rPr lang="nb-NO" sz="1350" dirty="0" err="1">
+                <a:solidFill>
+                  <a:srgbClr val="142E53"/>
+                </a:solidFill>
+                <a:latin typeface="Aptos"/>
+              </a:rPr>
+              <a:t>own</a:t>
+            </a:r>
+            <a:r>
+              <a:rPr lang="nb-NO" sz="1350" dirty="0">
+                <a:solidFill>
+                  <a:srgbClr val="142E53"/>
+                </a:solidFill>
+                <a:latin typeface="Aptos"/>
+              </a:rPr>
+              <a:t> </a:t>
+            </a:r>
+            <a:r>
+              <a:rPr lang="nb-NO" sz="1350" dirty="0" err="1">
+                <a:solidFill>
+                  <a:srgbClr val="142E53"/>
+                </a:solidFill>
+                <a:latin typeface="Aptos"/>
+              </a:rPr>
+              <a:t>position</a:t>
+            </a:r>
+            <a:r>
+              <a:rPr lang="nb-NO" sz="1350" dirty="0">
+                <a:solidFill>
+                  <a:srgbClr val="142E53"/>
+                </a:solidFill>
+                <a:latin typeface="Aptos"/>
+              </a:rPr>
+              <a:t> </a:t>
+            </a:r>
+            <a:r>
+              <a:rPr lang="nb-NO" sz="1350" dirty="0" err="1">
+                <a:solidFill>
+                  <a:srgbClr val="142E53"/>
+                </a:solidFill>
+                <a:latin typeface="Aptos"/>
+              </a:rPr>
+              <a:t>tracking</a:t>
+            </a:r>
+            <a:r>
+              <a:rPr lang="nb-NO" sz="1350" dirty="0">
+                <a:solidFill>
+                  <a:srgbClr val="142E53"/>
+                </a:solidFill>
+                <a:latin typeface="Aptos"/>
+              </a:rPr>
+              <a:t> in </a:t>
+            </a:r>
+            <a:r>
+              <a:rPr lang="nb-NO" sz="1350" dirty="0" err="1">
+                <a:solidFill>
+                  <a:srgbClr val="142E53"/>
+                </a:solidFill>
+                <a:latin typeface="Aptos"/>
+              </a:rPr>
+              <a:t>uknown</a:t>
+            </a:r>
+            <a:r>
+              <a:rPr lang="nb-NO" sz="1350" dirty="0">
+                <a:solidFill>
+                  <a:srgbClr val="142E53"/>
+                </a:solidFill>
+                <a:latin typeface="Aptos"/>
+              </a:rPr>
+              <a:t> </a:t>
+            </a:r>
+            <a:r>
+              <a:rPr lang="nb-NO" sz="1350" dirty="0" err="1">
+                <a:solidFill>
+                  <a:srgbClr val="142E53"/>
+                </a:solidFill>
+                <a:latin typeface="Aptos"/>
+              </a:rPr>
+              <a:t>places</a:t>
+            </a:r>
+            <a:r>
+              <a:rPr lang="nb-NO" sz="1350" dirty="0">
+                <a:solidFill>
+                  <a:srgbClr val="142E53"/>
+                </a:solidFill>
+                <a:latin typeface="Aptos"/>
+              </a:rPr>
+              <a:t>)</a:t>
+            </a:r>
+            <a:endParaRPr sz="1350" dirty="0">
+              <a:solidFill>
+                <a:srgbClr val="142E53"/>
+              </a:solidFill>
+              <a:latin typeface="Aptos"/>
+            </a:endParaRPr>
+          </a:p>
+          <a:p>
+            <a:pPr>
+              <a:spcAft>
+                <a:spcPts val="900"/>
+              </a:spcAft>
+            </a:pPr>
+            <a:r>
+              <a:rPr sz="1350" dirty="0">
+                <a:solidFill>
+                  <a:srgbClr val="142E53"/>
+                </a:solidFill>
+                <a:latin typeface="Aptos"/>
+              </a:rPr>
+              <a:t>•  No camera, GPS or training data needed</a:t>
+            </a:r>
+            <a:endParaRPr lang="nb-NO" sz="1350" dirty="0">
+              <a:solidFill>
+                <a:srgbClr val="142E53"/>
+              </a:solidFill>
+              <a:latin typeface="Aptos"/>
+            </a:endParaRPr>
+          </a:p>
+        </p:txBody>
+      </p:sp>
+      <p:sp>
+        <p:nvSpPr>
+          <p:cNvPr id="40" name="TextBox 39"/>
+          <p:cNvSpPr txBox="1"/>
+          <p:nvPr/>
+        </p:nvSpPr>
+        <p:spPr>
+          <a:xfrm>
+            <a:off x="8595360" y="1737360"/>
+            <a:ext cx="2834640" cy="2074927"/>
+          </a:xfrm>
+          <a:prstGeom prst="rect">
+            <a:avLst/>
+          </a:prstGeom>
+          <a:noFill/>
+        </p:spPr>
+        <p:txBody>
+          <a:bodyPr wrap="square" lIns="0" rIns="0">
+            <a:spAutoFit/>
+          </a:bodyPr>
+          <a:lstStyle/>
+          <a:p>
+            <a:pPr>
+              <a:spcAft>
+                <a:spcPts val="1000"/>
+              </a:spcAft>
+            </a:pPr>
+            <a:r>
+              <a:rPr sz="1700" b="1" dirty="0">
+                <a:solidFill>
+                  <a:srgbClr val="DC5791"/>
+                </a:solidFill>
+                <a:latin typeface="Aptos"/>
+              </a:rPr>
+              <a:t>Drawbacks</a:t>
+            </a:r>
+          </a:p>
+          <a:p>
+            <a:pPr>
+              <a:spcAft>
+                <a:spcPts val="900"/>
+              </a:spcAft>
+            </a:pPr>
+            <a:r>
+              <a:rPr sz="1350" dirty="0">
+                <a:solidFill>
+                  <a:srgbClr val="142E53"/>
+                </a:solidFill>
+                <a:latin typeface="Aptos"/>
+              </a:rPr>
+              <a:t>•  Drifts over time (no loop closure)</a:t>
+            </a:r>
+          </a:p>
+          <a:p>
+            <a:pPr>
+              <a:spcAft>
+                <a:spcPts val="900"/>
+              </a:spcAft>
+            </a:pPr>
+            <a:r>
+              <a:rPr sz="1350" dirty="0">
+                <a:solidFill>
+                  <a:srgbClr val="142E53"/>
+                </a:solidFill>
+                <a:latin typeface="Aptos"/>
+              </a:rPr>
+              <a:t>•  Weak in repetitive or sparse scenes</a:t>
+            </a:r>
+          </a:p>
+          <a:p>
+            <a:pPr>
+              <a:spcAft>
+                <a:spcPts val="900"/>
+              </a:spcAft>
+            </a:pPr>
+            <a:r>
+              <a:rPr sz="1350" dirty="0">
+                <a:solidFill>
+                  <a:srgbClr val="142E53"/>
+                </a:solidFill>
+                <a:latin typeface="Aptos"/>
+              </a:rPr>
+              <a:t>•  Assumes a mostly static world; moving objects bias it</a:t>
+            </a:r>
+          </a:p>
+          <a:p>
+            <a:pPr>
+              <a:spcAft>
+                <a:spcPts val="900"/>
+              </a:spcAft>
+            </a:pPr>
+            <a:r>
+              <a:rPr sz="1350" dirty="0">
+                <a:solidFill>
+                  <a:srgbClr val="142E53"/>
+                </a:solidFill>
+                <a:latin typeface="Aptos"/>
+              </a:rPr>
+              <a:t>•  Gives the sensor pose, not object poses</a:t>
+            </a:r>
+            <a:r>
+              <a:rPr lang="nb-NO" sz="1350" dirty="0">
+                <a:solidFill>
+                  <a:srgbClr val="142E53"/>
+                </a:solidFill>
+                <a:latin typeface="Aptos"/>
+              </a:rPr>
+              <a:t> (</a:t>
+            </a:r>
+            <a:r>
+              <a:rPr lang="nb-NO" sz="1350" dirty="0" err="1">
+                <a:solidFill>
+                  <a:srgbClr val="142E53"/>
+                </a:solidFill>
+                <a:latin typeface="Aptos"/>
+              </a:rPr>
+              <a:t>position</a:t>
+            </a:r>
+            <a:r>
+              <a:rPr lang="nb-NO" sz="1350" dirty="0">
+                <a:solidFill>
+                  <a:srgbClr val="142E53"/>
+                </a:solidFill>
+                <a:latin typeface="Aptos"/>
+              </a:rPr>
+              <a:t> and </a:t>
+            </a:r>
+            <a:r>
+              <a:rPr lang="nb-NO" sz="1350" dirty="0" err="1">
+                <a:solidFill>
+                  <a:srgbClr val="142E53"/>
+                </a:solidFill>
+                <a:latin typeface="Aptos"/>
+              </a:rPr>
+              <a:t>orientation</a:t>
+            </a:r>
+            <a:r>
+              <a:rPr lang="nb-NO" sz="1350" dirty="0">
+                <a:solidFill>
+                  <a:srgbClr val="142E53"/>
+                </a:solidFill>
+                <a:latin typeface="Aptos"/>
+              </a:rPr>
+              <a:t>)</a:t>
+            </a:r>
+            <a:endParaRPr sz="1350" dirty="0">
+              <a:solidFill>
+                <a:srgbClr val="142E53"/>
+              </a:solidFill>
+              <a:latin typeface="Aptos"/>
+            </a:endParaRPr>
+          </a:p>
+        </p:txBody>
+      </p:sp>
+    </p:spTree>
+  </p:cSld>
+  <p:clrMapOvr>
+    <a:masterClrMapping/>
+  </p:clrMapOvr>
+</p:sld>
+</file>
+
+<file path=ppt/slides/slide12.xml><?xml version="1.0" encoding="utf-8"?>
+<p:sld xmlns:a="http://schemas.openxmlformats.org/drawingml/2006/main" xmlns:r="http://schemas.openxmlformats.org/officeDocument/2006/relationships" xmlns:p="http://schemas.openxmlformats.org/presentationml/2006/main">
   <p:cSld name="Slide 11">
     <p:bg>
       <p:bgPr>
@@ -4436,7 +6195,7 @@
                 <a:ea typeface="Aptos" pitchFamily="34" charset="-122"/>
                 <a:cs typeface="Aptos" pitchFamily="34" charset="-120"/>
               </a:rPr>
-              <a:t>11</a:t>
+              <a:t>12</a:t>
             </a:r>
             <a:endParaRPr lang="en-US" sz="1100" dirty="0"/>
           </a:p>
@@ -5033,7 +6792,7 @@
 </p:sld>
 </file>
 
-<file path=ppt/slides/slide12.xml><?xml version="1.0" encoding="utf-8"?>
+<file path=ppt/slides/slide13.xml><?xml version="1.0" encoding="utf-8"?>
 <p:sld xmlns:a="http://schemas.openxmlformats.org/drawingml/2006/main" xmlns:r="http://schemas.openxmlformats.org/officeDocument/2006/relationships" xmlns:p="http://schemas.openxmlformats.org/presentationml/2006/main">
   <p:cSld name="Slide 12">
     <p:bg>
@@ -5236,17 +6995,6 @@
             <a:pPr marL="0" indent="0" algn="ctr">
               <a:buNone/>
             </a:pPr>
-            <a:r>
-              <a:rPr lang="en-US" sz="1000" dirty="0">
-                <a:solidFill>
-                  <a:srgbClr val="58687C"/>
-                </a:solidFill>
-                <a:latin typeface="Aptos" pitchFamily="34" charset="0"/>
-                <a:ea typeface="Aptos" pitchFamily="34" charset="-122"/>
-                <a:cs typeface="Aptos" pitchFamily="34" charset="-120"/>
-              </a:rPr>
-              <a:t>Combine synchronized camera images, LiDAR scans and 3D labels</a:t>
-            </a:r>
             <a:endParaRPr lang="en-US" sz="1000" dirty="0"/>
           </a:p>
         </p:txBody>
@@ -5357,7 +7105,7 @@
                 <a:ea typeface="Aptos" pitchFamily="34" charset="-122"/>
                 <a:cs typeface="Aptos" pitchFamily="34" charset="-120"/>
               </a:rPr>
-              <a:t>12</a:t>
+              <a:t>13</a:t>
             </a:r>
             <a:endParaRPr lang="en-US" sz="1100" dirty="0"/>
           </a:p>
@@ -5646,7 +7394,7 @@
                 <a:ea typeface="Aptos" pitchFamily="34" charset="-122"/>
                 <a:cs typeface="Aptos" pitchFamily="34" charset="-120"/>
               </a:rPr>
-              <a:t>image_2/</a:t>
+              <a:t>image_2</a:t>
             </a:r>
             <a:endParaRPr lang="en-US" sz="1000" dirty="0"/>
           </a:p>
@@ -5684,10 +7432,8 @@
                   <a:srgbClr val="58687C"/>
                 </a:solidFill>
                 <a:latin typeface="Aptos" pitchFamily="34" charset="0"/>
-                <a:ea typeface="Aptos" pitchFamily="34" charset="-122"/>
-                <a:cs typeface="Aptos" pitchFamily="34" charset="-120"/>
-              </a:rPr>
-              <a:t>RGB camera images</a:t>
+              </a:rPr>
+              <a:t>Camera Images</a:t>
             </a:r>
             <a:endParaRPr lang="en-US" sz="960" dirty="0"/>
           </a:p>
@@ -5756,7 +7502,7 @@
               <a:buNone/>
             </a:pPr>
             <a:r>
-              <a:rPr lang="en-US" sz="1000" b="1" dirty="0">
+              <a:rPr lang="en-US" sz="1000" b="1" dirty="0" err="1">
                 <a:solidFill>
                   <a:srgbClr val="142E53"/>
                 </a:solidFill>
@@ -5764,7 +7510,7 @@
                 <a:ea typeface="Aptos" pitchFamily="34" charset="-122"/>
                 <a:cs typeface="Aptos" pitchFamily="34" charset="-120"/>
               </a:rPr>
-              <a:t>velodyne/</a:t>
+              <a:t>velodyne</a:t>
             </a:r>
             <a:endParaRPr lang="en-US" sz="1000" dirty="0"/>
           </a:p>
@@ -5805,7 +7551,7 @@
                 <a:ea typeface="Aptos" pitchFamily="34" charset="-122"/>
                 <a:cs typeface="Aptos" pitchFamily="34" charset="-120"/>
               </a:rPr>
-              <a:t>XYZ + reflectance point clouds</a:t>
+              <a:t>XYZ Lidar Coordinates/points</a:t>
             </a:r>
             <a:endParaRPr lang="en-US" sz="960" dirty="0"/>
           </a:p>
@@ -5874,7 +7620,7 @@
               <a:buNone/>
             </a:pPr>
             <a:r>
-              <a:rPr lang="en-US" sz="1000" b="1" dirty="0">
+              <a:rPr lang="en-US" sz="1000" b="1" dirty="0" err="1">
                 <a:solidFill>
                   <a:srgbClr val="142E53"/>
                 </a:solidFill>
@@ -5882,7 +7628,7 @@
                 <a:ea typeface="Aptos" pitchFamily="34" charset="-122"/>
                 <a:cs typeface="Aptos" pitchFamily="34" charset="-120"/>
               </a:rPr>
-              <a:t>calib/</a:t>
+              <a:t>calib</a:t>
             </a:r>
             <a:endParaRPr lang="en-US" sz="1000" dirty="0"/>
           </a:p>
@@ -5923,7 +7669,7 @@
                 <a:ea typeface="Aptos" pitchFamily="34" charset="-122"/>
                 <a:cs typeface="Aptos" pitchFamily="34" charset="-120"/>
               </a:rPr>
-              <a:t>P2, R0_rect, Tr_velo_to_cam</a:t>
+              <a:t>Calibration information</a:t>
             </a:r>
             <a:endParaRPr lang="en-US" sz="960" dirty="0"/>
           </a:p>
@@ -6000,7 +7746,7 @@
                 <a:ea typeface="Aptos" pitchFamily="34" charset="-122"/>
                 <a:cs typeface="Aptos" pitchFamily="34" charset="-120"/>
               </a:rPr>
-              <a:t>label_2/</a:t>
+              <a:t>label_2</a:t>
             </a:r>
             <a:endParaRPr lang="en-US" sz="1000" dirty="0"/>
           </a:p>
@@ -6041,7 +7787,7 @@
                 <a:ea typeface="Aptos" pitchFamily="34" charset="-122"/>
                 <a:cs typeface="Aptos" pitchFamily="34" charset="-120"/>
               </a:rPr>
-              <a:t>Object labels and 3D locations</a:t>
+              <a:t>Reference object annotations</a:t>
             </a:r>
             <a:endParaRPr lang="en-US" sz="960" dirty="0"/>
           </a:p>
@@ -6225,17 +7971,6 @@
             <a:pPr marL="0" indent="0" algn="l">
               <a:buNone/>
             </a:pPr>
-            <a:r>
-              <a:rPr lang="en-US" sz="940" dirty="0">
-                <a:solidFill>
-                  <a:srgbClr val="58687C"/>
-                </a:solidFill>
-                <a:latin typeface="Aptos" pitchFamily="34" charset="0"/>
-                <a:ea typeface="Aptos" pitchFamily="34" charset="-122"/>
-                <a:cs typeface="Aptos" pitchFamily="34" charset="-120"/>
-              </a:rPr>
-              <a:t>Local 2D YOLO subset: 150 train + 40 val images; 5 separate KITTI 3D frames used for paired sensor fusion.</a:t>
-            </a:r>
             <a:endParaRPr lang="en-US" sz="940" dirty="0"/>
           </a:p>
         </p:txBody>
@@ -6248,7 +7983,7 @@
 </p:sld>
 </file>
 
-<file path=ppt/slides/slide13.xml><?xml version="1.0" encoding="utf-8"?>
+<file path=ppt/slides/slide14.xml><?xml version="1.0" encoding="utf-8"?>
 <p:sld xmlns:a="http://schemas.openxmlformats.org/drawingml/2006/main" xmlns:r="http://schemas.openxmlformats.org/officeDocument/2006/relationships" xmlns:p="http://schemas.openxmlformats.org/presentationml/2006/main">
   <p:cSld name="Slide 13">
     <p:bg>
@@ -6572,7 +8307,7 @@
                 <a:ea typeface="Aptos" pitchFamily="34" charset="-122"/>
                 <a:cs typeface="Aptos" pitchFamily="34" charset="-120"/>
               </a:rPr>
-              <a:t>13</a:t>
+              <a:t>14</a:t>
             </a:r>
             <a:endParaRPr lang="en-US" sz="1100" dirty="0"/>
           </a:p>
@@ -7126,8 +8861,8 @@
         </p:nvSpPr>
         <p:spPr>
           <a:xfrm>
-            <a:off x="923544" y="5230368"/>
-            <a:ext cx="10424160" cy="182880"/>
+            <a:off x="923544" y="5193792"/>
+            <a:ext cx="6949440" cy="182880"/>
           </a:xfrm>
           <a:prstGeom prst="rect">
             <a:avLst/>
@@ -7153,12 +8888,36 @@
                 <a:ea typeface="Aptos" pitchFamily="34" charset="-122"/>
                 <a:cs typeface="Aptos" pitchFamily="34" charset="-120"/>
               </a:rPr>
-              <a:t>Green = YOLO prediction   ·   Cyan dashed = matched KITTI 2D label   ·   Point colors represent LiDAR range.</a:t>
+              <a:t>Green = YOLO prediction  ·  Cyan dashed = matched KITTI label  ·  Fifth frame (000029, unmatched) on next slide</a:t>
             </a:r>
             <a:endParaRPr lang="en-US" sz="920" dirty="0"/>
           </a:p>
         </p:txBody>
       </p:sp>
+      <p:pic>
+        <p:nvPicPr>
+          <p:cNvPr id="27" name="Picture 26" descr="colorbar.png"/>
+          <p:cNvPicPr>
+            <a:picLocks noChangeAspect="1"/>
+          </p:cNvPicPr>
+          <p:nvPr/>
+        </p:nvPicPr>
+        <p:blipFill>
+          <a:blip r:embed="rId7"/>
+          <a:stretch>
+            <a:fillRect/>
+          </a:stretch>
+        </p:blipFill>
+        <p:spPr>
+          <a:xfrm>
+            <a:off x="8001000" y="5074920"/>
+            <a:ext cx="3566160" cy="347472"/>
+          </a:xfrm>
+          <a:prstGeom prst="rect">
+            <a:avLst/>
+          </a:prstGeom>
+        </p:spPr>
+      </p:pic>
     </p:spTree>
   </p:cSld>
   <p:clrMapOvr>
@@ -7167,7 +8926,7 @@
 </p:sld>
 </file>
 
-<file path=ppt/slides/slide14.xml><?xml version="1.0" encoding="utf-8"?>
+<file path=ppt/slides/slide15.xml><?xml version="1.0" encoding="utf-8"?>
 <p:sld xmlns:a="http://schemas.openxmlformats.org/drawingml/2006/main" xmlns:r="http://schemas.openxmlformats.org/officeDocument/2006/relationships" xmlns:p="http://schemas.openxmlformats.org/presentationml/2006/main">
   <p:cSld name="Slide 14">
     <p:bg>
@@ -7491,7 +9250,7 @@
                 <a:ea typeface="Aptos" pitchFamily="34" charset="-122"/>
                 <a:cs typeface="Aptos" pitchFamily="34" charset="-120"/>
               </a:rPr>
-              <a:t>14</a:t>
+              <a:t>15</a:t>
             </a:r>
             <a:endParaRPr lang="en-US" sz="1100" dirty="0"/>
           </a:p>
@@ -7735,124 +9494,6 @@
       </p:sp>
       <p:sp>
         <p:nvSpPr>
-          <p:cNvPr id="16" name="Shape 14"/>
-          <p:cNvSpPr/>
-          <p:nvPr/>
-        </p:nvSpPr>
-        <p:spPr>
-          <a:xfrm>
-            <a:off x="6382512" y="1097280"/>
-            <a:ext cx="2569464" cy="859536"/>
-          </a:xfrm>
-          <a:prstGeom prst="roundRect">
-            <a:avLst>
-              <a:gd name="adj" fmla="val 13830"/>
-            </a:avLst>
-          </a:prstGeom>
-          <a:solidFill>
-            <a:srgbClr val="EFE8FA"/>
-          </a:solidFill>
-          <a:ln w="12700">
-            <a:solidFill>
-              <a:srgbClr val="EFE8FA">
-                <a:alpha val="0"/>
-              </a:srgbClr>
-            </a:solidFill>
-            <a:prstDash val="solid"/>
-          </a:ln>
-        </p:spPr>
-        <p:txBody>
-          <a:bodyPr/>
-          <a:lstStyle/>
-          <a:p>
-            <a:endParaRPr lang="nb-NO"/>
-          </a:p>
-        </p:txBody>
-      </p:sp>
-      <p:sp>
-        <p:nvSpPr>
-          <p:cNvPr id="17" name="Text 15"/>
-          <p:cNvSpPr txBox="1"/>
-          <p:nvPr/>
-        </p:nvSpPr>
-        <p:spPr>
-          <a:xfrm>
-            <a:off x="6446520" y="1179576"/>
-            <a:ext cx="2441448" cy="403982"/>
-          </a:xfrm>
-          <a:prstGeom prst="rect">
-            <a:avLst/>
-          </a:prstGeom>
-          <a:noFill/>
-          <a:ln/>
-        </p:spPr>
-        <p:txBody>
-          <a:bodyPr wrap="square" lIns="0" tIns="0" rIns="0" bIns="0" rtlCol="0" anchor="ctr">
-            <a:normAutofit/>
-          </a:bodyPr>
-          <a:lstStyle/>
-          <a:p>
-            <a:pPr marL="0" indent="0" algn="ctr">
-              <a:buNone/>
-            </a:pPr>
-            <a:r>
-              <a:rPr lang="en-US" sz="2200" b="1" dirty="0">
-                <a:solidFill>
-                  <a:srgbClr val="142E53"/>
-                </a:solidFill>
-                <a:latin typeface="Aptos" pitchFamily="34" charset="0"/>
-                <a:ea typeface="Aptos" pitchFamily="34" charset="-122"/>
-                <a:cs typeface="Aptos" pitchFamily="34" charset="-120"/>
-              </a:rPr>
-              <a:t>0.50</a:t>
-            </a:r>
-            <a:endParaRPr lang="en-US" sz="2200" dirty="0"/>
-          </a:p>
-        </p:txBody>
-      </p:sp>
-      <p:sp>
-        <p:nvSpPr>
-          <p:cNvPr id="18" name="Text 16"/>
-          <p:cNvSpPr txBox="1"/>
-          <p:nvPr/>
-        </p:nvSpPr>
-        <p:spPr>
-          <a:xfrm>
-            <a:off x="6464808" y="1621597"/>
-            <a:ext cx="2404872" cy="240670"/>
-          </a:xfrm>
-          <a:prstGeom prst="rect">
-            <a:avLst/>
-          </a:prstGeom>
-          <a:noFill/>
-          <a:ln/>
-        </p:spPr>
-        <p:txBody>
-          <a:bodyPr wrap="square" lIns="0" tIns="0" rIns="0" bIns="0" rtlCol="0" anchor="ctr">
-            <a:normAutofit/>
-          </a:bodyPr>
-          <a:lstStyle/>
-          <a:p>
-            <a:pPr marL="0" indent="0" algn="ctr">
-              <a:buNone/>
-            </a:pPr>
-            <a:r>
-              <a:rPr lang="en-US" sz="940" dirty="0">
-                <a:solidFill>
-                  <a:srgbClr val="58687C"/>
-                </a:solidFill>
-                <a:latin typeface="Aptos" pitchFamily="34" charset="0"/>
-                <a:ea typeface="Aptos" pitchFamily="34" charset="-122"/>
-                <a:cs typeface="Aptos" pitchFamily="34" charset="-120"/>
-              </a:rPr>
-              <a:t>Minimum match IoU</a:t>
-            </a:r>
-            <a:endParaRPr lang="en-US" sz="940" dirty="0"/>
-          </a:p>
-        </p:txBody>
-      </p:sp>
-      <p:sp>
-        <p:nvSpPr>
           <p:cNvPr id="19" name="Shape 17"/>
           <p:cNvSpPr/>
           <p:nvPr/>
@@ -9582,7 +11223,7 @@
         </p:nvSpPr>
         <p:spPr>
           <a:xfrm>
-            <a:off x="841248" y="4992624"/>
+            <a:off x="818388" y="4992624"/>
             <a:ext cx="10533888" cy="210312"/>
           </a:xfrm>
           <a:prstGeom prst="rect">
@@ -9593,9 +11234,68 @@
         </p:spPr>
         <p:txBody>
           <a:bodyPr wrap="square" lIns="0" tIns="0" rIns="0" bIns="0" rtlCol="0" anchor="ctr">
-            <a:normAutofit/>
-          </a:bodyPr>
-          <a:lstStyle/>
+            <a:noAutofit/>
+          </a:bodyPr>
+          <a:lstStyle/>
+          <a:p>
+            <a:pPr algn="ctr"/>
+            <a:r>
+              <a:rPr lang="nb-NO" sz="1000" dirty="0" err="1"/>
+              <a:t>LiDAR</a:t>
+            </a:r>
+            <a:r>
+              <a:rPr lang="nb-NO" sz="1000" dirty="0"/>
+              <a:t> &gt; Front </a:t>
+            </a:r>
+            <a:r>
+              <a:rPr lang="nb-NO" sz="1000" dirty="0" err="1"/>
+              <a:t>of</a:t>
+            </a:r>
+            <a:r>
+              <a:rPr lang="nb-NO" sz="1000" dirty="0"/>
+              <a:t> </a:t>
+            </a:r>
+            <a:r>
+              <a:rPr lang="nb-NO" sz="1000" dirty="0" err="1"/>
+              <a:t>the</a:t>
+            </a:r>
+            <a:r>
+              <a:rPr lang="nb-NO" sz="1000" dirty="0"/>
+              <a:t> </a:t>
+            </a:r>
+            <a:r>
+              <a:rPr lang="nb-NO" sz="1000" dirty="0" err="1"/>
+              <a:t>car</a:t>
+            </a:r>
+            <a:r>
+              <a:rPr lang="nb-NO" sz="1000" dirty="0"/>
+              <a:t> – </a:t>
+            </a:r>
+            <a:r>
+              <a:rPr lang="nb-NO" sz="1000" dirty="0" err="1"/>
+              <a:t>Kitti</a:t>
+            </a:r>
+            <a:r>
+              <a:rPr lang="nb-NO" sz="1000" dirty="0"/>
+              <a:t> Centre </a:t>
+            </a:r>
+            <a:r>
+              <a:rPr lang="nb-NO" sz="1000" dirty="0" err="1"/>
+              <a:t>of</a:t>
+            </a:r>
+            <a:r>
+              <a:rPr lang="nb-NO" sz="1000" dirty="0"/>
+              <a:t> </a:t>
+            </a:r>
+            <a:r>
+              <a:rPr lang="nb-NO" sz="1000" dirty="0" err="1"/>
+              <a:t>car</a:t>
+            </a:r>
+            <a:r>
+              <a:rPr lang="nb-NO" sz="1000" dirty="0"/>
+              <a:t>.</a:t>
+            </a:r>
+          </a:p>
           <a:p>
             <a:pPr marL="0" indent="0" algn="ctr">
               <a:buNone/>
@@ -9609,7 +11309,29 @@
                 <a:ea typeface="Aptos" pitchFamily="34" charset="-122"/>
                 <a:cs typeface="Aptos" pitchFamily="34" charset="-120"/>
               </a:rPr>
-              <a:t>Range estimate = 20th percentile of projected LiDAR points in the YOLO box; GT range is to the labeled 3D object location.</a:t>
+              <a:t>GT is the 3D box </a:t>
+            </a:r>
+            <a:r>
+              <a:rPr lang="en-US" sz="1000" dirty="0" err="1">
+                <a:solidFill>
+                  <a:srgbClr val="142E53"/>
+                </a:solidFill>
+                <a:latin typeface="Aptos" pitchFamily="34" charset="0"/>
+                <a:ea typeface="Aptos" pitchFamily="34" charset="-122"/>
+                <a:cs typeface="Aptos" pitchFamily="34" charset="-120"/>
+              </a:rPr>
+              <a:t>centre</a:t>
+            </a:r>
+            <a:r>
+              <a:rPr lang="en-US" sz="1000" dirty="0">
+                <a:solidFill>
+                  <a:srgbClr val="142E53"/>
+                </a:solidFill>
+                <a:latin typeface="Aptos" pitchFamily="34" charset="0"/>
+                <a:ea typeface="Aptos" pitchFamily="34" charset="-122"/>
+                <a:cs typeface="Aptos" pitchFamily="34" charset="-120"/>
+              </a:rPr>
+              <a:t>.</a:t>
             </a:r>
             <a:endParaRPr lang="en-US" sz="1000" dirty="0"/>
           </a:p>
@@ -9623,7 +11345,7 @@
 </p:sld>
 </file>
 
-<file path=ppt/slides/slide15.xml><?xml version="1.0" encoding="utf-8"?>
+<file path=ppt/slides/slide16.xml><?xml version="1.0" encoding="utf-8"?>
 <p:sld xmlns:a="http://schemas.openxmlformats.org/drawingml/2006/main" xmlns:r="http://schemas.openxmlformats.org/officeDocument/2006/relationships" xmlns:p="http://schemas.openxmlformats.org/presentationml/2006/main">
   <p:cSld name="Slide 15">
     <p:bg>
@@ -9943,7 +11665,7 @@
                 <a:ea typeface="Aptos" pitchFamily="34" charset="-122"/>
                 <a:cs typeface="Aptos" pitchFamily="34" charset="-120"/>
               </a:rPr>
-              <a:t>15</a:t>
+              <a:t>16</a:t>
             </a:r>
             <a:endParaRPr lang="en-US" sz="1100" dirty="0"/>
           </a:p>
@@ -10995,7 +12717,7 @@
                 <a:ea typeface="Aptos" pitchFamily="34" charset="-122"/>
                 <a:cs typeface="Aptos" pitchFamily="34" charset="-120"/>
               </a:rPr>
-              <a:t>Controller starts at (−3.0, 0) and follows 5 waypoints toward (2.15, 0).</a:t>
+              <a:t>Known 5-waypoint route from (−3.0, 0) to (2.15, 0); camera logged, not used for goal detection.</a:t>
             </a:r>
             <a:endParaRPr lang="en-US" sz="940" dirty="0"/>
           </a:p>
@@ -12010,7 +13732,7 @@
 </p:sld>
 </file>
 
-<file path=ppt/slides/slide16.xml><?xml version="1.0" encoding="utf-8"?>
+<file path=ppt/slides/slide17.xml><?xml version="1.0" encoding="utf-8"?>
 <p:sld xmlns:a="http://schemas.openxmlformats.org/drawingml/2006/main" xmlns:r="http://schemas.openxmlformats.org/officeDocument/2006/relationships" xmlns:p="http://schemas.openxmlformats.org/presentationml/2006/main">
   <p:cSld name="Slide 16">
     <p:bg>
@@ -12212,13 +13934,22 @@
               <a:buNone/>
             </a:pPr>
             <a:r>
-              <a:rPr sz="1400" b="0">
+              <a:rPr sz="1400" b="0" dirty="0">
                 <a:solidFill>
                   <a:srgbClr val="5D6778"/>
                 </a:solidFill>
                 <a:latin typeface="Aptos"/>
               </a:rPr>
-              <a:t>Longitudinal slip is computed from encoder and GPS velocity; every trial saves synchronized sensor data</a:t>
+              <a:t>Longitudinal slip </a:t>
+            </a:r>
+            <a:r>
+              <a:rPr lang="nb-NO" sz="1400" b="0" dirty="0" err="1">
+                <a:solidFill>
+                  <a:srgbClr val="5D6778"/>
+                </a:solidFill>
+                <a:latin typeface="Aptos"/>
+              </a:rPr>
+              <a:t>computation</a:t>
             </a:r>
             <a:endParaRPr lang="en-US" sz="1000" dirty="0"/>
           </a:p>
@@ -12330,7 +14061,7 @@
                 <a:ea typeface="Aptos" pitchFamily="34" charset="-122"/>
                 <a:cs typeface="Aptos" pitchFamily="34" charset="-120"/>
               </a:rPr>
-              <a:t>16</a:t>
+              <a:t>17</a:t>
             </a:r>
             <a:endParaRPr lang="en-US" sz="1100" dirty="0"/>
           </a:p>
@@ -13504,7 +15235,7 @@
 </p:sld>
 </file>
 
-<file path=ppt/slides/slide17.xml><?xml version="1.0" encoding="utf-8"?>
+<file path=ppt/slides/slide18.xml><?xml version="1.0" encoding="utf-8"?>
 <p:sld xmlns:a="http://schemas.openxmlformats.org/drawingml/2006/main" xmlns:r="http://schemas.openxmlformats.org/officeDocument/2006/relationships" xmlns:p="http://schemas.openxmlformats.org/presentationml/2006/main">
   <p:cSld name="Slide 17">
     <p:bg>
@@ -13702,11 +15433,11 @@
           </a:bodyPr>
           <a:lstStyle/>
           <a:p>
-            <a:pPr marL="0" indent="0" algn="l">
-              <a:buNone/>
-            </a:pPr>
-            <a:r>
-              <a:rPr sz="1400" b="0">
+            <a:pPr marL="0" indent="0" algn="ctr">
+              <a:buNone/>
+            </a:pPr>
+            <a:r>
+              <a:rPr sz="1000" b="0" dirty="0">
                 <a:solidFill>
                   <a:srgbClr val="5D6778"/>
                 </a:solidFill>
@@ -13726,7 +15457,7 @@
         </p:nvSpPr>
         <p:spPr>
           <a:xfrm>
-            <a:off x="521208" y="5440680"/>
+            <a:off x="502920" y="5440680"/>
             <a:ext cx="11137392" cy="0"/>
           </a:xfrm>
           <a:prstGeom prst="line">
@@ -13756,7 +15487,7 @@
         </p:nvSpPr>
         <p:spPr>
           <a:xfrm>
-            <a:off x="576072" y="5468112"/>
+            <a:off x="557784" y="5468112"/>
             <a:ext cx="6035040" cy="137160"/>
           </a:xfrm>
           <a:prstGeom prst="rect">
@@ -13824,7 +15555,7 @@
                 <a:ea typeface="Aptos" pitchFamily="34" charset="-122"/>
                 <a:cs typeface="Aptos" pitchFamily="34" charset="-120"/>
               </a:rPr>
-              <a:t>17</a:t>
+              <a:t>18</a:t>
             </a:r>
             <a:endParaRPr lang="en-US" sz="1100" dirty="0"/>
           </a:p>
@@ -13838,7 +15569,7 @@
         </p:nvSpPr>
         <p:spPr>
           <a:xfrm>
-            <a:off x="621792" y="1298448"/>
+            <a:off x="603504" y="950976"/>
             <a:ext cx="3246120" cy="1993392"/>
           </a:xfrm>
           <a:prstGeom prst="roundRect">
@@ -13886,7 +15617,7 @@
         </p:nvSpPr>
         <p:spPr>
           <a:xfrm>
-            <a:off x="731520" y="1408176"/>
+            <a:off x="713232" y="1060704"/>
             <a:ext cx="2148840" cy="310896"/>
           </a:xfrm>
           <a:prstGeom prst="roundRect">
@@ -13942,7 +15673,7 @@
         </p:nvSpPr>
         <p:spPr>
           <a:xfrm>
-            <a:off x="932688" y="1792224"/>
+            <a:off x="914400" y="1444752"/>
             <a:ext cx="2606040" cy="1170432"/>
           </a:xfrm>
           <a:prstGeom prst="rect">
@@ -14013,7 +15744,7 @@
         </p:nvSpPr>
         <p:spPr>
           <a:xfrm>
-            <a:off x="4069080" y="1298448"/>
+            <a:off x="4050792" y="950976"/>
             <a:ext cx="7498079" cy="1993392"/>
           </a:xfrm>
           <a:prstGeom prst="roundRect">
@@ -14061,7 +15792,7 @@
         </p:nvSpPr>
         <p:spPr>
           <a:xfrm>
-            <a:off x="4178808" y="1408176"/>
+            <a:off x="4160520" y="1060704"/>
             <a:ext cx="2606040" cy="310896"/>
           </a:xfrm>
           <a:prstGeom prst="roundRect">
@@ -14117,7 +15848,7 @@
         </p:nvSpPr>
         <p:spPr>
           <a:xfrm>
-            <a:off x="4407408" y="1828800"/>
+            <a:off x="4389120" y="1481328"/>
             <a:ext cx="1417320" cy="201168"/>
           </a:xfrm>
           <a:prstGeom prst="rect">
@@ -14151,7 +15882,7 @@
         </p:nvSpPr>
         <p:spPr>
           <a:xfrm>
-            <a:off x="5961888" y="1828800"/>
+            <a:off x="5943600" y="1481328"/>
             <a:ext cx="1417320" cy="201168"/>
           </a:xfrm>
           <a:prstGeom prst="rect">
@@ -14185,7 +15916,7 @@
         </p:nvSpPr>
         <p:spPr>
           <a:xfrm>
-            <a:off x="7562088" y="1828800"/>
+            <a:off x="7543800" y="1481328"/>
             <a:ext cx="1417320" cy="201168"/>
           </a:xfrm>
           <a:prstGeom prst="rect">
@@ -14219,7 +15950,7 @@
         </p:nvSpPr>
         <p:spPr>
           <a:xfrm>
-            <a:off x="9144000" y="1828800"/>
+            <a:off x="9125712" y="1481328"/>
             <a:ext cx="1417320" cy="201168"/>
           </a:xfrm>
           <a:prstGeom prst="rect">
@@ -14253,7 +15984,7 @@
         </p:nvSpPr>
         <p:spPr>
           <a:xfrm>
-            <a:off x="4343400" y="2011680"/>
+            <a:off x="4325112" y="1737360"/>
             <a:ext cx="6839712" cy="16510"/>
           </a:xfrm>
           <a:prstGeom prst="rect">
@@ -14299,7 +16030,7 @@
         </p:nvSpPr>
         <p:spPr>
           <a:xfrm>
-            <a:off x="4407408" y="2176272"/>
+            <a:off x="4389120" y="1828800"/>
             <a:ext cx="1508760" cy="228600"/>
           </a:xfrm>
           <a:prstGeom prst="rect">
@@ -14333,7 +16064,7 @@
         </p:nvSpPr>
         <p:spPr>
           <a:xfrm>
-            <a:off x="5961888" y="2176272"/>
+            <a:off x="5943600" y="1828800"/>
             <a:ext cx="1325880" cy="228600"/>
           </a:xfrm>
           <a:prstGeom prst="rect">
@@ -14367,7 +16098,7 @@
         </p:nvSpPr>
         <p:spPr>
           <a:xfrm>
-            <a:off x="7562088" y="2176272"/>
+            <a:off x="7543800" y="1828800"/>
             <a:ext cx="1234440" cy="228600"/>
           </a:xfrm>
           <a:prstGeom prst="rect">
@@ -14401,7 +16132,7 @@
         </p:nvSpPr>
         <p:spPr>
           <a:xfrm>
-            <a:off x="9144000" y="2176272"/>
+            <a:off x="9125712" y="1828800"/>
             <a:ext cx="1143000" cy="228600"/>
           </a:xfrm>
           <a:prstGeom prst="rect">
@@ -14435,7 +16166,7 @@
         </p:nvSpPr>
         <p:spPr>
           <a:xfrm>
-            <a:off x="4407408" y="2487168"/>
+            <a:off x="4389120" y="2139696"/>
             <a:ext cx="1508760" cy="228600"/>
           </a:xfrm>
           <a:prstGeom prst="rect">
@@ -14469,7 +16200,7 @@
         </p:nvSpPr>
         <p:spPr>
           <a:xfrm>
-            <a:off x="5961888" y="2487168"/>
+            <a:off x="5943600" y="2139696"/>
             <a:ext cx="1325880" cy="228600"/>
           </a:xfrm>
           <a:prstGeom prst="rect">
@@ -14503,7 +16234,7 @@
         </p:nvSpPr>
         <p:spPr>
           <a:xfrm>
-            <a:off x="7562088" y="2487168"/>
+            <a:off x="7543800" y="2139696"/>
             <a:ext cx="1234440" cy="228600"/>
           </a:xfrm>
           <a:prstGeom prst="rect">
@@ -14537,7 +16268,7 @@
         </p:nvSpPr>
         <p:spPr>
           <a:xfrm>
-            <a:off x="9144000" y="2487168"/>
+            <a:off x="9125712" y="2139696"/>
             <a:ext cx="1143000" cy="228600"/>
           </a:xfrm>
           <a:prstGeom prst="rect">
@@ -14571,7 +16302,7 @@
         </p:nvSpPr>
         <p:spPr>
           <a:xfrm>
-            <a:off x="9784080" y="2706624"/>
+            <a:off x="9765792" y="2359152"/>
             <a:ext cx="1554480" cy="329184"/>
           </a:xfrm>
           <a:prstGeom prst="roundRect">
@@ -14627,7 +16358,7 @@
         </p:nvSpPr>
         <p:spPr>
           <a:xfrm>
-            <a:off x="621792" y="3493008"/>
+            <a:off x="603504" y="3145536"/>
             <a:ext cx="10954512" cy="2240280"/>
           </a:xfrm>
           <a:prstGeom prst="roundRect">
@@ -14675,7 +16406,7 @@
         </p:nvSpPr>
         <p:spPr>
           <a:xfrm>
-            <a:off x="731520" y="3602736"/>
+            <a:off x="713232" y="3255264"/>
             <a:ext cx="2880360" cy="310896"/>
           </a:xfrm>
           <a:prstGeom prst="roundRect">
@@ -14739,1237 +16470,14 @@
         </p:blipFill>
         <p:spPr>
           <a:xfrm>
-            <a:off x="932688" y="3858768"/>
-            <a:ext cx="10012680" cy="2435036"/>
+            <a:off x="2511845" y="3611880"/>
+            <a:ext cx="7137828" cy="1737360"/>
           </a:xfrm>
           <a:prstGeom prst="rect">
             <a:avLst/>
           </a:prstGeom>
         </p:spPr>
       </p:pic>
-    </p:spTree>
-  </p:cSld>
-  <p:clrMapOvr>
-    <a:masterClrMapping/>
-  </p:clrMapOvr>
-</p:sld>
-</file>
-
-<file path=ppt/slides/slide18.xml><?xml version="1.0" encoding="utf-8"?>
-<p:sld xmlns:a="http://schemas.openxmlformats.org/drawingml/2006/main" xmlns:r="http://schemas.openxmlformats.org/officeDocument/2006/relationships" xmlns:p="http://schemas.openxmlformats.org/presentationml/2006/main">
-  <p:cSld name="Slide 18">
-    <p:bg>
-      <p:bgPr>
-        <a:solidFill>
-          <a:srgbClr val="F7F9FC"/>
-        </a:solidFill>
-        <a:effectLst/>
-      </p:bgPr>
-    </p:bg>
-    <p:spTree>
-      <p:nvGrpSpPr>
-        <p:cNvPr id="1" name=""/>
-        <p:cNvGrpSpPr/>
-        <p:nvPr/>
-      </p:nvGrpSpPr>
-      <p:grpSpPr>
-        <a:xfrm>
-          <a:off x="0" y="0"/>
-          <a:ext cx="0" cy="0"/>
-          <a:chOff x="0" y="0"/>
-          <a:chExt cx="0" cy="0"/>
-        </a:xfrm>
-      </p:grpSpPr>
-      <p:sp>
-        <p:nvSpPr>
-          <p:cNvPr id="2" name="Shape 0"/>
-          <p:cNvSpPr/>
-          <p:nvPr/>
-        </p:nvSpPr>
-        <p:spPr>
-          <a:xfrm>
-            <a:off x="0" y="0"/>
-            <a:ext cx="12191695" cy="36576"/>
-          </a:xfrm>
-          <a:prstGeom prst="rect">
-            <a:avLst/>
-          </a:prstGeom>
-          <a:solidFill>
-            <a:srgbClr val="3477EF"/>
-          </a:solidFill>
-          <a:ln w="12700">
-            <a:solidFill>
-              <a:srgbClr val="3477EF">
-                <a:alpha val="0"/>
-              </a:srgbClr>
-            </a:solidFill>
-            <a:prstDash val="solid"/>
-          </a:ln>
-        </p:spPr>
-        <p:txBody>
-          <a:bodyPr/>
-          <a:lstStyle/>
-          <a:p>
-            <a:endParaRPr lang="nb-NO"/>
-          </a:p>
-        </p:txBody>
-      </p:sp>
-      <p:sp>
-        <p:nvSpPr>
-          <p:cNvPr id="3" name="Text 1"/>
-          <p:cNvSpPr txBox="1"/>
-          <p:nvPr/>
-        </p:nvSpPr>
-        <p:spPr>
-          <a:xfrm>
-            <a:off x="530352" y="173736"/>
-            <a:ext cx="11064240" cy="429768"/>
-          </a:xfrm>
-          <a:prstGeom prst="rect">
-            <a:avLst/>
-          </a:prstGeom>
-          <a:noFill/>
-          <a:ln/>
-        </p:spPr>
-        <p:txBody>
-          <a:bodyPr wrap="square" lIns="0" tIns="0" rIns="0" bIns="0" rtlCol="0" anchor="ctr">
-            <a:normAutofit/>
-          </a:bodyPr>
-          <a:lstStyle/>
-          <a:p>
-            <a:pPr marL="0" indent="0" algn="l">
-              <a:buNone/>
-            </a:pPr>
-            <a:r>
-              <a:rPr sz="2600" b="1">
-                <a:solidFill>
-                  <a:srgbClr val="191F2C"/>
-                </a:solidFill>
-                <a:latin typeface="Aptos"/>
-              </a:rPr>
-              <a:t>Assignment 2 — Summary and conclusions</a:t>
-            </a:r>
-            <a:endParaRPr lang="en-US" sz="2500" dirty="0"/>
-          </a:p>
-        </p:txBody>
-      </p:sp>
-      <p:sp>
-        <p:nvSpPr>
-          <p:cNvPr id="4" name="Text 2"/>
-          <p:cNvSpPr txBox="1"/>
-          <p:nvPr/>
-        </p:nvSpPr>
-        <p:spPr>
-          <a:xfrm>
-            <a:off x="576072" y="658368"/>
-            <a:ext cx="11018520" cy="256032"/>
-          </a:xfrm>
-          <a:prstGeom prst="rect">
-            <a:avLst/>
-          </a:prstGeom>
-          <a:noFill/>
-          <a:ln/>
-        </p:spPr>
-        <p:txBody>
-          <a:bodyPr wrap="square" lIns="0" tIns="0" rIns="0" bIns="0" rtlCol="0" anchor="ctr">
-            <a:normAutofit/>
-          </a:bodyPr>
-          <a:lstStyle/>
-          <a:p>
-            <a:pPr marL="0" indent="0" algn="l">
-              <a:buNone/>
-            </a:pPr>
-            <a:r>
-              <a:rPr sz="1400" b="0">
-                <a:solidFill>
-                  <a:srgbClr val="5D6778"/>
-                </a:solidFill>
-                <a:latin typeface="Aptos"/>
-              </a:rPr>
-              <a:t>What we implemented and measured across camera, LiDAR, fusion and Webots</a:t>
-            </a:r>
-            <a:endParaRPr lang="en-US" sz="1000" dirty="0"/>
-          </a:p>
-        </p:txBody>
-      </p:sp>
-      <p:sp>
-        <p:nvSpPr>
-          <p:cNvPr id="5" name="Shape 3"/>
-          <p:cNvSpPr/>
-          <p:nvPr/>
-        </p:nvSpPr>
-        <p:spPr>
-          <a:xfrm>
-            <a:off x="521208" y="5440680"/>
-            <a:ext cx="11137392" cy="0"/>
-          </a:xfrm>
-          <a:prstGeom prst="line">
-            <a:avLst/>
-          </a:prstGeom>
-          <a:noFill/>
-          <a:ln w="6350">
-            <a:solidFill>
-              <a:srgbClr val="D7E2EE"/>
-            </a:solidFill>
-            <a:prstDash val="solid"/>
-          </a:ln>
-        </p:spPr>
-        <p:txBody>
-          <a:bodyPr/>
-          <a:lstStyle/>
-          <a:p>
-            <a:endParaRPr lang="nb-NO"/>
-          </a:p>
-        </p:txBody>
-      </p:sp>
-      <p:sp>
-        <p:nvSpPr>
-          <p:cNvPr id="6" name="Text 4"/>
-          <p:cNvSpPr txBox="1"/>
-          <p:nvPr/>
-        </p:nvSpPr>
-        <p:spPr>
-          <a:xfrm>
-            <a:off x="576072" y="5468112"/>
-            <a:ext cx="6035040" cy="137160"/>
-          </a:xfrm>
-          <a:prstGeom prst="rect">
-            <a:avLst/>
-          </a:prstGeom>
-          <a:noFill/>
-          <a:ln/>
-        </p:spPr>
-        <p:txBody>
-          <a:bodyPr wrap="square" lIns="0" tIns="0" rIns="0" bIns="0" rtlCol="0" anchor="ctr">
-            <a:normAutofit/>
-          </a:bodyPr>
-          <a:lstStyle/>
-          <a:p>
-            <a:pPr marL="0" indent="0" algn="l">
-              <a:buNone/>
-            </a:pPr>
-            <a:r>
-              <a:rPr lang="en-US" sz="750" dirty="0">
-                <a:solidFill>
-                  <a:srgbClr val="8A9AAA"/>
-                </a:solidFill>
-                <a:latin typeface="Aptos" pitchFamily="34" charset="0"/>
-                <a:ea typeface="Aptos" pitchFamily="34" charset="-122"/>
-                <a:cs typeface="Aptos" pitchFamily="34" charset="-120"/>
-              </a:rPr>
-              <a:t>MAS512  |  Assignment 2  |  Group 9</a:t>
-            </a:r>
-            <a:endParaRPr lang="en-US" sz="750" dirty="0"/>
-          </a:p>
-        </p:txBody>
-      </p:sp>
-      <p:sp>
-        <p:nvSpPr>
-          <p:cNvPr id="7" name="Text 5"/>
-          <p:cNvSpPr txBox="1"/>
-          <p:nvPr/>
-        </p:nvSpPr>
-        <p:spPr>
-          <a:xfrm>
-            <a:off x="11475720" y="173736"/>
-            <a:ext cx="237744" cy="219456"/>
-          </a:xfrm>
-          <a:prstGeom prst="rect">
-            <a:avLst/>
-          </a:prstGeom>
-          <a:noFill/>
-          <a:ln/>
-        </p:spPr>
-        <p:txBody>
-          <a:bodyPr wrap="square" lIns="0" tIns="0" rIns="0" bIns="0" rtlCol="0" anchor="ctr">
-            <a:normAutofit/>
-          </a:bodyPr>
-          <a:lstStyle/>
-          <a:p>
-            <a:pPr marL="0" indent="0" algn="ctr">
-              <a:buNone/>
-            </a:pPr>
-            <a:r>
-              <a:rPr lang="en-US" sz="1100" dirty="0">
-                <a:solidFill>
-                  <a:srgbClr val="142E53"/>
-                </a:solidFill>
-                <a:latin typeface="Aptos" pitchFamily="34" charset="0"/>
-                <a:ea typeface="Aptos" pitchFamily="34" charset="-122"/>
-                <a:cs typeface="Aptos" pitchFamily="34" charset="-120"/>
-              </a:rPr>
-              <a:t>18</a:t>
-            </a:r>
-            <a:endParaRPr lang="en-US" sz="1100" dirty="0"/>
-          </a:p>
-        </p:txBody>
-      </p:sp>
-      <p:sp>
-        <p:nvSpPr>
-          <p:cNvPr id="8" name="Shape 6"/>
-          <p:cNvSpPr/>
-          <p:nvPr/>
-        </p:nvSpPr>
-        <p:spPr>
-          <a:xfrm>
-            <a:off x="621792" y="1152144"/>
-            <a:ext cx="10981944" cy="850392"/>
-          </a:xfrm>
-          <a:prstGeom prst="roundRect">
-            <a:avLst>
-              <a:gd name="adj" fmla="val 13978"/>
-            </a:avLst>
-          </a:prstGeom>
-          <a:solidFill>
-            <a:srgbClr val="E4EEFF"/>
-          </a:solidFill>
-          <a:ln w="12700">
-            <a:solidFill>
-              <a:srgbClr val="E4EEFF">
-                <a:alpha val="0"/>
-              </a:srgbClr>
-            </a:solidFill>
-            <a:prstDash val="solid"/>
-          </a:ln>
-        </p:spPr>
-        <p:txBody>
-          <a:bodyPr/>
-          <a:lstStyle/>
-          <a:p>
-            <a:endParaRPr lang="nb-NO"/>
-          </a:p>
-        </p:txBody>
-      </p:sp>
-      <p:sp>
-        <p:nvSpPr>
-          <p:cNvPr id="9" name="Shape 7"/>
-          <p:cNvSpPr/>
-          <p:nvPr/>
-        </p:nvSpPr>
-        <p:spPr>
-          <a:xfrm>
-            <a:off x="822960" y="1362456"/>
-            <a:ext cx="438912" cy="438912"/>
-          </a:xfrm>
-          <a:prstGeom prst="ellipse">
-            <a:avLst/>
-          </a:prstGeom>
-          <a:solidFill>
-            <a:srgbClr val="3477EF"/>
-          </a:solidFill>
-          <a:ln w="12700">
-            <a:solidFill>
-              <a:srgbClr val="3477EF">
-                <a:alpha val="0"/>
-              </a:srgbClr>
-            </a:solidFill>
-            <a:prstDash val="solid"/>
-          </a:ln>
-        </p:spPr>
-        <p:txBody>
-          <a:bodyPr/>
-          <a:lstStyle/>
-          <a:p>
-            <a:endParaRPr lang="nb-NO"/>
-          </a:p>
-        </p:txBody>
-      </p:sp>
-      <p:sp>
-        <p:nvSpPr>
-          <p:cNvPr id="10" name="Text 8"/>
-          <p:cNvSpPr txBox="1"/>
-          <p:nvPr/>
-        </p:nvSpPr>
-        <p:spPr>
-          <a:xfrm>
-            <a:off x="832104" y="1426464"/>
-            <a:ext cx="411480" cy="265176"/>
-          </a:xfrm>
-          <a:prstGeom prst="rect">
-            <a:avLst/>
-          </a:prstGeom>
-          <a:noFill/>
-          <a:ln/>
-        </p:spPr>
-        <p:txBody>
-          <a:bodyPr wrap="square" lIns="0" tIns="0" rIns="0" bIns="0" rtlCol="0" anchor="ctr">
-            <a:normAutofit/>
-          </a:bodyPr>
-          <a:lstStyle/>
-          <a:p>
-            <a:pPr marL="0" indent="0" algn="ctr">
-              <a:buNone/>
-            </a:pPr>
-            <a:r>
-              <a:rPr lang="en-US" sz="1400" b="1" dirty="0">
-                <a:solidFill>
-                  <a:srgbClr val="FFFFFF"/>
-                </a:solidFill>
-                <a:latin typeface="Aptos" pitchFamily="34" charset="0"/>
-                <a:ea typeface="Aptos" pitchFamily="34" charset="-122"/>
-                <a:cs typeface="Aptos" pitchFamily="34" charset="-120"/>
-              </a:rPr>
-              <a:t>Q1</a:t>
-            </a:r>
-            <a:endParaRPr lang="en-US" sz="1400" dirty="0"/>
-          </a:p>
-        </p:txBody>
-      </p:sp>
-      <p:sp>
-        <p:nvSpPr>
-          <p:cNvPr id="11" name="Text 9"/>
-          <p:cNvSpPr txBox="1"/>
-          <p:nvPr/>
-        </p:nvSpPr>
-        <p:spPr>
-          <a:xfrm>
-            <a:off x="1499616" y="1261872"/>
-            <a:ext cx="2002536" cy="274320"/>
-          </a:xfrm>
-          <a:prstGeom prst="rect">
-            <a:avLst/>
-          </a:prstGeom>
-          <a:noFill/>
-          <a:ln/>
-        </p:spPr>
-        <p:txBody>
-          <a:bodyPr wrap="square" lIns="0" tIns="0" rIns="0" bIns="0" rtlCol="0" anchor="ctr">
-            <a:normAutofit/>
-          </a:bodyPr>
-          <a:lstStyle/>
-          <a:p>
-            <a:pPr marL="0" indent="0" algn="l">
-              <a:buNone/>
-            </a:pPr>
-            <a:r>
-              <a:rPr lang="en-US" sz="1500" b="1" dirty="0">
-                <a:solidFill>
-                  <a:srgbClr val="142E53"/>
-                </a:solidFill>
-                <a:latin typeface="Aptos" pitchFamily="34" charset="0"/>
-                <a:ea typeface="Aptos" pitchFamily="34" charset="-122"/>
-                <a:cs typeface="Aptos" pitchFamily="34" charset="-120"/>
-              </a:rPr>
-              <a:t>Camera geometry</a:t>
-            </a:r>
-            <a:endParaRPr lang="en-US" sz="1500" dirty="0"/>
-          </a:p>
-        </p:txBody>
-      </p:sp>
-      <p:sp>
-        <p:nvSpPr>
-          <p:cNvPr id="12" name="Text 10"/>
-          <p:cNvSpPr txBox="1"/>
-          <p:nvPr/>
-        </p:nvSpPr>
-        <p:spPr>
-          <a:xfrm>
-            <a:off x="3557016" y="1271016"/>
-            <a:ext cx="4572000" cy="594360"/>
-          </a:xfrm>
-          <a:prstGeom prst="rect">
-            <a:avLst/>
-          </a:prstGeom>
-          <a:noFill/>
-          <a:ln/>
-        </p:spPr>
-        <p:txBody>
-          <a:bodyPr wrap="square" lIns="0" tIns="0" rIns="0" bIns="0" rtlCol="0" anchor="ctr">
-            <a:normAutofit/>
-          </a:bodyPr>
-          <a:lstStyle/>
-          <a:p>
-            <a:pPr marL="0" indent="0" algn="l">
-              <a:buNone/>
-            </a:pPr>
-            <a:r>
-              <a:rPr lang="en-US" sz="1160" dirty="0">
-                <a:solidFill>
-                  <a:srgbClr val="24334A"/>
-                </a:solidFill>
-                <a:latin typeface="Aptos" pitchFamily="34" charset="0"/>
-                <a:ea typeface="Aptos" pitchFamily="34" charset="-122"/>
-                <a:cs typeface="Aptos" pitchFamily="34" charset="-120"/>
-              </a:rPr>
-              <a:t>889/900 YOLO detections; 70 depth corrections; R² = 1.0 mapping</a:t>
-            </a:r>
-            <a:endParaRPr lang="en-US" sz="1160" dirty="0"/>
-          </a:p>
-        </p:txBody>
-      </p:sp>
-      <p:sp>
-        <p:nvSpPr>
-          <p:cNvPr id="13" name="Text 11"/>
-          <p:cNvSpPr txBox="1"/>
-          <p:nvPr/>
-        </p:nvSpPr>
-        <p:spPr>
-          <a:xfrm>
-            <a:off x="8339328" y="1261872"/>
-            <a:ext cx="3035808" cy="594360"/>
-          </a:xfrm>
-          <a:prstGeom prst="rect">
-            <a:avLst/>
-          </a:prstGeom>
-          <a:noFill/>
-          <a:ln/>
-        </p:spPr>
-        <p:txBody>
-          <a:bodyPr wrap="square" lIns="0" tIns="0" rIns="0" bIns="0" rtlCol="0" anchor="ctr">
-            <a:normAutofit/>
-          </a:bodyPr>
-          <a:lstStyle/>
-          <a:p>
-            <a:pPr marL="0" indent="0" algn="l">
-              <a:buNone/>
-            </a:pPr>
-            <a:r>
-              <a:rPr lang="en-US" sz="1040" dirty="0">
-                <a:solidFill>
-                  <a:srgbClr val="58687C"/>
-                </a:solidFill>
-                <a:latin typeface="Aptos" pitchFamily="34" charset="0"/>
-                <a:ea typeface="Aptos" pitchFamily="34" charset="-122"/>
-                <a:cs typeface="Aptos" pitchFamily="34" charset="-120"/>
-              </a:rPr>
-              <a:t>Camera intrinsics need correct image resolution</a:t>
-            </a:r>
-            <a:endParaRPr lang="en-US" sz="1040" dirty="0"/>
-          </a:p>
-        </p:txBody>
-      </p:sp>
-      <p:sp>
-        <p:nvSpPr>
-          <p:cNvPr id="14" name="Shape 12"/>
-          <p:cNvSpPr/>
-          <p:nvPr/>
-        </p:nvSpPr>
-        <p:spPr>
-          <a:xfrm>
-            <a:off x="621792" y="2157984"/>
-            <a:ext cx="10981944" cy="850392"/>
-          </a:xfrm>
-          <a:prstGeom prst="roundRect">
-            <a:avLst>
-              <a:gd name="adj" fmla="val 13978"/>
-            </a:avLst>
-          </a:prstGeom>
-          <a:solidFill>
-            <a:srgbClr val="E1F5EF"/>
-          </a:solidFill>
-          <a:ln w="12700">
-            <a:solidFill>
-              <a:srgbClr val="E1F5EF">
-                <a:alpha val="0"/>
-              </a:srgbClr>
-            </a:solidFill>
-            <a:prstDash val="solid"/>
-          </a:ln>
-        </p:spPr>
-        <p:txBody>
-          <a:bodyPr/>
-          <a:lstStyle/>
-          <a:p>
-            <a:endParaRPr lang="nb-NO"/>
-          </a:p>
-        </p:txBody>
-      </p:sp>
-      <p:sp>
-        <p:nvSpPr>
-          <p:cNvPr id="15" name="Shape 13"/>
-          <p:cNvSpPr/>
-          <p:nvPr/>
-        </p:nvSpPr>
-        <p:spPr>
-          <a:xfrm>
-            <a:off x="822960" y="2368296"/>
-            <a:ext cx="438912" cy="438912"/>
-          </a:xfrm>
-          <a:prstGeom prst="ellipse">
-            <a:avLst/>
-          </a:prstGeom>
-          <a:solidFill>
-            <a:srgbClr val="15A68C"/>
-          </a:solidFill>
-          <a:ln w="12700">
-            <a:solidFill>
-              <a:srgbClr val="15A68C">
-                <a:alpha val="0"/>
-              </a:srgbClr>
-            </a:solidFill>
-            <a:prstDash val="solid"/>
-          </a:ln>
-        </p:spPr>
-        <p:txBody>
-          <a:bodyPr/>
-          <a:lstStyle/>
-          <a:p>
-            <a:endParaRPr lang="nb-NO"/>
-          </a:p>
-        </p:txBody>
-      </p:sp>
-      <p:sp>
-        <p:nvSpPr>
-          <p:cNvPr id="16" name="Text 14"/>
-          <p:cNvSpPr txBox="1"/>
-          <p:nvPr/>
-        </p:nvSpPr>
-        <p:spPr>
-          <a:xfrm>
-            <a:off x="832104" y="2432304"/>
-            <a:ext cx="411480" cy="265176"/>
-          </a:xfrm>
-          <a:prstGeom prst="rect">
-            <a:avLst/>
-          </a:prstGeom>
-          <a:noFill/>
-          <a:ln/>
-        </p:spPr>
-        <p:txBody>
-          <a:bodyPr wrap="square" lIns="0" tIns="0" rIns="0" bIns="0" rtlCol="0" anchor="ctr">
-            <a:normAutofit/>
-          </a:bodyPr>
-          <a:lstStyle/>
-          <a:p>
-            <a:pPr marL="0" indent="0" algn="ctr">
-              <a:buNone/>
-            </a:pPr>
-            <a:r>
-              <a:rPr lang="en-US" sz="1400" b="1" dirty="0">
-                <a:solidFill>
-                  <a:srgbClr val="FFFFFF"/>
-                </a:solidFill>
-                <a:latin typeface="Aptos" pitchFamily="34" charset="0"/>
-                <a:ea typeface="Aptos" pitchFamily="34" charset="-122"/>
-                <a:cs typeface="Aptos" pitchFamily="34" charset="-120"/>
-              </a:rPr>
-              <a:t>Q2</a:t>
-            </a:r>
-            <a:endParaRPr lang="en-US" sz="1400" dirty="0"/>
-          </a:p>
-        </p:txBody>
-      </p:sp>
-      <p:sp>
-        <p:nvSpPr>
-          <p:cNvPr id="17" name="Text 15"/>
-          <p:cNvSpPr txBox="1"/>
-          <p:nvPr/>
-        </p:nvSpPr>
-        <p:spPr>
-          <a:xfrm>
-            <a:off x="1499616" y="2267712"/>
-            <a:ext cx="2002536" cy="274320"/>
-          </a:xfrm>
-          <a:prstGeom prst="rect">
-            <a:avLst/>
-          </a:prstGeom>
-          <a:noFill/>
-          <a:ln/>
-        </p:spPr>
-        <p:txBody>
-          <a:bodyPr wrap="square" lIns="0" tIns="0" rIns="0" bIns="0" rtlCol="0" anchor="ctr">
-            <a:normAutofit/>
-          </a:bodyPr>
-          <a:lstStyle/>
-          <a:p>
-            <a:pPr marL="0" indent="0" algn="l">
-              <a:buNone/>
-            </a:pPr>
-            <a:r>
-              <a:rPr lang="en-US" sz="1500" b="1" dirty="0">
-                <a:solidFill>
-                  <a:srgbClr val="142E53"/>
-                </a:solidFill>
-                <a:latin typeface="Aptos" pitchFamily="34" charset="0"/>
-                <a:ea typeface="Aptos" pitchFamily="34" charset="-122"/>
-                <a:cs typeface="Aptos" pitchFamily="34" charset="-120"/>
-              </a:rPr>
-              <a:t>LiDAR motion</a:t>
-            </a:r>
-            <a:endParaRPr lang="en-US" sz="1500" dirty="0"/>
-          </a:p>
-        </p:txBody>
-      </p:sp>
-      <p:sp>
-        <p:nvSpPr>
-          <p:cNvPr id="18" name="Text 16"/>
-          <p:cNvSpPr txBox="1"/>
-          <p:nvPr/>
-        </p:nvSpPr>
-        <p:spPr>
-          <a:xfrm>
-            <a:off x="3557016" y="2276856"/>
-            <a:ext cx="4572000" cy="594360"/>
-          </a:xfrm>
-          <a:prstGeom prst="rect">
-            <a:avLst/>
-          </a:prstGeom>
-          <a:noFill/>
-          <a:ln/>
-        </p:spPr>
-        <p:txBody>
-          <a:bodyPr wrap="square" lIns="0" tIns="0" rIns="0" bIns="0" rtlCol="0" anchor="ctr">
-            <a:normAutofit/>
-          </a:bodyPr>
-          <a:lstStyle/>
-          <a:p>
-            <a:pPr marL="0" indent="0" algn="l">
-              <a:buNone/>
-            </a:pPr>
-            <a:r>
-              <a:rPr lang="en-US" sz="1160" dirty="0">
-                <a:solidFill>
-                  <a:srgbClr val="24334A"/>
-                </a:solidFill>
-                <a:latin typeface="Aptos" pitchFamily="34" charset="0"/>
-                <a:ea typeface="Aptos" pitchFamily="34" charset="-122"/>
-                <a:cs typeface="Aptos" pitchFamily="34" charset="-120"/>
-              </a:rPr>
-              <a:t>99/99 load centroids; 0.785 m Y span; ≈ 0 sensor motion</a:t>
-            </a:r>
-            <a:endParaRPr lang="en-US" sz="1160" dirty="0"/>
-          </a:p>
-        </p:txBody>
-      </p:sp>
-      <p:sp>
-        <p:nvSpPr>
-          <p:cNvPr id="19" name="Text 17"/>
-          <p:cNvSpPr txBox="1"/>
-          <p:nvPr/>
-        </p:nvSpPr>
-        <p:spPr>
-          <a:xfrm>
-            <a:off x="8339328" y="2267712"/>
-            <a:ext cx="3035808" cy="594360"/>
-          </a:xfrm>
-          <a:prstGeom prst="rect">
-            <a:avLst/>
-          </a:prstGeom>
-          <a:noFill/>
-          <a:ln/>
-        </p:spPr>
-        <p:txBody>
-          <a:bodyPr wrap="square" lIns="0" tIns="0" rIns="0" bIns="0" rtlCol="0" anchor="ctr">
-            <a:normAutofit/>
-          </a:bodyPr>
-          <a:lstStyle/>
-          <a:p>
-            <a:pPr marL="0" indent="0" algn="l">
-              <a:buNone/>
-            </a:pPr>
-            <a:r>
-              <a:rPr lang="en-US" sz="1040" dirty="0">
-                <a:solidFill>
-                  <a:srgbClr val="58687C"/>
-                </a:solidFill>
-                <a:latin typeface="Aptos" pitchFamily="34" charset="0"/>
-                <a:ea typeface="Aptos" pitchFamily="34" charset="-122"/>
-                <a:cs typeface="Aptos" pitchFamily="34" charset="-120"/>
-              </a:rPr>
-              <a:t>KISS-ICP tracks sensor pose, not the moving load</a:t>
-            </a:r>
-            <a:endParaRPr lang="en-US" sz="1040" dirty="0"/>
-          </a:p>
-        </p:txBody>
-      </p:sp>
-      <p:sp>
-        <p:nvSpPr>
-          <p:cNvPr id="20" name="Shape 18"/>
-          <p:cNvSpPr/>
-          <p:nvPr/>
-        </p:nvSpPr>
-        <p:spPr>
-          <a:xfrm>
-            <a:off x="621792" y="3163824"/>
-            <a:ext cx="10981944" cy="850392"/>
-          </a:xfrm>
-          <a:prstGeom prst="roundRect">
-            <a:avLst>
-              <a:gd name="adj" fmla="val 13978"/>
-            </a:avLst>
-          </a:prstGeom>
-          <a:solidFill>
-            <a:srgbClr val="FBE6F0"/>
-          </a:solidFill>
-          <a:ln w="12700">
-            <a:solidFill>
-              <a:srgbClr val="FBE6F0">
-                <a:alpha val="0"/>
-              </a:srgbClr>
-            </a:solidFill>
-            <a:prstDash val="solid"/>
-          </a:ln>
-        </p:spPr>
-        <p:txBody>
-          <a:bodyPr/>
-          <a:lstStyle/>
-          <a:p>
-            <a:endParaRPr lang="nb-NO"/>
-          </a:p>
-        </p:txBody>
-      </p:sp>
-      <p:sp>
-        <p:nvSpPr>
-          <p:cNvPr id="21" name="Shape 19"/>
-          <p:cNvSpPr/>
-          <p:nvPr/>
-        </p:nvSpPr>
-        <p:spPr>
-          <a:xfrm>
-            <a:off x="822960" y="3374136"/>
-            <a:ext cx="438912" cy="438912"/>
-          </a:xfrm>
-          <a:prstGeom prst="ellipse">
-            <a:avLst/>
-          </a:prstGeom>
-          <a:solidFill>
-            <a:srgbClr val="DC5791"/>
-          </a:solidFill>
-          <a:ln w="12700">
-            <a:solidFill>
-              <a:srgbClr val="DC5791">
-                <a:alpha val="0"/>
-              </a:srgbClr>
-            </a:solidFill>
-            <a:prstDash val="solid"/>
-          </a:ln>
-        </p:spPr>
-        <p:txBody>
-          <a:bodyPr/>
-          <a:lstStyle/>
-          <a:p>
-            <a:endParaRPr lang="nb-NO"/>
-          </a:p>
-        </p:txBody>
-      </p:sp>
-      <p:sp>
-        <p:nvSpPr>
-          <p:cNvPr id="22" name="Text 20"/>
-          <p:cNvSpPr txBox="1"/>
-          <p:nvPr/>
-        </p:nvSpPr>
-        <p:spPr>
-          <a:xfrm>
-            <a:off x="832104" y="3438144"/>
-            <a:ext cx="411480" cy="265176"/>
-          </a:xfrm>
-          <a:prstGeom prst="rect">
-            <a:avLst/>
-          </a:prstGeom>
-          <a:noFill/>
-          <a:ln/>
-        </p:spPr>
-        <p:txBody>
-          <a:bodyPr wrap="square" lIns="0" tIns="0" rIns="0" bIns="0" rtlCol="0" anchor="ctr">
-            <a:normAutofit/>
-          </a:bodyPr>
-          <a:lstStyle/>
-          <a:p>
-            <a:pPr marL="0" indent="0" algn="ctr">
-              <a:buNone/>
-            </a:pPr>
-            <a:r>
-              <a:rPr lang="en-US" sz="1400" b="1" dirty="0">
-                <a:solidFill>
-                  <a:srgbClr val="FFFFFF"/>
-                </a:solidFill>
-                <a:latin typeface="Aptos" pitchFamily="34" charset="0"/>
-                <a:ea typeface="Aptos" pitchFamily="34" charset="-122"/>
-                <a:cs typeface="Aptos" pitchFamily="34" charset="-120"/>
-              </a:rPr>
-              <a:t>Q3</a:t>
-            </a:r>
-            <a:endParaRPr lang="en-US" sz="1400" dirty="0"/>
-          </a:p>
-        </p:txBody>
-      </p:sp>
-      <p:sp>
-        <p:nvSpPr>
-          <p:cNvPr id="23" name="Text 21"/>
-          <p:cNvSpPr txBox="1"/>
-          <p:nvPr/>
-        </p:nvSpPr>
-        <p:spPr>
-          <a:xfrm>
-            <a:off x="1499616" y="3273552"/>
-            <a:ext cx="2002536" cy="274320"/>
-          </a:xfrm>
-          <a:prstGeom prst="rect">
-            <a:avLst/>
-          </a:prstGeom>
-          <a:noFill/>
-          <a:ln/>
-        </p:spPr>
-        <p:txBody>
-          <a:bodyPr wrap="square" lIns="0" tIns="0" rIns="0" bIns="0" rtlCol="0" anchor="ctr">
-            <a:normAutofit/>
-          </a:bodyPr>
-          <a:lstStyle/>
-          <a:p>
-            <a:pPr marL="0" indent="0" algn="l">
-              <a:buNone/>
-            </a:pPr>
-            <a:r>
-              <a:rPr lang="en-US" sz="1500" b="1" dirty="0">
-                <a:solidFill>
-                  <a:srgbClr val="142E53"/>
-                </a:solidFill>
-                <a:latin typeface="Aptos" pitchFamily="34" charset="0"/>
-                <a:ea typeface="Aptos" pitchFamily="34" charset="-122"/>
-                <a:cs typeface="Aptos" pitchFamily="34" charset="-120"/>
-              </a:rPr>
-              <a:t>Sensor fusion</a:t>
-            </a:r>
-            <a:endParaRPr lang="en-US" sz="1500" dirty="0"/>
-          </a:p>
-        </p:txBody>
-      </p:sp>
-      <p:sp>
-        <p:nvSpPr>
-          <p:cNvPr id="24" name="Text 22"/>
-          <p:cNvSpPr txBox="1"/>
-          <p:nvPr/>
-        </p:nvSpPr>
-        <p:spPr>
-          <a:xfrm>
-            <a:off x="3557016" y="3282696"/>
-            <a:ext cx="4572000" cy="594360"/>
-          </a:xfrm>
-          <a:prstGeom prst="rect">
-            <a:avLst/>
-          </a:prstGeom>
-          <a:noFill/>
-          <a:ln/>
-        </p:spPr>
-        <p:txBody>
-          <a:bodyPr wrap="square" lIns="0" tIns="0" rIns="0" bIns="0" rtlCol="0" anchor="ctr">
-            <a:normAutofit/>
-          </a:bodyPr>
-          <a:lstStyle/>
-          <a:p>
-            <a:pPr marL="0" indent="0" algn="l">
-              <a:buNone/>
-            </a:pPr>
-            <a:r>
-              <a:rPr lang="en-US" sz="1160" dirty="0">
-                <a:solidFill>
-                  <a:srgbClr val="24334A"/>
-                </a:solidFill>
-                <a:latin typeface="Aptos" pitchFamily="34" charset="0"/>
-                <a:ea typeface="Aptos" pitchFamily="34" charset="-122"/>
-                <a:cs typeface="Aptos" pitchFamily="34" charset="-120"/>
-              </a:rPr>
-              <a:t>4/5 KITTI box associations; mean range difference 1.82 m</a:t>
-            </a:r>
-            <a:endParaRPr lang="en-US" sz="1160" dirty="0"/>
-          </a:p>
-        </p:txBody>
-      </p:sp>
-      <p:sp>
-        <p:nvSpPr>
-          <p:cNvPr id="25" name="Text 23"/>
-          <p:cNvSpPr txBox="1"/>
-          <p:nvPr/>
-        </p:nvSpPr>
-        <p:spPr>
-          <a:xfrm>
-            <a:off x="8339328" y="3273552"/>
-            <a:ext cx="3035808" cy="594360"/>
-          </a:xfrm>
-          <a:prstGeom prst="rect">
-            <a:avLst/>
-          </a:prstGeom>
-          <a:noFill/>
-          <a:ln/>
-        </p:spPr>
-        <p:txBody>
-          <a:bodyPr wrap="square" lIns="0" tIns="0" rIns="0" bIns="0" rtlCol="0" anchor="ctr">
-            <a:normAutofit/>
-          </a:bodyPr>
-          <a:lstStyle/>
-          <a:p>
-            <a:pPr marL="0" indent="0" algn="l">
-              <a:buNone/>
-            </a:pPr>
-            <a:r>
-              <a:rPr lang="en-US" sz="1040" dirty="0">
-                <a:solidFill>
-                  <a:srgbClr val="58687C"/>
-                </a:solidFill>
-                <a:latin typeface="Aptos" pitchFamily="34" charset="0"/>
-                <a:ea typeface="Aptos" pitchFamily="34" charset="-122"/>
-                <a:cs typeface="Aptos" pitchFamily="34" charset="-120"/>
-              </a:rPr>
-              <a:t>Small five-frame sample; range surfaces differ</a:t>
-            </a:r>
-            <a:endParaRPr lang="en-US" sz="1040" dirty="0"/>
-          </a:p>
-        </p:txBody>
-      </p:sp>
-      <p:sp>
-        <p:nvSpPr>
-          <p:cNvPr id="26" name="Shape 24"/>
-          <p:cNvSpPr/>
-          <p:nvPr/>
-        </p:nvSpPr>
-        <p:spPr>
-          <a:xfrm>
-            <a:off x="621792" y="4169664"/>
-            <a:ext cx="10981944" cy="850392"/>
-          </a:xfrm>
-          <a:prstGeom prst="roundRect">
-            <a:avLst>
-              <a:gd name="adj" fmla="val 13978"/>
-            </a:avLst>
-          </a:prstGeom>
-          <a:solidFill>
-            <a:srgbClr val="EFE8FA"/>
-          </a:solidFill>
-          <a:ln w="12700">
-            <a:solidFill>
-              <a:srgbClr val="EFE8FA">
-                <a:alpha val="0"/>
-              </a:srgbClr>
-            </a:solidFill>
-            <a:prstDash val="solid"/>
-          </a:ln>
-        </p:spPr>
-        <p:txBody>
-          <a:bodyPr/>
-          <a:lstStyle/>
-          <a:p>
-            <a:endParaRPr lang="nb-NO"/>
-          </a:p>
-        </p:txBody>
-      </p:sp>
-      <p:sp>
-        <p:nvSpPr>
-          <p:cNvPr id="27" name="Shape 25"/>
-          <p:cNvSpPr/>
-          <p:nvPr/>
-        </p:nvSpPr>
-        <p:spPr>
-          <a:xfrm>
-            <a:off x="822960" y="4379976"/>
-            <a:ext cx="438912" cy="438912"/>
-          </a:xfrm>
-          <a:prstGeom prst="ellipse">
-            <a:avLst/>
-          </a:prstGeom>
-          <a:solidFill>
-            <a:srgbClr val="9B73C8"/>
-          </a:solidFill>
-          <a:ln w="12700">
-            <a:solidFill>
-              <a:srgbClr val="9B73C8">
-                <a:alpha val="0"/>
-              </a:srgbClr>
-            </a:solidFill>
-            <a:prstDash val="solid"/>
-          </a:ln>
-        </p:spPr>
-        <p:txBody>
-          <a:bodyPr/>
-          <a:lstStyle/>
-          <a:p>
-            <a:endParaRPr lang="nb-NO"/>
-          </a:p>
-        </p:txBody>
-      </p:sp>
-      <p:sp>
-        <p:nvSpPr>
-          <p:cNvPr id="28" name="Text 26"/>
-          <p:cNvSpPr txBox="1"/>
-          <p:nvPr/>
-        </p:nvSpPr>
-        <p:spPr>
-          <a:xfrm>
-            <a:off x="832104" y="4443984"/>
-            <a:ext cx="411480" cy="265176"/>
-          </a:xfrm>
-          <a:prstGeom prst="rect">
-            <a:avLst/>
-          </a:prstGeom>
-          <a:noFill/>
-          <a:ln/>
-        </p:spPr>
-        <p:txBody>
-          <a:bodyPr wrap="square" lIns="0" tIns="0" rIns="0" bIns="0" rtlCol="0" anchor="ctr">
-            <a:normAutofit/>
-          </a:bodyPr>
-          <a:lstStyle/>
-          <a:p>
-            <a:pPr marL="0" indent="0" algn="ctr">
-              <a:buNone/>
-            </a:pPr>
-            <a:r>
-              <a:rPr lang="en-US" sz="1400" b="1" dirty="0">
-                <a:solidFill>
-                  <a:srgbClr val="FFFFFF"/>
-                </a:solidFill>
-                <a:latin typeface="Aptos" pitchFamily="34" charset="0"/>
-                <a:ea typeface="Aptos" pitchFamily="34" charset="-122"/>
-                <a:cs typeface="Aptos" pitchFamily="34" charset="-120"/>
-              </a:rPr>
-              <a:t>Q4</a:t>
-            </a:r>
-            <a:endParaRPr lang="en-US" sz="1400" dirty="0"/>
-          </a:p>
-        </p:txBody>
-      </p:sp>
-      <p:sp>
-        <p:nvSpPr>
-          <p:cNvPr id="29" name="Text 27"/>
-          <p:cNvSpPr txBox="1"/>
-          <p:nvPr/>
-        </p:nvSpPr>
-        <p:spPr>
-          <a:xfrm>
-            <a:off x="1499616" y="4279392"/>
-            <a:ext cx="2002536" cy="274320"/>
-          </a:xfrm>
-          <a:prstGeom prst="rect">
-            <a:avLst/>
-          </a:prstGeom>
-          <a:noFill/>
-          <a:ln/>
-        </p:spPr>
-        <p:txBody>
-          <a:bodyPr wrap="square" lIns="0" tIns="0" rIns="0" bIns="0" rtlCol="0" anchor="ctr">
-            <a:normAutofit/>
-          </a:bodyPr>
-          <a:lstStyle/>
-          <a:p>
-            <a:pPr marL="0" indent="0" algn="l">
-              <a:buNone/>
-            </a:pPr>
-            <a:r>
-              <a:rPr sz="1600" b="0">
-                <a:solidFill>
-                  <a:srgbClr val="191F2C"/>
-                </a:solidFill>
-                <a:latin typeface="Aptos"/>
-              </a:rPr>
-              <a:t>Webots experiments</a:t>
-            </a:r>
-            <a:endParaRPr lang="en-US" sz="1500" dirty="0"/>
-          </a:p>
-        </p:txBody>
-      </p:sp>
-      <p:sp>
-        <p:nvSpPr>
-          <p:cNvPr id="30" name="Text 28"/>
-          <p:cNvSpPr txBox="1"/>
-          <p:nvPr/>
-        </p:nvSpPr>
-        <p:spPr>
-          <a:xfrm>
-            <a:off x="3557016" y="4288536"/>
-            <a:ext cx="4572000" cy="594360"/>
-          </a:xfrm>
-          <a:prstGeom prst="rect">
-            <a:avLst/>
-          </a:prstGeom>
-          <a:noFill/>
-          <a:ln/>
-        </p:spPr>
-        <p:txBody>
-          <a:bodyPr wrap="square" lIns="0" tIns="0" rIns="0" bIns="0" rtlCol="0" anchor="ctr">
-            <a:normAutofit/>
-          </a:bodyPr>
-          <a:lstStyle/>
-          <a:p>
-            <a:pPr marL="0" indent="0" algn="l">
-              <a:buNone/>
-            </a:pPr>
-            <a:r>
-              <a:rPr sz="1500" b="0">
-                <a:solidFill>
-                  <a:srgbClr val="191F2C"/>
-                </a:solidFill>
-                <a:latin typeface="Aptos"/>
-              </a:rPr>
-              <a:t>6 successful Webots runs; mean absolute slip fell from 6.76% to 0.35%</a:t>
-            </a:r>
-            <a:endParaRPr lang="en-US" sz="1160" dirty="0"/>
-          </a:p>
-        </p:txBody>
-      </p:sp>
-      <p:sp>
-        <p:nvSpPr>
-          <p:cNvPr id="31" name="Text 29"/>
-          <p:cNvSpPr txBox="1"/>
-          <p:nvPr/>
-        </p:nvSpPr>
-        <p:spPr>
-          <a:xfrm>
-            <a:off x="8339328" y="4279392"/>
-            <a:ext cx="3035808" cy="594360"/>
-          </a:xfrm>
-          <a:prstGeom prst="rect">
-            <a:avLst/>
-          </a:prstGeom>
-          <a:noFill/>
-          <a:ln/>
-        </p:spPr>
-        <p:txBody>
-          <a:bodyPr wrap="square" lIns="0" tIns="0" rIns="0" bIns="0" rtlCol="0" anchor="ctr">
-            <a:normAutofit fontScale="92500" lnSpcReduction="10000"/>
-          </a:bodyPr>
-          <a:lstStyle/>
-          <a:p>
-            <a:pPr marL="0" indent="0" algn="l">
-              <a:buNone/>
-            </a:pPr>
-            <a:r>
-              <a:rPr sz="1500" b="0">
-                <a:solidFill>
-                  <a:srgbClr val="191F2C"/>
-                </a:solidFill>
-                <a:latin typeface="Aptos"/>
-              </a:rPr>
-              <a:t>Higher friction reduced slip by 94.8% while keeping path length and duration almost unchanged</a:t>
-            </a:r>
-            <a:endParaRPr lang="en-US" sz="1040" dirty="0"/>
-          </a:p>
-        </p:txBody>
-      </p:sp>
-      <p:sp>
-        <p:nvSpPr>
-          <p:cNvPr id="32" name="Shape 30"/>
-          <p:cNvSpPr/>
-          <p:nvPr/>
-        </p:nvSpPr>
-        <p:spPr>
-          <a:xfrm>
-            <a:off x="804672" y="5239512"/>
-            <a:ext cx="10552176" cy="128016"/>
-          </a:xfrm>
-          <a:prstGeom prst="roundRect">
-            <a:avLst>
-              <a:gd name="adj" fmla="val 92857"/>
-            </a:avLst>
-          </a:prstGeom>
-          <a:solidFill>
-            <a:srgbClr val="E4EEFF"/>
-          </a:solidFill>
-          <a:ln w="12700">
-            <a:solidFill>
-              <a:srgbClr val="E4EEFF">
-                <a:alpha val="0"/>
-              </a:srgbClr>
-            </a:solidFill>
-            <a:prstDash val="solid"/>
-          </a:ln>
-        </p:spPr>
-        <p:txBody>
-          <a:bodyPr/>
-          <a:lstStyle/>
-          <a:p>
-            <a:endParaRPr lang="nb-NO"/>
-          </a:p>
-        </p:txBody>
-      </p:sp>
     </p:spTree>
   </p:cSld>
   <p:clrMapOvr>
@@ -18295,7 +18803,7 @@
                 <a:ea typeface="Aptos" pitchFamily="34" charset="-122"/>
                 <a:cs typeface="Aptos" pitchFamily="34" charset="-120"/>
               </a:rPr>
-              <a:t>Pinhole camera model</a:t>
+              <a:t>Pinhole formula</a:t>
             </a:r>
             <a:endParaRPr lang="en-US" sz="1100" dirty="0"/>
           </a:p>
@@ -19363,7 +19871,7 @@
                 <a:ea typeface="Aptos" pitchFamily="34" charset="-122"/>
                 <a:cs typeface="Aptos" pitchFamily="34" charset="-120"/>
               </a:rPr>
-              <a:t>Missing depths among detected frames¹</a:t>
+              <a:t>Missing depths, before → after filling¹</a:t>
             </a:r>
             <a:endParaRPr lang="en-US" sz="950" dirty="0"/>
           </a:p>
@@ -19484,124 +19992,6 @@
               <a:t>Corrected depth samples</a:t>
             </a:r>
             <a:endParaRPr lang="en-US" sz="950" dirty="0"/>
-          </a:p>
-        </p:txBody>
-      </p:sp>
-      <p:sp>
-        <p:nvSpPr>
-          <p:cNvPr id="20" name="Shape 17"/>
-          <p:cNvSpPr/>
-          <p:nvPr/>
-        </p:nvSpPr>
-        <p:spPr>
-          <a:xfrm>
-            <a:off x="8119872" y="3511296"/>
-            <a:ext cx="3520440" cy="1298448"/>
-          </a:xfrm>
-          <a:prstGeom prst="roundRect">
-            <a:avLst>
-              <a:gd name="adj" fmla="val 9155"/>
-            </a:avLst>
-          </a:prstGeom>
-          <a:solidFill>
-            <a:srgbClr val="E4EEFF"/>
-          </a:solidFill>
-          <a:ln w="12700">
-            <a:solidFill>
-              <a:srgbClr val="E4EEFF">
-                <a:alpha val="0"/>
-              </a:srgbClr>
-            </a:solidFill>
-            <a:prstDash val="solid"/>
-          </a:ln>
-        </p:spPr>
-        <p:txBody>
-          <a:bodyPr/>
-          <a:lstStyle/>
-          <a:p>
-            <a:endParaRPr lang="nb-NO"/>
-          </a:p>
-        </p:txBody>
-      </p:sp>
-      <p:sp>
-        <p:nvSpPr>
-          <p:cNvPr id="21" name="Text 18"/>
-          <p:cNvSpPr txBox="1"/>
-          <p:nvPr/>
-        </p:nvSpPr>
-        <p:spPr>
-          <a:xfrm>
-            <a:off x="8293608" y="3675888"/>
-            <a:ext cx="3145536" cy="228600"/>
-          </a:xfrm>
-          <a:prstGeom prst="rect">
-            <a:avLst/>
-          </a:prstGeom>
-          <a:noFill/>
-          <a:ln/>
-        </p:spPr>
-        <p:txBody>
-          <a:bodyPr wrap="square" lIns="0" tIns="0" rIns="0" bIns="0" rtlCol="0" anchor="ctr">
-            <a:normAutofit/>
-          </a:bodyPr>
-          <a:lstStyle/>
-          <a:p>
-            <a:pPr marL="0" indent="0" algn="l">
-              <a:buNone/>
-            </a:pPr>
-            <a:r>
-              <a:rPr lang="en-US" sz="1200" b="1" dirty="0">
-                <a:solidFill>
-                  <a:srgbClr val="142E53"/>
-                </a:solidFill>
-                <a:latin typeface="Aptos" pitchFamily="34" charset="0"/>
-                <a:ea typeface="Aptos" pitchFamily="34" charset="-122"/>
-                <a:cs typeface="Aptos" pitchFamily="34" charset="-120"/>
-              </a:rPr>
-              <a:t>How it works</a:t>
-            </a:r>
-            <a:endParaRPr lang="en-US" sz="1200" dirty="0"/>
-          </a:p>
-        </p:txBody>
-      </p:sp>
-      <p:sp>
-        <p:nvSpPr>
-          <p:cNvPr id="22" name="Text 19"/>
-          <p:cNvSpPr txBox="1"/>
-          <p:nvPr/>
-        </p:nvSpPr>
-        <p:spPr>
-          <a:xfrm>
-            <a:off x="8293608" y="3995928"/>
-            <a:ext cx="3145536" cy="640080"/>
-          </a:xfrm>
-          <a:prstGeom prst="rect">
-            <a:avLst/>
-          </a:prstGeom>
-          <a:noFill/>
-          <a:ln/>
-        </p:spPr>
-        <p:txBody>
-          <a:bodyPr wrap="square" lIns="0" tIns="0" rIns="0" bIns="0" rtlCol="0" anchor="t">
-            <a:normAutofit/>
-          </a:bodyPr>
-          <a:lstStyle/>
-          <a:p>
-            <a:pPr marL="0" indent="0" algn="l">
-              <a:buNone/>
-            </a:pPr>
-            <a:r>
-              <a:rPr lang="en-US" sz="1100" dirty="0">
-                <a:solidFill>
-                  <a:srgbClr val="24334A"/>
-                </a:solidFill>
-                <a:latin typeface="Aptos" pitchFamily="34" charset="0"/>
-                <a:ea typeface="Aptos" pitchFamily="34" charset="-122"/>
-                <a:cs typeface="Aptos" pitchFamily="34" charset="-120"/>
-              </a:rPr>
-              <a:t>Nearest valid depth in YOLO box → 7-sample local median → flag deviations &gt; 0.5 m → interpolate.</a:t>
-            </a:r>
-            <a:endParaRPr lang="en-US" sz="1100" dirty="0"/>
           </a:p>
         </p:txBody>
       </p:sp>
@@ -21124,360 +21514,6 @@
       </p:sp>
       <p:sp>
         <p:nvSpPr>
-          <p:cNvPr id="18" name="Shape 16"/>
-          <p:cNvSpPr/>
-          <p:nvPr/>
-        </p:nvSpPr>
-        <p:spPr>
-          <a:xfrm>
-            <a:off x="594360" y="3703320"/>
-            <a:ext cx="2907792" cy="1051560"/>
-          </a:xfrm>
-          <a:prstGeom prst="roundRect">
-            <a:avLst>
-              <a:gd name="adj" fmla="val 11304"/>
-            </a:avLst>
-          </a:prstGeom>
-          <a:solidFill>
-            <a:srgbClr val="E4EEFF"/>
-          </a:solidFill>
-          <a:ln w="12700">
-            <a:solidFill>
-              <a:srgbClr val="E4EEFF">
-                <a:alpha val="0"/>
-              </a:srgbClr>
-            </a:solidFill>
-            <a:prstDash val="solid"/>
-          </a:ln>
-        </p:spPr>
-        <p:txBody>
-          <a:bodyPr/>
-          <a:lstStyle/>
-          <a:p>
-            <a:endParaRPr lang="nb-NO"/>
-          </a:p>
-        </p:txBody>
-      </p:sp>
-      <p:sp>
-        <p:nvSpPr>
-          <p:cNvPr id="19" name="Text 17"/>
-          <p:cNvSpPr txBox="1"/>
-          <p:nvPr/>
-        </p:nvSpPr>
-        <p:spPr>
-          <a:xfrm>
-            <a:off x="658368" y="3785616"/>
-            <a:ext cx="2779776" cy="494233"/>
-          </a:xfrm>
-          <a:prstGeom prst="rect">
-            <a:avLst/>
-          </a:prstGeom>
-          <a:noFill/>
-          <a:ln/>
-        </p:spPr>
-        <p:txBody>
-          <a:bodyPr wrap="square" lIns="0" tIns="0" rIns="0" bIns="0" rtlCol="0" anchor="ctr">
-            <a:normAutofit/>
-          </a:bodyPr>
-          <a:lstStyle/>
-          <a:p>
-            <a:pPr marL="0" indent="0" algn="ctr">
-              <a:buNone/>
-            </a:pPr>
-            <a:r>
-              <a:rPr lang="en-US" sz="2200" b="1" dirty="0">
-                <a:solidFill>
-                  <a:srgbClr val="142E53"/>
-                </a:solidFill>
-                <a:latin typeface="Aptos" pitchFamily="34" charset="0"/>
-                <a:ea typeface="Aptos" pitchFamily="34" charset="-122"/>
-                <a:cs typeface="Aptos" pitchFamily="34" charset="-120"/>
-              </a:rPr>
-              <a:t>(320, 240)</a:t>
-            </a:r>
-            <a:endParaRPr lang="en-US" sz="2200" dirty="0"/>
-          </a:p>
-        </p:txBody>
-      </p:sp>
-      <p:sp>
-        <p:nvSpPr>
-          <p:cNvPr id="20" name="Text 18"/>
-          <p:cNvSpPr txBox="1"/>
-          <p:nvPr/>
-        </p:nvSpPr>
-        <p:spPr>
-          <a:xfrm>
-            <a:off x="676656" y="4344772"/>
-            <a:ext cx="2743200" cy="294437"/>
-          </a:xfrm>
-          <a:prstGeom prst="rect">
-            <a:avLst/>
-          </a:prstGeom>
-          <a:noFill/>
-          <a:ln/>
-        </p:spPr>
-        <p:txBody>
-          <a:bodyPr wrap="square" lIns="0" tIns="0" rIns="0" bIns="0" rtlCol="0" anchor="ctr">
-            <a:normAutofit/>
-          </a:bodyPr>
-          <a:lstStyle/>
-          <a:p>
-            <a:pPr marL="0" indent="0" algn="ctr">
-              <a:buNone/>
-            </a:pPr>
-            <a:r>
-              <a:rPr lang="en-US" sz="940" dirty="0">
-                <a:solidFill>
-                  <a:srgbClr val="58687C"/>
-                </a:solidFill>
-                <a:latin typeface="Aptos" pitchFamily="34" charset="0"/>
-                <a:ea typeface="Aptos" pitchFamily="34" charset="-122"/>
-                <a:cs typeface="Aptos" pitchFamily="34" charset="-120"/>
-              </a:rPr>
-              <a:t>Approx. frame center</a:t>
-            </a:r>
-            <a:endParaRPr lang="en-US" sz="940" dirty="0"/>
-          </a:p>
-        </p:txBody>
-      </p:sp>
-      <p:sp>
-        <p:nvSpPr>
-          <p:cNvPr id="21" name="Shape 19"/>
-          <p:cNvSpPr/>
-          <p:nvPr/>
-        </p:nvSpPr>
-        <p:spPr>
-          <a:xfrm>
-            <a:off x="3648456" y="3703320"/>
-            <a:ext cx="2907792" cy="1051560"/>
-          </a:xfrm>
-          <a:prstGeom prst="roundRect">
-            <a:avLst>
-              <a:gd name="adj" fmla="val 11304"/>
-            </a:avLst>
-          </a:prstGeom>
-          <a:solidFill>
-            <a:srgbClr val="FBE6F0"/>
-          </a:solidFill>
-          <a:ln w="12700">
-            <a:solidFill>
-              <a:srgbClr val="FBE6F0">
-                <a:alpha val="0"/>
-              </a:srgbClr>
-            </a:solidFill>
-            <a:prstDash val="solid"/>
-          </a:ln>
-        </p:spPr>
-        <p:txBody>
-          <a:bodyPr/>
-          <a:lstStyle/>
-          <a:p>
-            <a:endParaRPr lang="nb-NO"/>
-          </a:p>
-        </p:txBody>
-      </p:sp>
-      <p:sp>
-        <p:nvSpPr>
-          <p:cNvPr id="22" name="Text 20"/>
-          <p:cNvSpPr txBox="1"/>
-          <p:nvPr/>
-        </p:nvSpPr>
-        <p:spPr>
-          <a:xfrm>
-            <a:off x="3712464" y="3785616"/>
-            <a:ext cx="2779776" cy="494233"/>
-          </a:xfrm>
-          <a:prstGeom prst="rect">
-            <a:avLst/>
-          </a:prstGeom>
-          <a:noFill/>
-          <a:ln/>
-        </p:spPr>
-        <p:txBody>
-          <a:bodyPr wrap="square" lIns="0" tIns="0" rIns="0" bIns="0" rtlCol="0" anchor="ctr">
-            <a:normAutofit/>
-          </a:bodyPr>
-          <a:lstStyle/>
-          <a:p>
-            <a:pPr marL="0" indent="0" algn="ctr">
-              <a:buNone/>
-            </a:pPr>
-            <a:r>
-              <a:rPr lang="en-US" sz="2200" b="1" dirty="0">
-                <a:solidFill>
-                  <a:srgbClr val="142E53"/>
-                </a:solidFill>
-                <a:latin typeface="Aptos" pitchFamily="34" charset="0"/>
-                <a:ea typeface="Aptos" pitchFamily="34" charset="-122"/>
-                <a:cs typeface="Aptos" pitchFamily="34" charset="-120"/>
-              </a:rPr>
-              <a:t>(979, 540)</a:t>
-            </a:r>
-            <a:endParaRPr lang="en-US" sz="2200" dirty="0"/>
-          </a:p>
-        </p:txBody>
-      </p:sp>
-      <p:sp>
-        <p:nvSpPr>
-          <p:cNvPr id="23" name="Text 21"/>
-          <p:cNvSpPr txBox="1"/>
-          <p:nvPr/>
-        </p:nvSpPr>
-        <p:spPr>
-          <a:xfrm>
-            <a:off x="3730752" y="4344772"/>
-            <a:ext cx="2743200" cy="294437"/>
-          </a:xfrm>
-          <a:prstGeom prst="rect">
-            <a:avLst/>
-          </a:prstGeom>
-          <a:noFill/>
-          <a:ln/>
-        </p:spPr>
-        <p:txBody>
-          <a:bodyPr wrap="square" lIns="0" tIns="0" rIns="0" bIns="0" rtlCol="0" anchor="ctr">
-            <a:normAutofit/>
-          </a:bodyPr>
-          <a:lstStyle/>
-          <a:p>
-            <a:pPr marL="0" indent="0" algn="ctr">
-              <a:buNone/>
-            </a:pPr>
-            <a:r>
-              <a:rPr lang="en-US" sz="940" dirty="0">
-                <a:solidFill>
-                  <a:srgbClr val="58687C"/>
-                </a:solidFill>
-                <a:latin typeface="Aptos" pitchFamily="34" charset="0"/>
-                <a:ea typeface="Aptos" pitchFamily="34" charset="-122"/>
-                <a:cs typeface="Aptos" pitchFamily="34" charset="-120"/>
-              </a:rPr>
-              <a:t>M_int principal point</a:t>
-            </a:r>
-            <a:endParaRPr lang="en-US" sz="940" dirty="0"/>
-          </a:p>
-        </p:txBody>
-      </p:sp>
-      <p:sp>
-        <p:nvSpPr>
-          <p:cNvPr id="24" name="Shape 22"/>
-          <p:cNvSpPr/>
-          <p:nvPr/>
-        </p:nvSpPr>
-        <p:spPr>
-          <a:xfrm>
-            <a:off x="6702552" y="3703320"/>
-            <a:ext cx="2907792" cy="1051560"/>
-          </a:xfrm>
-          <a:prstGeom prst="roundRect">
-            <a:avLst>
-              <a:gd name="adj" fmla="val 11304"/>
-            </a:avLst>
-          </a:prstGeom>
-          <a:solidFill>
-            <a:srgbClr val="E1F5EF"/>
-          </a:solidFill>
-          <a:ln w="12700">
-            <a:solidFill>
-              <a:srgbClr val="E1F5EF">
-                <a:alpha val="0"/>
-              </a:srgbClr>
-            </a:solidFill>
-            <a:prstDash val="solid"/>
-          </a:ln>
-        </p:spPr>
-        <p:txBody>
-          <a:bodyPr/>
-          <a:lstStyle/>
-          <a:p>
-            <a:endParaRPr lang="nb-NO"/>
-          </a:p>
-        </p:txBody>
-      </p:sp>
-      <p:sp>
-        <p:nvSpPr>
-          <p:cNvPr id="25" name="Text 23"/>
-          <p:cNvSpPr txBox="1"/>
-          <p:nvPr/>
-        </p:nvSpPr>
-        <p:spPr>
-          <a:xfrm>
-            <a:off x="6766560" y="3785616"/>
-            <a:ext cx="2779776" cy="494233"/>
-          </a:xfrm>
-          <a:prstGeom prst="rect">
-            <a:avLst/>
-          </a:prstGeom>
-          <a:noFill/>
-          <a:ln/>
-        </p:spPr>
-        <p:txBody>
-          <a:bodyPr wrap="square" lIns="0" tIns="0" rIns="0" bIns="0" rtlCol="0" anchor="ctr">
-            <a:normAutofit/>
-          </a:bodyPr>
-          <a:lstStyle/>
-          <a:p>
-            <a:pPr marL="0" indent="0" algn="ctr">
-              <a:buNone/>
-            </a:pPr>
-            <a:r>
-              <a:rPr lang="en-US" sz="2200" b="1" dirty="0">
-                <a:solidFill>
-                  <a:srgbClr val="142E53"/>
-                </a:solidFill>
-                <a:latin typeface="Aptos" pitchFamily="34" charset="0"/>
-                <a:ea typeface="Aptos" pitchFamily="34" charset="-122"/>
-                <a:cs typeface="Aptos" pitchFamily="34" charset="-120"/>
-              </a:rPr>
-              <a:t>(325, 235)</a:t>
-            </a:r>
-            <a:endParaRPr lang="en-US" sz="2200" dirty="0"/>
-          </a:p>
-        </p:txBody>
-      </p:sp>
-      <p:sp>
-        <p:nvSpPr>
-          <p:cNvPr id="26" name="Text 24"/>
-          <p:cNvSpPr txBox="1"/>
-          <p:nvPr/>
-        </p:nvSpPr>
-        <p:spPr>
-          <a:xfrm>
-            <a:off x="6784848" y="4344772"/>
-            <a:ext cx="2743200" cy="294437"/>
-          </a:xfrm>
-          <a:prstGeom prst="rect">
-            <a:avLst/>
-          </a:prstGeom>
-          <a:noFill/>
-          <a:ln/>
-        </p:spPr>
-        <p:txBody>
-          <a:bodyPr wrap="square" lIns="0" tIns="0" rIns="0" bIns="0" rtlCol="0" anchor="ctr">
-            <a:normAutofit/>
-          </a:bodyPr>
-          <a:lstStyle/>
-          <a:p>
-            <a:pPr marL="0" indent="0" algn="ctr">
-              <a:buNone/>
-            </a:pPr>
-            <a:r>
-              <a:rPr lang="en-US" sz="940" dirty="0">
-                <a:solidFill>
-                  <a:srgbClr val="58687C"/>
-                </a:solidFill>
-                <a:latin typeface="Aptos" pitchFamily="34" charset="0"/>
-                <a:ea typeface="Aptos" pitchFamily="34" charset="-122"/>
-                <a:cs typeface="Aptos" pitchFamily="34" charset="-120"/>
-              </a:rPr>
-              <a:t>M_d principal point</a:t>
-            </a:r>
-            <a:endParaRPr lang="en-US" sz="940" dirty="0"/>
-          </a:p>
-        </p:txBody>
-      </p:sp>
-      <p:sp>
-        <p:nvSpPr>
           <p:cNvPr id="27" name="Shape 25"/>
           <p:cNvSpPr/>
           <p:nvPr/>
@@ -21602,7 +21638,7 @@
         </p:nvSpPr>
         <p:spPr>
           <a:xfrm>
-            <a:off x="704088" y="5020056"/>
+            <a:off x="0" y="4128516"/>
             <a:ext cx="10789920" cy="228600"/>
           </a:xfrm>
           <a:prstGeom prst="rect">
@@ -21621,15 +21657,76 @@
               <a:buNone/>
             </a:pPr>
             <a:r>
-              <a:rPr lang="en-US" sz="1000" dirty="0">
+              <a:rPr sz="1050" dirty="0">
                 <a:solidFill>
                   <a:srgbClr val="58687C"/>
                 </a:solidFill>
-                <a:latin typeface="Aptos" pitchFamily="34" charset="0"/>
-                <a:ea typeface="Aptos" pitchFamily="34" charset="-122"/>
-                <a:cs typeface="Aptos" pitchFamily="34" charset="-120"/>
-              </a:rPr>
-              <a:t>Plausibility based on image geometry, not an independent 3D ground-truth test.</a:t>
+                <a:latin typeface="Aptos"/>
+              </a:rPr>
+              <a:t>Focal length: lecture value ≈ 1285 </a:t>
+            </a:r>
+            <a:r>
+              <a:rPr sz="1050" dirty="0" err="1">
+                <a:solidFill>
+                  <a:srgbClr val="58687C"/>
+                </a:solidFill>
+                <a:latin typeface="Aptos"/>
+              </a:rPr>
+              <a:t>px</a:t>
+            </a:r>
+            <a:r>
+              <a:rPr sz="1050" dirty="0">
+                <a:solidFill>
+                  <a:srgbClr val="58687C"/>
+                </a:solidFill>
+                <a:latin typeface="Aptos"/>
+              </a:rPr>
+              <a:t> (1.8 mm lens ÷ 1.4 µm pixels). </a:t>
+            </a:r>
+            <a:r>
+              <a:rPr sz="1050" dirty="0" err="1">
+                <a:solidFill>
+                  <a:srgbClr val="58687C"/>
+                </a:solidFill>
+                <a:latin typeface="Aptos"/>
+              </a:rPr>
+              <a:t>M_d</a:t>
+            </a:r>
+            <a:r>
+              <a:rPr sz="1050" dirty="0">
+                <a:solidFill>
+                  <a:srgbClr val="58687C"/>
+                </a:solidFill>
+                <a:latin typeface="Aptos"/>
+              </a:rPr>
+              <a:t> (1342) is closer than </a:t>
+            </a:r>
+            <a:r>
+              <a:rPr sz="1050" dirty="0" err="1">
+                <a:solidFill>
+                  <a:srgbClr val="58687C"/>
+                </a:solidFill>
+                <a:latin typeface="Aptos"/>
+              </a:rPr>
+              <a:t>M_int</a:t>
+            </a:r>
+            <a:r>
+              <a:rPr sz="1050" dirty="0">
+                <a:solidFill>
+                  <a:srgbClr val="58687C"/>
+                </a:solidFill>
+                <a:latin typeface="Aptos"/>
+              </a:rPr>
+              <a:t> (1391</a:t>
+            </a:r>
+            <a:r>
+              <a:rPr lang="nb-NO" sz="1050" dirty="0">
+                <a:solidFill>
+                  <a:srgbClr val="58687C"/>
+                </a:solidFill>
+                <a:latin typeface="Aptos"/>
+              </a:rPr>
+              <a:t>).</a:t>
             </a:r>
             <a:endParaRPr lang="en-US" sz="1000" dirty="0"/>
           </a:p>
@@ -22909,7 +23006,7 @@
                 <a:ea typeface="Aptos" pitchFamily="34" charset="-122"/>
                 <a:cs typeface="Aptos" pitchFamily="34" charset="-120"/>
               </a:rPr>
-              <a:t>RMSE (7.61 × 10⁻¹⁶)</a:t>
+              <a:t> RMSE (7.61 × 10⁻¹⁶)</a:t>
             </a:r>
             <a:endParaRPr lang="en-US" sz="940" dirty="0"/>
           </a:p>
@@ -23748,249 +23845,13 @@
       </p:sp>
       <p:sp>
         <p:nvSpPr>
-          <p:cNvPr id="21" name="Shape 19"/>
-          <p:cNvSpPr/>
-          <p:nvPr/>
-        </p:nvSpPr>
-        <p:spPr>
-          <a:xfrm>
-            <a:off x="8220456" y="1289304"/>
-            <a:ext cx="3374136" cy="969264"/>
-          </a:xfrm>
-          <a:prstGeom prst="roundRect">
-            <a:avLst>
-              <a:gd name="adj" fmla="val 12264"/>
-            </a:avLst>
-          </a:prstGeom>
-          <a:solidFill>
-            <a:srgbClr val="E4EEFF"/>
-          </a:solidFill>
-          <a:ln w="12700">
-            <a:solidFill>
-              <a:srgbClr val="E4EEFF">
-                <a:alpha val="0"/>
-              </a:srgbClr>
-            </a:solidFill>
-            <a:prstDash val="solid"/>
-          </a:ln>
-        </p:spPr>
-        <p:txBody>
-          <a:bodyPr/>
-          <a:lstStyle/>
-          <a:p>
-            <a:endParaRPr lang="nb-NO"/>
-          </a:p>
-        </p:txBody>
-      </p:sp>
-      <p:sp>
-        <p:nvSpPr>
-          <p:cNvPr id="22" name="Text 20"/>
-          <p:cNvSpPr txBox="1"/>
-          <p:nvPr/>
-        </p:nvSpPr>
-        <p:spPr>
-          <a:xfrm>
-            <a:off x="8375904" y="1453896"/>
-            <a:ext cx="3035808" cy="374904"/>
-          </a:xfrm>
-          <a:prstGeom prst="rect">
-            <a:avLst/>
-          </a:prstGeom>
-          <a:noFill/>
-          <a:ln/>
-        </p:spPr>
-        <p:txBody>
-          <a:bodyPr wrap="square" lIns="0" tIns="0" rIns="0" bIns="0" rtlCol="0" anchor="ctr">
-            <a:normAutofit/>
-          </a:bodyPr>
-          <a:lstStyle/>
-          <a:p>
-            <a:pPr marL="0" indent="0" algn="ctr">
-              <a:buNone/>
-            </a:pPr>
-            <a:r>
-              <a:rPr lang="en-US" sz="1800" b="1" dirty="0">
-                <a:solidFill>
-                  <a:srgbClr val="142E53"/>
-                </a:solidFill>
-                <a:latin typeface="Aptos" pitchFamily="34" charset="0"/>
-                <a:ea typeface="Aptos" pitchFamily="34" charset="-122"/>
-                <a:cs typeface="Aptos" pitchFamily="34" charset="-120"/>
-              </a:rPr>
-              <a:t>1.189–2.610 m</a:t>
-            </a:r>
-            <a:endParaRPr lang="en-US" sz="1800" dirty="0"/>
-          </a:p>
-        </p:txBody>
-      </p:sp>
-      <p:sp>
-        <p:nvSpPr>
-          <p:cNvPr id="23" name="Text 21"/>
-          <p:cNvSpPr txBox="1"/>
-          <p:nvPr/>
-        </p:nvSpPr>
-        <p:spPr>
-          <a:xfrm>
-            <a:off x="8412480" y="1874520"/>
-            <a:ext cx="3008376" cy="164592"/>
-          </a:xfrm>
-          <a:prstGeom prst="rect">
-            <a:avLst/>
-          </a:prstGeom>
-          <a:noFill/>
-          <a:ln/>
-        </p:spPr>
-        <p:txBody>
-          <a:bodyPr wrap="square" lIns="0" tIns="0" rIns="0" bIns="0" rtlCol="0" anchor="ctr">
-            <a:normAutofit/>
-          </a:bodyPr>
-          <a:lstStyle/>
-          <a:p>
-            <a:pPr marL="0" indent="0" algn="ctr">
-              <a:buNone/>
-            </a:pPr>
-            <a:r>
-              <a:rPr lang="en-US" sz="920" dirty="0">
-                <a:solidFill>
-                  <a:srgbClr val="58687C"/>
-                </a:solidFill>
-                <a:latin typeface="Aptos" pitchFamily="34" charset="0"/>
-                <a:ea typeface="Aptos" pitchFamily="34" charset="-122"/>
-                <a:cs typeface="Aptos" pitchFamily="34" charset="-120"/>
-              </a:rPr>
-              <a:t>o₁ versus o₂ · min–max</a:t>
-            </a:r>
-            <a:endParaRPr lang="en-US" sz="920" dirty="0"/>
-          </a:p>
-        </p:txBody>
-      </p:sp>
-      <p:sp>
-        <p:nvSpPr>
-          <p:cNvPr id="24" name="Shape 22"/>
-          <p:cNvSpPr/>
-          <p:nvPr/>
-        </p:nvSpPr>
-        <p:spPr>
-          <a:xfrm>
-            <a:off x="8220456" y="2450592"/>
-            <a:ext cx="3374136" cy="969264"/>
-          </a:xfrm>
-          <a:prstGeom prst="roundRect">
-            <a:avLst>
-              <a:gd name="adj" fmla="val 12264"/>
-            </a:avLst>
-          </a:prstGeom>
-          <a:solidFill>
-            <a:srgbClr val="EFE8FA"/>
-          </a:solidFill>
-          <a:ln w="12700">
-            <a:solidFill>
-              <a:srgbClr val="EFE8FA">
-                <a:alpha val="0"/>
-              </a:srgbClr>
-            </a:solidFill>
-            <a:prstDash val="solid"/>
-          </a:ln>
-        </p:spPr>
-        <p:txBody>
-          <a:bodyPr/>
-          <a:lstStyle/>
-          <a:p>
-            <a:endParaRPr lang="nb-NO"/>
-          </a:p>
-        </p:txBody>
-      </p:sp>
-      <p:sp>
-        <p:nvSpPr>
-          <p:cNvPr id="25" name="Text 23"/>
-          <p:cNvSpPr txBox="1"/>
-          <p:nvPr/>
-        </p:nvSpPr>
-        <p:spPr>
-          <a:xfrm>
-            <a:off x="8375904" y="2606040"/>
-            <a:ext cx="3035808" cy="374904"/>
-          </a:xfrm>
-          <a:prstGeom prst="rect">
-            <a:avLst/>
-          </a:prstGeom>
-          <a:noFill/>
-          <a:ln/>
-        </p:spPr>
-        <p:txBody>
-          <a:bodyPr wrap="square" lIns="0" tIns="0" rIns="0" bIns="0" rtlCol="0" anchor="ctr">
-            <a:normAutofit/>
-          </a:bodyPr>
-          <a:lstStyle/>
-          <a:p>
-            <a:pPr marL="0" indent="0" algn="ctr">
-              <a:buNone/>
-            </a:pPr>
-            <a:r>
-              <a:rPr lang="en-US" sz="1800" b="1" dirty="0">
-                <a:solidFill>
-                  <a:srgbClr val="142E53"/>
-                </a:solidFill>
-                <a:latin typeface="Aptos" pitchFamily="34" charset="0"/>
-                <a:ea typeface="Aptos" pitchFamily="34" charset="-122"/>
-                <a:cs typeface="Aptos" pitchFamily="34" charset="-120"/>
-              </a:rPr>
-              <a:t>1.293–2.281 m</a:t>
-            </a:r>
-            <a:endParaRPr lang="en-US" sz="1800" dirty="0"/>
-          </a:p>
-        </p:txBody>
-      </p:sp>
-      <p:sp>
-        <p:nvSpPr>
-          <p:cNvPr id="26" name="Text 24"/>
-          <p:cNvSpPr txBox="1"/>
-          <p:nvPr/>
-        </p:nvSpPr>
-        <p:spPr>
-          <a:xfrm>
-            <a:off x="8412480" y="3035808"/>
-            <a:ext cx="3008376" cy="164592"/>
-          </a:xfrm>
-          <a:prstGeom prst="rect">
-            <a:avLst/>
-          </a:prstGeom>
-          <a:noFill/>
-          <a:ln/>
-        </p:spPr>
-        <p:txBody>
-          <a:bodyPr wrap="square" lIns="0" tIns="0" rIns="0" bIns="0" rtlCol="0" anchor="ctr">
-            <a:normAutofit/>
-          </a:bodyPr>
-          <a:lstStyle/>
-          <a:p>
-            <a:pPr marL="0" indent="0" algn="ctr">
-              <a:buNone/>
-            </a:pPr>
-            <a:r>
-              <a:rPr lang="en-US" sz="920" dirty="0">
-                <a:solidFill>
-                  <a:srgbClr val="58687C"/>
-                </a:solidFill>
-                <a:latin typeface="Aptos" pitchFamily="34" charset="0"/>
-                <a:ea typeface="Aptos" pitchFamily="34" charset="-122"/>
-                <a:cs typeface="Aptos" pitchFamily="34" charset="-120"/>
-              </a:rPr>
-              <a:t>o₁ versus predicted o₂* · min–max</a:t>
-            </a:r>
-            <a:endParaRPr lang="en-US" sz="920" dirty="0"/>
-          </a:p>
-        </p:txBody>
-      </p:sp>
-      <p:sp>
-        <p:nvSpPr>
           <p:cNvPr id="27" name="Shape 25"/>
           <p:cNvSpPr/>
           <p:nvPr/>
         </p:nvSpPr>
         <p:spPr>
           <a:xfrm>
-            <a:off x="8220456" y="3602736"/>
+            <a:off x="8284464" y="1719072"/>
             <a:ext cx="3374136" cy="1197864"/>
           </a:xfrm>
           <a:prstGeom prst="roundRect">
@@ -24026,7 +23887,7 @@
         </p:nvSpPr>
         <p:spPr>
           <a:xfrm>
-            <a:off x="8412480" y="3785616"/>
+            <a:off x="8412480" y="1975104"/>
             <a:ext cx="2962656" cy="201168"/>
           </a:xfrm>
           <a:prstGeom prst="rect">
@@ -24067,7 +23928,7 @@
         </p:nvSpPr>
         <p:spPr>
           <a:xfrm>
-            <a:off x="8412480" y="4096512"/>
+            <a:off x="8412480" y="2286000"/>
             <a:ext cx="2953512" cy="502920"/>
           </a:xfrm>
           <a:prstGeom prst="rect">
@@ -26154,6 +26015,23 @@
 </file>
 
 <file path=customXml/item1.xml><?xml version="1.0" encoding="utf-8"?>
+<?mso-contentType ?>
+<FormTemplates xmlns="http://schemas.microsoft.com/sharepoint/v3/contenttype/forms">
+  <Display>DocumentLibraryForm</Display>
+  <Edit>DocumentLibraryForm</Edit>
+  <New>DocumentLibraryForm</New>
+</FormTemplates>
+</file>
+
+<file path=customXml/item2.xml><?xml version="1.0" encoding="utf-8"?>
+<p:properties xmlns:p="http://schemas.microsoft.com/office/2006/metadata/properties" xmlns:xsi="http://www.w3.org/2001/XMLSchema-instance" xmlns:pc="http://schemas.microsoft.com/office/infopath/2007/PartnerControls">
+  <documentManagement>
+    <_activity xmlns="33706226-0a30-4d53-a2fe-a398e0596b1f" xsi:nil="true"/>
+  </documentManagement>
+</p:properties>
+</file>
+
+<file path=customXml/item3.xml><?xml version="1.0" encoding="utf-8"?>
 <ct:contentTypeSchema xmlns:ct="http://schemas.microsoft.com/office/2006/metadata/contentType" xmlns:ma="http://schemas.microsoft.com/office/2006/metadata/properties/metaAttributes" ct:_="" ma:_="" ma:contentTypeName="Document" ma:contentTypeID="0x01010084E21095A403984F8B2CDC03F4F04DC9" ma:contentTypeVersion="13" ma:contentTypeDescription="Create a new document." ma:contentTypeScope="" ma:versionID="229887b30d860afe8efe46fb4193a4b9">
   <xsd:schema xmlns:xsd="http://www.w3.org/2001/XMLSchema" xmlns:xs="http://www.w3.org/2001/XMLSchema" xmlns:p="http://schemas.microsoft.com/office/2006/metadata/properties" xmlns:ns3="33706226-0a30-4d53-a2fe-a398e0596b1f" xmlns:ns4="bf58510d-6325-4495-b2b7-1786a70f58ca" targetNamespace="http://schemas.microsoft.com/office/2006/metadata/properties" ma:root="true" ma:fieldsID="1375df6261dfbb336c5b2e9d06f1d5f2" ns3:_="" ns4:_="">
     <xsd:import namespace="33706226-0a30-4d53-a2fe-a398e0596b1f"/>
@@ -26372,24 +26250,32 @@
 </ct:contentTypeSchema>
 </file>
 
-<file path=customXml/item2.xml><?xml version="1.0" encoding="utf-8"?>
-<?mso-contentType ?>
-<FormTemplates xmlns="http://schemas.microsoft.com/sharepoint/v3/contenttype/forms">
-  <Display>DocumentLibraryForm</Display>
-  <Edit>DocumentLibraryForm</Edit>
-  <New>DocumentLibraryForm</New>
-</FormTemplates>
+<file path=customXml/itemProps1.xml><?xml version="1.0" encoding="utf-8"?>
+<ds:datastoreItem xmlns:ds="http://schemas.openxmlformats.org/officeDocument/2006/customXml" ds:itemID="{E87A5AEA-FDD6-4992-A86F-6E1E8B2F3416}">
+  <ds:schemaRefs>
+    <ds:schemaRef ds:uri="http://schemas.microsoft.com/sharepoint/v3/contenttype/forms"/>
+  </ds:schemaRefs>
+</ds:datastoreItem>
 </file>
 
-<file path=customXml/item3.xml><?xml version="1.0" encoding="utf-8"?>
-<p:properties xmlns:p="http://schemas.microsoft.com/office/2006/metadata/properties" xmlns:xsi="http://www.w3.org/2001/XMLSchema-instance" xmlns:pc="http://schemas.microsoft.com/office/infopath/2007/PartnerControls">
-  <documentManagement>
-    <_activity xmlns="33706226-0a30-4d53-a2fe-a398e0596b1f" xsi:nil="true"/>
-  </documentManagement>
-</p:properties>
+<file path=customXml/itemProps2.xml><?xml version="1.0" encoding="utf-8"?>
+<ds:datastoreItem xmlns:ds="http://schemas.openxmlformats.org/officeDocument/2006/customXml" ds:itemID="{F0A27E58-5D5F-4E41-B872-4A62E5978D34}">
+  <ds:schemaRefs>
+    <ds:schemaRef ds:uri="http://schemas.microsoft.com/office/2006/documentManagement/types"/>
+    <ds:schemaRef ds:uri="http://purl.org/dc/terms/"/>
+    <ds:schemaRef ds:uri="http://purl.org/dc/dcmitype/"/>
+    <ds:schemaRef ds:uri="http://www.w3.org/XML/1998/namespace"/>
+    <ds:schemaRef ds:uri="http://schemas.openxmlformats.org/package/2006/metadata/core-properties"/>
+    <ds:schemaRef ds:uri="http://purl.org/dc/elements/1.1/"/>
+    <ds:schemaRef ds:uri="http://schemas.microsoft.com/office/2006/metadata/properties"/>
+    <ds:schemaRef ds:uri="http://schemas.microsoft.com/office/infopath/2007/PartnerControls"/>
+    <ds:schemaRef ds:uri="bf58510d-6325-4495-b2b7-1786a70f58ca"/>
+    <ds:schemaRef ds:uri="33706226-0a30-4d53-a2fe-a398e0596b1f"/>
+  </ds:schemaRefs>
+</ds:datastoreItem>
 </file>
 
-<file path=customXml/itemProps1.xml><?xml version="1.0" encoding="utf-8"?>
+<file path=customXml/itemProps3.xml><?xml version="1.0" encoding="utf-8"?>
 <ds:datastoreItem xmlns:ds="http://schemas.openxmlformats.org/officeDocument/2006/customXml" ds:itemID="{D3A7D2EA-F679-4053-8514-CF88423EA9B2}">
   <ds:schemaRefs>
     <ds:schemaRef ds:uri="http://schemas.microsoft.com/office/2006/metadata/contentType"/>
@@ -26406,29 +26292,4 @@
     <ds:schemaRef ds:uri="http://schemas.microsoft.com/internal/obd"/>
   </ds:schemaRefs>
 </ds:datastoreItem>
-</file>
-
-<file path=customXml/itemProps2.xml><?xml version="1.0" encoding="utf-8"?>
-<ds:datastoreItem xmlns:ds="http://schemas.openxmlformats.org/officeDocument/2006/customXml" ds:itemID="{E87A5AEA-FDD6-4992-A86F-6E1E8B2F3416}">
-  <ds:schemaRefs>
-    <ds:schemaRef ds:uri="http://schemas.microsoft.com/sharepoint/v3/contenttype/forms"/>
-  </ds:schemaRefs>
-</ds:datastoreItem>
-</file>
-
-<file path=customXml/itemProps3.xml><?xml version="1.0" encoding="utf-8"?>
-<ds:datastoreItem xmlns:ds="http://schemas.openxmlformats.org/officeDocument/2006/customXml" ds:itemID="{F0A27E58-5D5F-4E41-B872-4A62E5978D34}">
-  <ds:schemaRefs>
-    <ds:schemaRef ds:uri="http://schemas.microsoft.com/office/2006/documentManagement/types"/>
-    <ds:schemaRef ds:uri="http://purl.org/dc/terms/"/>
-    <ds:schemaRef ds:uri="http://purl.org/dc/dcmitype/"/>
-    <ds:schemaRef ds:uri="http://www.w3.org/XML/1998/namespace"/>
-    <ds:schemaRef ds:uri="http://schemas.openxmlformats.org/package/2006/metadata/core-properties"/>
-    <ds:schemaRef ds:uri="http://purl.org/dc/elements/1.1/"/>
-    <ds:schemaRef ds:uri="http://schemas.microsoft.com/office/2006/metadata/properties"/>
-    <ds:schemaRef ds:uri="http://schemas.microsoft.com/office/infopath/2007/PartnerControls"/>
-    <ds:schemaRef ds:uri="bf58510d-6325-4495-b2b7-1786a70f58ca"/>
-    <ds:schemaRef ds:uri="33706226-0a30-4d53-a2fe-a398e0596b1f"/>
-  </ds:schemaRefs>
-</ds:datastoreItem>
 </file>
--- a/MAS512_Assignment_2_gr9.pptx
+++ b/MAS512_Assignment_2_gr9.pptx
@@ -459,7 +459,8 @@
           <a:lstStyle/>
           <a:p>
             <a:r>
-              <a:t>KISS-ICP stands for Keep It Small and Simple. It is LiDAR odometry. Each new scan is downsampled into voxels, a constant-velocity model predicts the next pose, then point-to-point ICP matches points to the nearest map points and solves for rotation and translation with a robust kernel. The scan is added to the local map, and the matching threshold adapts, so it needs almost no tuning. It is used for robot and car odometry and as the front end of SLAM. Drawbacks: it drifts because there is no loop closure, it struggles in repetitive or sparse scenes, it assumes the world is static, and it only gives the sensor pose.</a:t>
+              <a:rPr dirty="0"/>
+              <a:t>KISS-ICP stands for Keep It Small and Simple. It is LiDAR odometry. The scan is added to the local map, and the matching threshold adapts, so it needs almost no tuning. It is used for robot and car odometry and as the front end of SLAM. Drawbacks: it drifts because there is no loop closure, it struggles in repetitive or sparse scenes, it assumes the world is static, and it only gives the sensor pose.</a:t>
             </a:r>
           </a:p>
         </p:txBody>
@@ -603,8 +604,12 @@
           <a:lstStyle/>
           <a:p>
             <a:r>
-              <a:t>KITTI was recorded with two grayscale and two colour cameras, a Velodyne HDL-64E LiDAR and GPS/IMU. Each frame ID has an image, a point cloud, a calibration file and labels. To project LiDAR into the image we apply Tr_velo_to_cam to move into camera coordinates, R0_rect to rectify, and P2 to project onto the left colour image, then divide by the third component.</a:t>
-            </a:r>
+              <a:rPr lang="en-US" dirty="0"/>
+              <a:t>“In Q1 we went from pixel to 3D. In Q3 we go from 3D to pixel. It’s the same pinhole camera model, just in the opposite direction. The only extra work is first moving the LiDAR point into the camera’s coordinate system.”</a:t>
+            </a:r>
+          </a:p>
+          <a:p>
+            <a:endParaRPr lang="en-US" dirty="0"/>
           </a:p>
         </p:txBody>
       </p:sp>
@@ -1635,8 +1640,298 @@
           <a:lstStyle/>
           <a:p>
             <a:r>
-              <a:t>The mean Euclidean distance between o1 and o2 is 1.72 m, and between o1 and the predicted o2* it is 1.71 m. They match because the model reproduces o2. This is the gap between two coordinate definitions, mostly caused by the wrong principal point. It is not an accuracy error.</a:t>
-            </a:r>
+              <a:rPr lang="nb-NO" dirty="0"/>
+              <a:t>In part (d) </a:t>
+            </a:r>
+            <a:r>
+              <a:rPr lang="nb-NO" dirty="0" err="1"/>
+              <a:t>we</a:t>
+            </a:r>
+            <a:r>
+              <a:rPr lang="nb-NO" dirty="0"/>
+              <a:t> </a:t>
+            </a:r>
+            <a:r>
+              <a:rPr lang="nb-NO" dirty="0" err="1"/>
+              <a:t>trained</a:t>
+            </a:r>
+            <a:r>
+              <a:rPr lang="nb-NO" dirty="0"/>
+              <a:t> a linear </a:t>
+            </a:r>
+            <a:r>
+              <a:rPr lang="nb-NO" dirty="0" err="1"/>
+              <a:t>regression</a:t>
+            </a:r>
+            <a:r>
+              <a:rPr lang="nb-NO" dirty="0"/>
+              <a:t> </a:t>
+            </a:r>
+            <a:r>
+              <a:rPr lang="nb-NO" dirty="0" err="1"/>
+              <a:t>that</a:t>
+            </a:r>
+            <a:r>
+              <a:rPr lang="nb-NO" dirty="0"/>
+              <a:t> </a:t>
+            </a:r>
+            <a:r>
+              <a:rPr lang="nb-NO" dirty="0" err="1"/>
+              <a:t>maps</a:t>
+            </a:r>
+            <a:r>
+              <a:rPr lang="nb-NO" dirty="0"/>
+              <a:t> o₁ to o₂, </a:t>
+            </a:r>
+            <a:r>
+              <a:rPr lang="nb-NO" dirty="0" err="1"/>
+              <a:t>with</a:t>
+            </a:r>
+            <a:r>
+              <a:rPr lang="nb-NO" dirty="0"/>
+              <a:t> 711 training and 178 test samples. On </a:t>
+            </a:r>
+            <a:r>
+              <a:rPr lang="nb-NO" dirty="0" err="1"/>
+              <a:t>the</a:t>
+            </a:r>
+            <a:r>
+              <a:rPr lang="nb-NO" dirty="0"/>
+              <a:t> test </a:t>
+            </a:r>
+            <a:r>
+              <a:rPr lang="nb-NO" dirty="0" err="1"/>
+              <a:t>set</a:t>
+            </a:r>
+            <a:r>
+              <a:rPr lang="nb-NO" dirty="0"/>
+              <a:t> </a:t>
+            </a:r>
+            <a:r>
+              <a:rPr lang="nb-NO" dirty="0" err="1"/>
+              <a:t>we</a:t>
+            </a:r>
+            <a:r>
+              <a:rPr lang="nb-NO" dirty="0"/>
+              <a:t> </a:t>
+            </a:r>
+            <a:r>
+              <a:rPr lang="nb-NO" dirty="0" err="1"/>
+              <a:t>get</a:t>
+            </a:r>
+            <a:r>
+              <a:rPr lang="nb-NO" dirty="0"/>
+              <a:t> R² = 1 and RMSE ≈ 0. </a:t>
+            </a:r>
+            <a:r>
+              <a:rPr lang="nb-NO" dirty="0" err="1"/>
+              <a:t>That’s</a:t>
+            </a:r>
+            <a:r>
+              <a:rPr lang="nb-NO" dirty="0"/>
+              <a:t> not </a:t>
+            </a:r>
+            <a:r>
+              <a:rPr lang="nb-NO" dirty="0" err="1"/>
+              <a:t>overfitting</a:t>
+            </a:r>
+            <a:r>
+              <a:rPr lang="nb-NO" dirty="0"/>
+              <a:t>: </a:t>
+            </a:r>
+            <a:r>
+              <a:rPr lang="nb-NO" dirty="0" err="1"/>
+              <a:t>both</a:t>
+            </a:r>
+            <a:r>
+              <a:rPr lang="nb-NO" dirty="0"/>
+              <a:t> </a:t>
+            </a:r>
+            <a:r>
+              <a:rPr lang="nb-NO" dirty="0" err="1"/>
+              <a:t>coordinates</a:t>
+            </a:r>
+            <a:r>
+              <a:rPr lang="nb-NO" dirty="0"/>
+              <a:t> </a:t>
+            </a:r>
+            <a:r>
+              <a:rPr lang="nb-NO" dirty="0" err="1"/>
+              <a:t>come</a:t>
+            </a:r>
+            <a:r>
+              <a:rPr lang="nb-NO" dirty="0"/>
+              <a:t> from </a:t>
+            </a:r>
+            <a:r>
+              <a:rPr lang="nb-NO" dirty="0" err="1"/>
+              <a:t>the</a:t>
+            </a:r>
+            <a:r>
+              <a:rPr lang="nb-NO" dirty="0"/>
+              <a:t> same </a:t>
+            </a:r>
+            <a:r>
+              <a:rPr lang="nb-NO" dirty="0" err="1"/>
+              <a:t>pixels</a:t>
+            </a:r>
+            <a:r>
+              <a:rPr lang="nb-NO" dirty="0"/>
+              <a:t> and </a:t>
+            </a:r>
+            <a:r>
+              <a:rPr lang="nb-NO" dirty="0" err="1"/>
+              <a:t>depths</a:t>
+            </a:r>
+            <a:r>
+              <a:rPr lang="nb-NO" dirty="0"/>
+              <a:t>, so </a:t>
+            </a:r>
+            <a:r>
+              <a:rPr lang="nb-NO" dirty="0" err="1"/>
+              <a:t>the</a:t>
+            </a:r>
+            <a:r>
+              <a:rPr lang="nb-NO" dirty="0"/>
+              <a:t> </a:t>
+            </a:r>
+            <a:r>
+              <a:rPr lang="nb-NO" dirty="0" err="1"/>
+              <a:t>relationship</a:t>
+            </a:r>
+            <a:r>
+              <a:rPr lang="nb-NO" dirty="0"/>
+              <a:t> </a:t>
+            </a:r>
+            <a:r>
+              <a:rPr lang="nb-NO" dirty="0" err="1"/>
+              <a:t>between</a:t>
+            </a:r>
+            <a:r>
+              <a:rPr lang="nb-NO" dirty="0"/>
+              <a:t> </a:t>
+            </a:r>
+            <a:r>
+              <a:rPr lang="nb-NO" dirty="0" err="1"/>
+              <a:t>them</a:t>
+            </a:r>
+            <a:r>
+              <a:rPr lang="nb-NO" dirty="0"/>
+              <a:t> is </a:t>
+            </a:r>
+            <a:r>
+              <a:rPr lang="nb-NO" dirty="0" err="1"/>
+              <a:t>exactly</a:t>
+            </a:r>
+            <a:r>
+              <a:rPr lang="nb-NO" dirty="0"/>
+              <a:t> linear, a </a:t>
+            </a:r>
+            <a:r>
+              <a:rPr lang="nb-NO" dirty="0" err="1"/>
+              <a:t>scale</a:t>
+            </a:r>
+            <a:r>
+              <a:rPr lang="nb-NO" dirty="0"/>
+              <a:t> </a:t>
+            </a:r>
+            <a:r>
+              <a:rPr lang="nb-NO" dirty="0" err="1"/>
+              <a:t>factor</a:t>
+            </a:r>
+            <a:r>
+              <a:rPr lang="nb-NO" dirty="0"/>
+              <a:t> from </a:t>
+            </a:r>
+            <a:r>
+              <a:rPr lang="nb-NO" dirty="0" err="1"/>
+              <a:t>the</a:t>
+            </a:r>
+            <a:r>
+              <a:rPr lang="nb-NO" dirty="0"/>
+              <a:t> </a:t>
+            </a:r>
+            <a:r>
+              <a:rPr lang="nb-NO" dirty="0" err="1"/>
+              <a:t>focal</a:t>
+            </a:r>
+            <a:r>
+              <a:rPr lang="nb-NO" dirty="0"/>
+              <a:t> </a:t>
+            </a:r>
+            <a:r>
+              <a:rPr lang="nb-NO" dirty="0" err="1"/>
+              <a:t>lengths</a:t>
+            </a:r>
+            <a:r>
+              <a:rPr lang="nb-NO" dirty="0"/>
+              <a:t> </a:t>
+            </a:r>
+            <a:r>
+              <a:rPr lang="nb-NO" dirty="0" err="1"/>
+              <a:t>plus</a:t>
+            </a:r>
+            <a:r>
+              <a:rPr lang="nb-NO" dirty="0"/>
+              <a:t> an offset from </a:t>
+            </a:r>
+            <a:r>
+              <a:rPr lang="nb-NO" dirty="0" err="1"/>
+              <a:t>the</a:t>
+            </a:r>
+            <a:r>
+              <a:rPr lang="nb-NO" dirty="0"/>
+              <a:t> </a:t>
+            </a:r>
+            <a:r>
+              <a:rPr lang="nb-NO" dirty="0" err="1"/>
+              <a:t>principal</a:t>
+            </a:r>
+            <a:r>
+              <a:rPr lang="nb-NO" dirty="0"/>
+              <a:t> </a:t>
+            </a:r>
+            <a:r>
+              <a:rPr lang="nb-NO" dirty="0" err="1"/>
+              <a:t>points</a:t>
+            </a:r>
+            <a:r>
+              <a:rPr lang="nb-NO" dirty="0"/>
+              <a:t>. The </a:t>
+            </a:r>
+            <a:r>
+              <a:rPr lang="nb-NO" dirty="0" err="1"/>
+              <a:t>model</a:t>
+            </a:r>
+            <a:r>
+              <a:rPr lang="nb-NO" dirty="0"/>
+              <a:t> just </a:t>
+            </a:r>
+            <a:r>
+              <a:rPr lang="nb-NO" dirty="0" err="1"/>
+              <a:t>recovered</a:t>
+            </a:r>
+            <a:r>
+              <a:rPr lang="nb-NO" dirty="0"/>
+              <a:t> </a:t>
+            </a:r>
+            <a:r>
+              <a:rPr lang="nb-NO" dirty="0" err="1"/>
+              <a:t>that</a:t>
+            </a:r>
+            <a:r>
+              <a:rPr lang="nb-NO" dirty="0"/>
+              <a:t> </a:t>
+            </a:r>
+            <a:r>
+              <a:rPr lang="nb-NO" dirty="0" err="1"/>
+              <a:t>formula</a:t>
+            </a:r>
+            <a:r>
+              <a:rPr lang="nb-NO" dirty="0"/>
+              <a:t>.</a:t>
+            </a:r>
+            <a:endParaRPr dirty="0"/>
           </a:p>
         </p:txBody>
       </p:sp>
@@ -5047,7 +5342,7 @@
                 <a:ea typeface="Aptos" pitchFamily="34" charset="-122"/>
                 <a:cs typeface="Aptos" pitchFamily="34" charset="-120"/>
               </a:rPr>
-              <a:t>Nearest-point matches, robust solve for R, t</a:t>
+              <a:t>Nearest-point matches</a:t>
             </a:r>
             <a:endParaRPr lang="en-US" sz="1000" dirty="0"/>
           </a:p>
@@ -6995,7 +7290,10 @@
             <a:pPr marL="0" indent="0" algn="ctr">
               <a:buNone/>
             </a:pPr>
-            <a:endParaRPr lang="en-US" sz="1000" dirty="0"/>
+            <a:r>
+              <a:rPr lang="en-US" sz="1000" dirty="0"/>
+              <a:t>Q1 – Pixel to 3D - Q3 3D to pixel.</a:t>
+            </a:r>
           </a:p>
         </p:txBody>
       </p:sp>
@@ -7314,10 +7612,26 @@
                   <a:srgbClr val="142E53"/>
                 </a:solidFill>
                 <a:latin typeface="Aptos" pitchFamily="34" charset="0"/>
-                <a:ea typeface="Aptos" pitchFamily="34" charset="-122"/>
-                <a:cs typeface="Aptos" pitchFamily="34" charset="-120"/>
-              </a:rPr>
-              <a:t>Files aligned by frame ID</a:t>
+              </a:rPr>
+              <a:t>Every </a:t>
+            </a:r>
+            <a:r>
+              <a:rPr lang="en-US" sz="1500" b="1" dirty="0" err="1">
+                <a:solidFill>
+                  <a:srgbClr val="142E53"/>
+                </a:solidFill>
+                <a:latin typeface="Aptos" pitchFamily="34" charset="0"/>
+              </a:rPr>
+              <a:t>fram</a:t>
+            </a:r>
+            <a:r>
+              <a:rPr lang="en-US" sz="1500" b="1" dirty="0">
+                <a:solidFill>
+                  <a:srgbClr val="142E53"/>
+                </a:solidFill>
+                <a:latin typeface="Aptos" pitchFamily="34" charset="0"/>
+              </a:rPr>
+              <a:t> ID – Dataset saves:</a:t>
             </a:r>
             <a:endParaRPr lang="en-US" sz="1500" dirty="0"/>
           </a:p>
@@ -7502,7 +7816,7 @@
               <a:buNone/>
             </a:pPr>
             <a:r>
-              <a:rPr lang="en-US" sz="1000" b="1" dirty="0" err="1">
+              <a:rPr lang="en-US" sz="1000" b="1" dirty="0">
                 <a:solidFill>
                   <a:srgbClr val="142E53"/>
                 </a:solidFill>
@@ -7510,7 +7824,7 @@
                 <a:ea typeface="Aptos" pitchFamily="34" charset="-122"/>
                 <a:cs typeface="Aptos" pitchFamily="34" charset="-120"/>
               </a:rPr>
-              <a:t>velodyne</a:t>
+              <a:t>Velodyne (Lidar)</a:t>
             </a:r>
             <a:endParaRPr lang="en-US" sz="1000" dirty="0"/>
           </a:p>
@@ -11337,6 +11651,36 @@
           </a:p>
         </p:txBody>
       </p:sp>
+      <p:pic>
+        <p:nvPicPr>
+          <p:cNvPr id="67" name="Bilde 66">
+            <a:extLst>
+              <a:ext uri="{FF2B5EF4-FFF2-40B4-BE49-F238E27FC236}">
+                <a16:creationId xmlns:a16="http://schemas.microsoft.com/office/drawing/2014/main" id="{B9FE1AB6-4118-1573-5F5D-EC2EEC8201EE}"/>
+              </a:ext>
+            </a:extLst>
+          </p:cNvPr>
+          <p:cNvPicPr>
+            <a:picLocks noChangeAspect="1"/>
+          </p:cNvPicPr>
+          <p:nvPr/>
+        </p:nvPicPr>
+        <p:blipFill>
+          <a:blip r:embed="rId4"/>
+          <a:stretch>
+            <a:fillRect/>
+          </a:stretch>
+        </p:blipFill>
+        <p:spPr>
+          <a:xfrm>
+            <a:off x="7304627" y="846966"/>
+            <a:ext cx="3927253" cy="1376563"/>
+          </a:xfrm>
+          <a:prstGeom prst="rect">
+            <a:avLst/>
+          </a:prstGeom>
+        </p:spPr>
+      </p:pic>
     </p:spTree>
   </p:cSld>
   <p:clrMapOvr>
@@ -13943,13 +14287,40 @@
               <a:t>Longitudinal slip </a:t>
             </a:r>
             <a:r>
-              <a:rPr lang="nb-NO" sz="1400" b="0" dirty="0" err="1">
+              <a:rPr lang="nb-NO" sz="1400" dirty="0">
                 <a:solidFill>
                   <a:srgbClr val="5D6778"/>
                 </a:solidFill>
                 <a:latin typeface="Aptos"/>
               </a:rPr>
-              <a:t>computation</a:t>
+              <a:t>and </a:t>
+            </a:r>
+            <a:r>
+              <a:rPr lang="nb-NO" sz="1400" dirty="0" err="1">
+                <a:solidFill>
+                  <a:srgbClr val="5D6778"/>
+                </a:solidFill>
+                <a:latin typeface="Aptos"/>
+              </a:rPr>
+              <a:t>recorded</a:t>
+            </a:r>
+            <a:r>
+              <a:rPr lang="nb-NO" sz="1400" dirty="0">
+                <a:solidFill>
+                  <a:srgbClr val="5D6778"/>
+                </a:solidFill>
+                <a:latin typeface="Aptos"/>
+              </a:rPr>
+              <a:t> </a:t>
+            </a:r>
+            <a:r>
+              <a:rPr lang="nb-NO" sz="1400" dirty="0" err="1">
+                <a:solidFill>
+                  <a:srgbClr val="5D6778"/>
+                </a:solidFill>
+                <a:latin typeface="Aptos"/>
+              </a:rPr>
+              <a:t>devices</a:t>
             </a:r>
             <a:endParaRPr lang="en-US" sz="1000" dirty="0"/>
           </a:p>
@@ -14138,132 +14509,9 @@
                 <a:ea typeface="Aptos" pitchFamily="34" charset="-122"/>
                 <a:cs typeface="Aptos" pitchFamily="34" charset="-120"/>
               </a:rPr>
-              <a:t>Longitudinal slip estimate</a:t>
+              <a:t>Sensors sent to .csv</a:t>
             </a:r>
             <a:endParaRPr lang="en-US" sz="1700" dirty="0"/>
-          </a:p>
-        </p:txBody>
-      </p:sp>
-      <p:sp>
-        <p:nvSpPr>
-          <p:cNvPr id="12" name="Text 10"/>
-          <p:cNvSpPr txBox="1"/>
-          <p:nvPr/>
-        </p:nvSpPr>
-        <p:spPr>
-          <a:xfrm>
-            <a:off x="896112" y="2029968"/>
-            <a:ext cx="5102352" cy="438912"/>
-          </a:xfrm>
-          <a:prstGeom prst="rect">
-            <a:avLst/>
-          </a:prstGeom>
-          <a:noFill/>
-          <a:ln/>
-        </p:spPr>
-        <p:txBody>
-          <a:bodyPr wrap="square" lIns="0" tIns="0" rIns="0" bIns="0" rtlCol="0" anchor="ctr">
-            <a:normAutofit/>
-          </a:bodyPr>
-          <a:lstStyle/>
-          <a:p>
-            <a:pPr marL="0" indent="0" algn="ctr">
-              <a:buNone/>
-            </a:pPr>
-            <a:r>
-              <a:rPr lang="en-US" sz="2600" b="1" dirty="0">
-                <a:solidFill>
-                  <a:srgbClr val="142E53"/>
-                </a:solidFill>
-                <a:latin typeface="Aptos" pitchFamily="34" charset="0"/>
-                <a:ea typeface="Aptos" pitchFamily="34" charset="-122"/>
-                <a:cs typeface="Aptos" pitchFamily="34" charset="-120"/>
-              </a:rPr>
-              <a:t>slip = (v_enc − v_x) / v_x</a:t>
-            </a:r>
-            <a:endParaRPr lang="en-US" sz="2600" dirty="0"/>
-          </a:p>
-        </p:txBody>
-      </p:sp>
-      <p:sp>
-        <p:nvSpPr>
-          <p:cNvPr id="13" name="Text 11"/>
-          <p:cNvSpPr txBox="1"/>
-          <p:nvPr/>
-        </p:nvSpPr>
-        <p:spPr>
-          <a:xfrm>
-            <a:off x="868680" y="2697480"/>
-            <a:ext cx="5129784" cy="283464"/>
-          </a:xfrm>
-          <a:prstGeom prst="rect">
-            <a:avLst/>
-          </a:prstGeom>
-          <a:noFill/>
-          <a:ln/>
-        </p:spPr>
-        <p:txBody>
-          <a:bodyPr wrap="square" lIns="0" tIns="0" rIns="0" bIns="0" rtlCol="0" anchor="ctr">
-            <a:normAutofit/>
-          </a:bodyPr>
-          <a:lstStyle/>
-          <a:p>
-            <a:pPr marL="0" indent="0" algn="ctr">
-              <a:buNone/>
-            </a:pPr>
-            <a:r>
-              <a:rPr lang="en-US" sz="1500" dirty="0">
-                <a:solidFill>
-                  <a:srgbClr val="24334A"/>
-                </a:solidFill>
-                <a:latin typeface="Aptos" pitchFamily="34" charset="0"/>
-                <a:ea typeface="Aptos" pitchFamily="34" charset="-122"/>
-                <a:cs typeface="Aptos" pitchFamily="34" charset="-120"/>
-              </a:rPr>
-              <a:t>v_enc = 0.1 · (ω_left + ω_right) / 2</a:t>
-            </a:r>
-            <a:endParaRPr lang="en-US" sz="1500" dirty="0"/>
-          </a:p>
-        </p:txBody>
-      </p:sp>
-      <p:sp>
-        <p:nvSpPr>
-          <p:cNvPr id="14" name="Text 12"/>
-          <p:cNvSpPr txBox="1"/>
-          <p:nvPr/>
-        </p:nvSpPr>
-        <p:spPr>
-          <a:xfrm>
-            <a:off x="868680" y="3063240"/>
-            <a:ext cx="5102352" cy="164592"/>
-          </a:xfrm>
-          <a:prstGeom prst="rect">
-            <a:avLst/>
-          </a:prstGeom>
-          <a:noFill/>
-          <a:ln/>
-        </p:spPr>
-        <p:txBody>
-          <a:bodyPr wrap="square" lIns="0" tIns="0" rIns="0" bIns="0" rtlCol="0" anchor="ctr">
-            <a:normAutofit/>
-          </a:bodyPr>
-          <a:lstStyle/>
-          <a:p>
-            <a:pPr marL="0" indent="0" algn="ctr">
-              <a:buNone/>
-            </a:pPr>
-            <a:r>
-              <a:rPr lang="en-US" sz="980" dirty="0">
-                <a:solidFill>
-                  <a:srgbClr val="58687C"/>
-                </a:solidFill>
-                <a:latin typeface="Aptos" pitchFamily="34" charset="0"/>
-                <a:ea typeface="Aptos" pitchFamily="34" charset="-122"/>
-                <a:cs typeface="Aptos" pitchFamily="34" charset="-120"/>
-              </a:rPr>
-              <a:t>Computed only when |v_x| ≥ 0.05 m/s.</a:t>
-            </a:r>
-            <a:endParaRPr lang="en-US" sz="980" dirty="0"/>
           </a:p>
         </p:txBody>
       </p:sp>
@@ -15227,6 +15475,36 @@
           </a:p>
         </p:txBody>
       </p:sp>
+      <p:pic>
+        <p:nvPicPr>
+          <p:cNvPr id="43" name="Bilde 42">
+            <a:extLst>
+              <a:ext uri="{FF2B5EF4-FFF2-40B4-BE49-F238E27FC236}">
+                <a16:creationId xmlns:a16="http://schemas.microsoft.com/office/drawing/2014/main" id="{B12A53AA-12EF-CF9A-1560-9F05A34197B0}"/>
+              </a:ext>
+            </a:extLst>
+          </p:cNvPr>
+          <p:cNvPicPr>
+            <a:picLocks noChangeAspect="1"/>
+          </p:cNvPicPr>
+          <p:nvPr/>
+        </p:nvPicPr>
+        <p:blipFill>
+          <a:blip r:embed="rId3"/>
+          <a:stretch>
+            <a:fillRect/>
+          </a:stretch>
+        </p:blipFill>
+        <p:spPr>
+          <a:xfrm>
+            <a:off x="2371534" y="1783080"/>
+            <a:ext cx="3577971" cy="1485979"/>
+          </a:xfrm>
+          <a:prstGeom prst="rect">
+            <a:avLst/>
+          </a:prstGeom>
+        </p:spPr>
+      </p:pic>
     </p:spTree>
   </p:cSld>
   <p:clrMapOvr>
@@ -16470,8 +16748,8 @@
         </p:blipFill>
         <p:spPr>
           <a:xfrm>
-            <a:off x="2511845" y="3611880"/>
-            <a:ext cx="7137828" cy="1737360"/>
+            <a:off x="3907683" y="3282937"/>
+            <a:ext cx="6723594" cy="1636535"/>
           </a:xfrm>
           <a:prstGeom prst="rect">
             <a:avLst/>
